--- a/deliverables/travel-itinerary-pilot-report.pptx
+++ b/deliverables/travel-itinerary-pilot-report.pptx
@@ -24,6 +24,7 @@
     <p:sldId id="272" r:id="rId23"/>
     <p:sldId id="273" r:id="rId24"/>
     <p:sldId id="274" r:id="rId25"/>
+    <p:sldId id="275" r:id="rId26"/>
   </p:sldIdLst>
   <p:sldSz cx="12188952" cy="6858000" type="screen4x3"/>
   <p:notesSz cx="6858000" cy="9144000"/>
@@ -3102,7 +3103,7 @@
     <p:bg>
       <p:bgPr>
         <a:solidFill>
-          <a:srgbClr val="1A2332"/>
+          <a:srgbClr val="FAF8F4"/>
         </a:solidFill>
         <a:effectLst/>
       </p:bgPr>
@@ -3122,8 +3123,8 @@
         </p:nvSpPr>
         <p:spPr>
           <a:xfrm>
-            <a:off x="1005840" y="2011680"/>
-            <a:ext cx="10058400" cy="914400"/>
+            <a:off x="822960" y="1828800"/>
+            <a:ext cx="10515600" cy="457200"/>
           </a:xfrm>
           <a:prstGeom prst="rect">
             <a:avLst/>
@@ -3138,17 +3139,17 @@
           <a:p>
             <a:pPr algn="l">
               <a:spcAft>
-                <a:spcPts val="800"/>
+                <a:spcPts val="200"/>
               </a:spcAft>
             </a:pPr>
             <a:r>
-              <a:rPr sz="1500" b="1">
+              <a:rPr sz="1200" b="1">
                 <a:solidFill>
                   <a:srgbClr val="B4632A"/>
                 </a:solidFill>
                 <a:latin typeface="Calibri"/>
               </a:rPr>
-              <a:t>TRAVEL ITINERARY PILOT</a:t>
+              <a:t>RESEARCH FINDINGS  ·  2026-09-16</a:t>
             </a:r>
           </a:p>
         </p:txBody>
@@ -3161,8 +3162,8 @@
         </p:nvSpPr>
         <p:spPr>
           <a:xfrm>
-            <a:off x="1005840" y="2788920"/>
-            <a:ext cx="822960" cy="54864"/>
+            <a:off x="822960" y="2212848"/>
+            <a:ext cx="640080" cy="41148"/>
           </a:xfrm>
           <a:prstGeom prst="rect">
             <a:avLst/>
@@ -3204,8 +3205,8 @@
         </p:nvSpPr>
         <p:spPr>
           <a:xfrm>
-            <a:off x="1005840" y="3017520"/>
-            <a:ext cx="10058400" cy="2011680"/>
+            <a:off x="822960" y="2468880"/>
+            <a:ext cx="10515600" cy="1828800"/>
           </a:xfrm>
           <a:prstGeom prst="rect">
             <a:avLst/>
@@ -3220,18 +3221,33 @@
           <a:p>
             <a:pPr algn="l">
               <a:spcAft>
-                <a:spcPts val="1000"/>
+                <a:spcPts val="600"/>
               </a:spcAft>
             </a:pPr>
             <a:r>
-              <a:rPr sz="4400" b="0">
+              <a:rPr sz="4000" b="0">
                 <a:solidFill>
-                  <a:srgbClr val="FFFFFF"/>
+                  <a:srgbClr val="1A2332"/>
                 </a:solidFill>
                 <a:latin typeface="Georgia"/>
               </a:rPr>
-              <a:t>What 100 travel creators
-actually recommend</a:t>
+              <a:t>Travel Influencer Itinerary Pilot</a:t>
+            </a:r>
+          </a:p>
+          <a:p>
+            <a:pPr algn="l">
+              <a:spcAft>
+                <a:spcPts val="1400"/>
+              </a:spcAft>
+            </a:pPr>
+            <a:r>
+              <a:rPr sz="4000" b="0">
+                <a:solidFill>
+                  <a:srgbClr val="1A2332"/>
+                </a:solidFill>
+                <a:latin typeface="Georgia"/>
+              </a:rPr>
+              <a:t>Research Findings</a:t>
             </a:r>
           </a:p>
         </p:txBody>
@@ -3244,8 +3260,8 @@
         </p:nvSpPr>
         <p:spPr>
           <a:xfrm>
-            <a:off x="1005840" y="5029200"/>
-            <a:ext cx="10058400" cy="914400"/>
+            <a:off x="822960" y="5120640"/>
+            <a:ext cx="10515600" cy="914400"/>
           </a:xfrm>
           <a:prstGeom prst="rect">
             <a:avLst/>
@@ -3264,13 +3280,13 @@
               </a:spcAft>
             </a:pPr>
             <a:r>
-              <a:rPr sz="1500" b="0">
+              <a:rPr sz="1400" b="0">
                 <a:solidFill>
-                  <a:srgbClr val="B9C0CC"/>
+                  <a:srgbClr val="5C6678"/>
                 </a:solidFill>
                 <a:latin typeface="Calibri"/>
               </a:rPr>
-              <a:t>An evidence-only information deck  •  September 2026</a:t>
+              <a:t>Scope: 100 travel creators (50 TikTok, 50 Instagram) and the 94 itineraries extracted from their public sources, stored in a queryable database with a per-itinerary verification record.</a:t>
             </a:r>
           </a:p>
         </p:txBody>
@@ -3309,7 +3325,7 @@
                 </a:solidFill>
                 <a:latin typeface="Calibri"/>
               </a:rPr>
-              <a:t>Travel Itinerary Pilot  •  Information deck  •  1 / 19</a:t>
+              <a:t>Travel Influencer Itinerary Pilot — Research Findings  •  1 / 20</a:t>
             </a:r>
           </a:p>
         </p:txBody>
@@ -3323,6 +3339,2334 @@
 </file>
 
 <file path=ppt/slides/slide10.xml><?xml version="1.0" encoding="utf-8"?>
+<p:sld xmlns:a="http://schemas.openxmlformats.org/drawingml/2006/main" xmlns:p="http://schemas.openxmlformats.org/presentationml/2006/main" xmlns:r="http://schemas.openxmlformats.org/officeDocument/2006/relationships">
+  <p:cSld>
+    <p:bg>
+      <p:bgPr>
+        <a:solidFill>
+          <a:srgbClr val="FAF8F4"/>
+        </a:solidFill>
+        <a:effectLst/>
+      </p:bgPr>
+    </p:bg>
+    <p:spTree>
+      <p:nvGrpSpPr>
+        <p:cNvPr id="1" name=""/>
+        <p:cNvGrpSpPr/>
+        <p:nvPr/>
+      </p:nvGrpSpPr>
+      <p:grpSpPr/>
+      <p:sp>
+        <p:nvSpPr>
+          <p:cNvPr id="2" name="TextBox 1"/>
+          <p:cNvSpPr txBox="1"/>
+          <p:nvPr/>
+        </p:nvSpPr>
+        <p:spPr>
+          <a:xfrm>
+            <a:off x="822960" y="411480"/>
+            <a:ext cx="10515600" cy="457200"/>
+          </a:xfrm>
+          <a:prstGeom prst="rect">
+            <a:avLst/>
+          </a:prstGeom>
+          <a:noFill/>
+        </p:spPr>
+        <p:txBody>
+          <a:bodyPr wrap="square">
+            <a:spAutoFit/>
+          </a:bodyPr>
+          <a:lstStyle/>
+          <a:p>
+            <a:pPr algn="l">
+              <a:spcAft>
+                <a:spcPts val="200"/>
+              </a:spcAft>
+            </a:pPr>
+            <a:r>
+              <a:rPr sz="1200" b="1">
+                <a:solidFill>
+                  <a:srgbClr val="B4632A"/>
+                </a:solidFill>
+                <a:latin typeface="Calibri"/>
+              </a:rPr>
+              <a:t>APPENDIX A — INFLUENCER DIRECTORY (1 OF 5)</a:t>
+            </a:r>
+          </a:p>
+        </p:txBody>
+      </p:sp>
+      <p:sp>
+        <p:nvSpPr>
+          <p:cNvPr id="3" name="Rectangle 2"/>
+          <p:cNvSpPr/>
+          <p:nvPr/>
+        </p:nvSpPr>
+        <p:spPr>
+          <a:xfrm>
+            <a:off x="822960" y="795528"/>
+            <a:ext cx="640080" cy="41148"/>
+          </a:xfrm>
+          <a:prstGeom prst="rect">
+            <a:avLst/>
+          </a:prstGeom>
+          <a:solidFill>
+            <a:srgbClr val="B4632A"/>
+          </a:solidFill>
+          <a:ln>
+            <a:noFill/>
+          </a:ln>
+        </p:spPr>
+        <p:style>
+          <a:lnRef idx="1">
+            <a:schemeClr val="accent1"/>
+          </a:lnRef>
+          <a:fillRef idx="3">
+            <a:schemeClr val="accent1"/>
+          </a:fillRef>
+          <a:effectRef idx="2">
+            <a:schemeClr val="accent1"/>
+          </a:effectRef>
+          <a:fontRef idx="minor">
+            <a:schemeClr val="lt1"/>
+          </a:fontRef>
+        </p:style>
+        <p:txBody>
+          <a:bodyPr rtlCol="0" anchor="ctr"/>
+          <a:lstStyle/>
+          <a:p>
+            <a:pPr algn="ctr"/>
+          </a:p>
+        </p:txBody>
+      </p:sp>
+      <p:sp>
+        <p:nvSpPr>
+          <p:cNvPr id="4" name="TextBox 3"/>
+          <p:cNvSpPr txBox="1"/>
+          <p:nvPr/>
+        </p:nvSpPr>
+        <p:spPr>
+          <a:xfrm>
+            <a:off x="822960" y="960120"/>
+            <a:ext cx="10515600" cy="1097280"/>
+          </a:xfrm>
+          <a:prstGeom prst="rect">
+            <a:avLst/>
+          </a:prstGeom>
+          <a:noFill/>
+        </p:spPr>
+        <p:txBody>
+          <a:bodyPr wrap="square">
+            <a:spAutoFit/>
+          </a:bodyPr>
+          <a:lstStyle/>
+          <a:p>
+            <a:pPr algn="l">
+              <a:spcAft>
+                <a:spcPts val="400"/>
+              </a:spcAft>
+            </a:pPr>
+            <a:r>
+              <a:rPr sz="2800" b="0">
+                <a:solidFill>
+                  <a:srgbClr val="1A2332"/>
+                </a:solidFill>
+                <a:latin typeface="Georgia"/>
+              </a:rPr>
+              <a:t>The 100 creators</a:t>
+            </a:r>
+          </a:p>
+        </p:txBody>
+      </p:sp>
+      <p:graphicFrame>
+        <p:nvGraphicFramePr>
+          <p:cNvPr id="5" name="Table 4"/>
+          <p:cNvGraphicFramePr>
+            <a:graphicFrameLocks noGrp="1"/>
+          </p:cNvGraphicFramePr>
+          <p:nvPr/>
+        </p:nvGraphicFramePr>
+        <p:xfrm>
+          <a:off x="822960" y="2011680"/>
+          <a:ext cx="10515600" cy="3552444"/>
+        </p:xfrm>
+        <a:graphic>
+          <a:graphicData uri="http://schemas.openxmlformats.org/drawingml/2006/table">
+            <a:tbl>
+              <a:tblPr firstRow="1" bandRow="1">
+                <a:tableStyleId>{5C22544A-7EE6-4342-B048-85BDC9FD1C3A}</a:tableStyleId>
+              </a:tblPr>
+              <a:tblGrid>
+                <a:gridCol w="3108960"/>
+                <a:gridCol w="2011680"/>
+                <a:gridCol w="2011680"/>
+                <a:gridCol w="2011680"/>
+                <a:gridCol w="1371600"/>
+              </a:tblGrid>
+              <a:tr h="169164">
+                <a:tc>
+                  <a:txBody>
+                    <a:bodyPr wrap="square"/>
+                    <a:lstStyle/>
+                    <a:p>
+                      <a:r>
+                        <a:rPr sz="1050" b="1">
+                          <a:solidFill>
+                            <a:srgbClr val="FFFFFF"/>
+                          </a:solidFill>
+                          <a:latin typeface="Calibri"/>
+                        </a:rPr>
+                        <a:t>Handle</a:t>
+                      </a:r>
+                    </a:p>
+                  </a:txBody>
+                  <a:tcPr anchor="ctr">
+                    <a:solidFill>
+                      <a:srgbClr val="1A2332"/>
+                    </a:solidFill>
+                  </a:tcPr>
+                </a:tc>
+                <a:tc>
+                  <a:txBody>
+                    <a:bodyPr wrap="square"/>
+                    <a:lstStyle/>
+                    <a:p>
+                      <a:r>
+                        <a:rPr sz="1050" b="1">
+                          <a:solidFill>
+                            <a:srgbClr val="FFFFFF"/>
+                          </a:solidFill>
+                          <a:latin typeface="Calibri"/>
+                        </a:rPr>
+                        <a:t>Platform</a:t>
+                      </a:r>
+                    </a:p>
+                  </a:txBody>
+                  <a:tcPr anchor="ctr">
+                    <a:solidFill>
+                      <a:srgbClr val="1A2332"/>
+                    </a:solidFill>
+                  </a:tcPr>
+                </a:tc>
+                <a:tc>
+                  <a:txBody>
+                    <a:bodyPr wrap="square"/>
+                    <a:lstStyle/>
+                    <a:p>
+                      <a:r>
+                        <a:rPr sz="1050" b="1">
+                          <a:solidFill>
+                            <a:srgbClr val="FFFFFF"/>
+                          </a:solidFill>
+                          <a:latin typeface="Calibri"/>
+                        </a:rPr>
+                        <a:t>Followers</a:t>
+                      </a:r>
+                    </a:p>
+                  </a:txBody>
+                  <a:tcPr anchor="ctr">
+                    <a:solidFill>
+                      <a:srgbClr val="1A2332"/>
+                    </a:solidFill>
+                  </a:tcPr>
+                </a:tc>
+                <a:tc>
+                  <a:txBody>
+                    <a:bodyPr wrap="square"/>
+                    <a:lstStyle/>
+                    <a:p>
+                      <a:r>
+                        <a:rPr sz="1050" b="1">
+                          <a:solidFill>
+                            <a:srgbClr val="FFFFFF"/>
+                          </a:solidFill>
+                          <a:latin typeface="Calibri"/>
+                        </a:rPr>
+                        <a:t>Niche</a:t>
+                      </a:r>
+                    </a:p>
+                  </a:txBody>
+                  <a:tcPr anchor="ctr">
+                    <a:solidFill>
+                      <a:srgbClr val="1A2332"/>
+                    </a:solidFill>
+                  </a:tcPr>
+                </a:tc>
+                <a:tc>
+                  <a:txBody>
+                    <a:bodyPr wrap="square"/>
+                    <a:lstStyle/>
+                    <a:p>
+                      <a:r>
+                        <a:rPr sz="1050" b="1">
+                          <a:solidFill>
+                            <a:srgbClr val="FFFFFF"/>
+                          </a:solidFill>
+                          <a:latin typeface="Calibri"/>
+                        </a:rPr>
+                        <a:t>Itineraries</a:t>
+                      </a:r>
+                    </a:p>
+                  </a:txBody>
+                  <a:tcPr anchor="ctr">
+                    <a:solidFill>
+                      <a:srgbClr val="1A2332"/>
+                    </a:solidFill>
+                  </a:tcPr>
+                </a:tc>
+              </a:tr>
+              <a:tr h="169164">
+                <a:tc>
+                  <a:txBody>
+                    <a:bodyPr wrap="square"/>
+                    <a:lstStyle/>
+                    <a:p>
+                      <a:r>
+                        <a:rPr sz="1050">
+                          <a:solidFill>
+                            <a:srgbClr val="1A2332"/>
+                          </a:solidFill>
+                          <a:latin typeface="Calibri"/>
+                        </a:rPr>
+                        <a:t>@adventurouskate</a:t>
+                      </a:r>
+                    </a:p>
+                  </a:txBody>
+                  <a:tcPr anchor="ctr" marL="73152"/>
+                </a:tc>
+                <a:tc>
+                  <a:txBody>
+                    <a:bodyPr wrap="square"/>
+                    <a:lstStyle/>
+                    <a:p>
+                      <a:r>
+                        <a:rPr sz="1050">
+                          <a:solidFill>
+                            <a:srgbClr val="1A2332"/>
+                          </a:solidFill>
+                          <a:latin typeface="Calibri"/>
+                        </a:rPr>
+                        <a:t>instagram</a:t>
+                      </a:r>
+                    </a:p>
+                  </a:txBody>
+                  <a:tcPr anchor="ctr" marL="73152"/>
+                </a:tc>
+                <a:tc>
+                  <a:txBody>
+                    <a:bodyPr wrap="square"/>
+                    <a:lstStyle/>
+                    <a:p>
+                      <a:r>
+                        <a:rPr sz="1050">
+                          <a:solidFill>
+                            <a:srgbClr val="1A2332"/>
+                          </a:solidFill>
+                          <a:latin typeface="Calibri"/>
+                        </a:rPr>
+                        <a:t>189K</a:t>
+                      </a:r>
+                    </a:p>
+                  </a:txBody>
+                  <a:tcPr anchor="ctr" marL="73152"/>
+                </a:tc>
+                <a:tc>
+                  <a:txBody>
+                    <a:bodyPr wrap="square"/>
+                    <a:lstStyle/>
+                    <a:p>
+                      <a:r>
+                        <a:rPr sz="1050">
+                          <a:solidFill>
+                            <a:srgbClr val="1A2332"/>
+                          </a:solidFill>
+                          <a:latin typeface="Calibri"/>
+                        </a:rPr>
+                        <a:t>solo</a:t>
+                      </a:r>
+                    </a:p>
+                  </a:txBody>
+                  <a:tcPr anchor="ctr" marL="73152"/>
+                </a:tc>
+                <a:tc>
+                  <a:txBody>
+                    <a:bodyPr wrap="square"/>
+                    <a:lstStyle/>
+                    <a:p>
+                      <a:r>
+                        <a:rPr sz="1050">
+                          <a:solidFill>
+                            <a:srgbClr val="1A2332"/>
+                          </a:solidFill>
+                          <a:latin typeface="Calibri"/>
+                        </a:rPr>
+                        <a:t>2</a:t>
+                      </a:r>
+                    </a:p>
+                  </a:txBody>
+                  <a:tcPr anchor="ctr" marL="73152"/>
+                </a:tc>
+              </a:tr>
+              <a:tr h="169164">
+                <a:tc>
+                  <a:txBody>
+                    <a:bodyPr wrap="square"/>
+                    <a:lstStyle/>
+                    <a:p>
+                      <a:r>
+                        <a:rPr sz="1050">
+                          <a:solidFill>
+                            <a:srgbClr val="1A2332"/>
+                          </a:solidFill>
+                          <a:latin typeface="Calibri"/>
+                        </a:rPr>
+                        <a:t>@africansafari</a:t>
+                      </a:r>
+                    </a:p>
+                  </a:txBody>
+                  <a:tcPr anchor="ctr" marL="73152">
+                    <a:solidFill>
+                      <a:srgbClr val="F1EBDF"/>
+                    </a:solidFill>
+                  </a:tcPr>
+                </a:tc>
+                <a:tc>
+                  <a:txBody>
+                    <a:bodyPr wrap="square"/>
+                    <a:lstStyle/>
+                    <a:p>
+                      <a:r>
+                        <a:rPr sz="1050">
+                          <a:solidFill>
+                            <a:srgbClr val="1A2332"/>
+                          </a:solidFill>
+                          <a:latin typeface="Calibri"/>
+                        </a:rPr>
+                        <a:t>instagram</a:t>
+                      </a:r>
+                    </a:p>
+                  </a:txBody>
+                  <a:tcPr anchor="ctr" marL="73152">
+                    <a:solidFill>
+                      <a:srgbClr val="F1EBDF"/>
+                    </a:solidFill>
+                  </a:tcPr>
+                </a:tc>
+                <a:tc>
+                  <a:txBody>
+                    <a:bodyPr wrap="square"/>
+                    <a:lstStyle/>
+                    <a:p>
+                      <a:r>
+                        <a:rPr sz="1050">
+                          <a:solidFill>
+                            <a:srgbClr val="1A2332"/>
+                          </a:solidFill>
+                          <a:latin typeface="Calibri"/>
+                        </a:rPr>
+                        <a:t>234K</a:t>
+                      </a:r>
+                    </a:p>
+                  </a:txBody>
+                  <a:tcPr anchor="ctr" marL="73152">
+                    <a:solidFill>
+                      <a:srgbClr val="F1EBDF"/>
+                    </a:solidFill>
+                  </a:tcPr>
+                </a:tc>
+                <a:tc>
+                  <a:txBody>
+                    <a:bodyPr wrap="square"/>
+                    <a:lstStyle/>
+                    <a:p>
+                      <a:r>
+                        <a:rPr sz="1050">
+                          <a:solidFill>
+                            <a:srgbClr val="1A2332"/>
+                          </a:solidFill>
+                          <a:latin typeface="Calibri"/>
+                        </a:rPr>
+                        <a:t>adventure</a:t>
+                      </a:r>
+                    </a:p>
+                  </a:txBody>
+                  <a:tcPr anchor="ctr" marL="73152">
+                    <a:solidFill>
+                      <a:srgbClr val="F1EBDF"/>
+                    </a:solidFill>
+                  </a:tcPr>
+                </a:tc>
+                <a:tc>
+                  <a:txBody>
+                    <a:bodyPr wrap="square"/>
+                    <a:lstStyle/>
+                    <a:p>
+                      <a:r>
+                        <a:rPr sz="1050">
+                          <a:solidFill>
+                            <a:srgbClr val="1A2332"/>
+                          </a:solidFill>
+                          <a:latin typeface="Calibri"/>
+                        </a:rPr>
+                        <a:t>0</a:t>
+                      </a:r>
+                    </a:p>
+                  </a:txBody>
+                  <a:tcPr anchor="ctr" marL="73152">
+                    <a:solidFill>
+                      <a:srgbClr val="F1EBDF"/>
+                    </a:solidFill>
+                  </a:tcPr>
+                </a:tc>
+              </a:tr>
+              <a:tr h="169164">
+                <a:tc>
+                  <a:txBody>
+                    <a:bodyPr wrap="square"/>
+                    <a:lstStyle/>
+                    <a:p>
+                      <a:r>
+                        <a:rPr sz="1050">
+                          <a:solidFill>
+                            <a:srgbClr val="1A2332"/>
+                          </a:solidFill>
+                          <a:latin typeface="Calibri"/>
+                        </a:rPr>
+                        <a:t>@asiatravel</a:t>
+                      </a:r>
+                    </a:p>
+                  </a:txBody>
+                  <a:tcPr anchor="ctr" marL="73152"/>
+                </a:tc>
+                <a:tc>
+                  <a:txBody>
+                    <a:bodyPr wrap="square"/>
+                    <a:lstStyle/>
+                    <a:p>
+                      <a:r>
+                        <a:rPr sz="1050">
+                          <a:solidFill>
+                            <a:srgbClr val="1A2332"/>
+                          </a:solidFill>
+                          <a:latin typeface="Calibri"/>
+                        </a:rPr>
+                        <a:t>instagram</a:t>
+                      </a:r>
+                    </a:p>
+                  </a:txBody>
+                  <a:tcPr anchor="ctr" marL="73152"/>
+                </a:tc>
+                <a:tc>
+                  <a:txBody>
+                    <a:bodyPr wrap="square"/>
+                    <a:lstStyle/>
+                    <a:p>
+                      <a:r>
+                        <a:rPr sz="1050">
+                          <a:solidFill>
+                            <a:srgbClr val="1A2332"/>
+                          </a:solidFill>
+                          <a:latin typeface="Calibri"/>
+                        </a:rPr>
+                        <a:t>567K</a:t>
+                      </a:r>
+                    </a:p>
+                  </a:txBody>
+                  <a:tcPr anchor="ctr" marL="73152"/>
+                </a:tc>
+                <a:tc>
+                  <a:txBody>
+                    <a:bodyPr wrap="square"/>
+                    <a:lstStyle/>
+                    <a:p>
+                      <a:r>
+                        <a:rPr sz="1050">
+                          <a:solidFill>
+                            <a:srgbClr val="1A2332"/>
+                          </a:solidFill>
+                          <a:latin typeface="Calibri"/>
+                        </a:rPr>
+                        <a:t>cultural</a:t>
+                      </a:r>
+                    </a:p>
+                  </a:txBody>
+                  <a:tcPr anchor="ctr" marL="73152"/>
+                </a:tc>
+                <a:tc>
+                  <a:txBody>
+                    <a:bodyPr wrap="square"/>
+                    <a:lstStyle/>
+                    <a:p>
+                      <a:r>
+                        <a:rPr sz="1050">
+                          <a:solidFill>
+                            <a:srgbClr val="1A2332"/>
+                          </a:solidFill>
+                          <a:latin typeface="Calibri"/>
+                        </a:rPr>
+                        <a:t>1</a:t>
+                      </a:r>
+                    </a:p>
+                  </a:txBody>
+                  <a:tcPr anchor="ctr" marL="73152"/>
+                </a:tc>
+              </a:tr>
+              <a:tr h="169164">
+                <a:tc>
+                  <a:txBody>
+                    <a:bodyPr wrap="square"/>
+                    <a:lstStyle/>
+                    <a:p>
+                      <a:r>
+                        <a:rPr sz="1050">
+                          <a:solidFill>
+                            <a:srgbClr val="1A2332"/>
+                          </a:solidFill>
+                          <a:latin typeface="Calibri"/>
+                        </a:rPr>
+                        <a:t>@backpackersteve</a:t>
+                      </a:r>
+                    </a:p>
+                  </a:txBody>
+                  <a:tcPr anchor="ctr" marL="73152">
+                    <a:solidFill>
+                      <a:srgbClr val="F1EBDF"/>
+                    </a:solidFill>
+                  </a:tcPr>
+                </a:tc>
+                <a:tc>
+                  <a:txBody>
+                    <a:bodyPr wrap="square"/>
+                    <a:lstStyle/>
+                    <a:p>
+                      <a:r>
+                        <a:rPr sz="1050">
+                          <a:solidFill>
+                            <a:srgbClr val="1A2332"/>
+                          </a:solidFill>
+                          <a:latin typeface="Calibri"/>
+                        </a:rPr>
+                        <a:t>instagram</a:t>
+                      </a:r>
+                    </a:p>
+                  </a:txBody>
+                  <a:tcPr anchor="ctr" marL="73152">
+                    <a:solidFill>
+                      <a:srgbClr val="F1EBDF"/>
+                    </a:solidFill>
+                  </a:tcPr>
+                </a:tc>
+                <a:tc>
+                  <a:txBody>
+                    <a:bodyPr wrap="square"/>
+                    <a:lstStyle/>
+                    <a:p>
+                      <a:r>
+                        <a:rPr sz="1050">
+                          <a:solidFill>
+                            <a:srgbClr val="1A2332"/>
+                          </a:solidFill>
+                          <a:latin typeface="Calibri"/>
+                        </a:rPr>
+                        <a:t>189K</a:t>
+                      </a:r>
+                    </a:p>
+                  </a:txBody>
+                  <a:tcPr anchor="ctr" marL="73152">
+                    <a:solidFill>
+                      <a:srgbClr val="F1EBDF"/>
+                    </a:solidFill>
+                  </a:tcPr>
+                </a:tc>
+                <a:tc>
+                  <a:txBody>
+                    <a:bodyPr wrap="square"/>
+                    <a:lstStyle/>
+                    <a:p>
+                      <a:r>
+                        <a:rPr sz="1050">
+                          <a:solidFill>
+                            <a:srgbClr val="1A2332"/>
+                          </a:solidFill>
+                          <a:latin typeface="Calibri"/>
+                        </a:rPr>
+                        <a:t>budget</a:t>
+                      </a:r>
+                    </a:p>
+                  </a:txBody>
+                  <a:tcPr anchor="ctr" marL="73152">
+                    <a:solidFill>
+                      <a:srgbClr val="F1EBDF"/>
+                    </a:solidFill>
+                  </a:tcPr>
+                </a:tc>
+                <a:tc>
+                  <a:txBody>
+                    <a:bodyPr wrap="square"/>
+                    <a:lstStyle/>
+                    <a:p>
+                      <a:r>
+                        <a:rPr sz="1050">
+                          <a:solidFill>
+                            <a:srgbClr val="1A2332"/>
+                          </a:solidFill>
+                          <a:latin typeface="Calibri"/>
+                        </a:rPr>
+                        <a:t>2</a:t>
+                      </a:r>
+                    </a:p>
+                  </a:txBody>
+                  <a:tcPr anchor="ctr" marL="73152">
+                    <a:solidFill>
+                      <a:srgbClr val="F1EBDF"/>
+                    </a:solidFill>
+                  </a:tcPr>
+                </a:tc>
+              </a:tr>
+              <a:tr h="169164">
+                <a:tc>
+                  <a:txBody>
+                    <a:bodyPr wrap="square"/>
+                    <a:lstStyle/>
+                    <a:p>
+                      <a:r>
+                        <a:rPr sz="1050">
+                          <a:solidFill>
+                            <a:srgbClr val="1A2332"/>
+                          </a:solidFill>
+                          <a:latin typeface="Calibri"/>
+                        </a:rPr>
+                        <a:t>@braidenrex</a:t>
+                      </a:r>
+                    </a:p>
+                  </a:txBody>
+                  <a:tcPr anchor="ctr" marL="73152"/>
+                </a:tc>
+                <a:tc>
+                  <a:txBody>
+                    <a:bodyPr wrap="square"/>
+                    <a:lstStyle/>
+                    <a:p>
+                      <a:r>
+                        <a:rPr sz="1050">
+                          <a:solidFill>
+                            <a:srgbClr val="1A2332"/>
+                          </a:solidFill>
+                          <a:latin typeface="Calibri"/>
+                        </a:rPr>
+                        <a:t>instagram</a:t>
+                      </a:r>
+                    </a:p>
+                  </a:txBody>
+                  <a:tcPr anchor="ctr" marL="73152"/>
+                </a:tc>
+                <a:tc>
+                  <a:txBody>
+                    <a:bodyPr wrap="square"/>
+                    <a:lstStyle/>
+                    <a:p>
+                      <a:r>
+                        <a:rPr sz="1050">
+                          <a:solidFill>
+                            <a:srgbClr val="1A2332"/>
+                          </a:solidFill>
+                          <a:latin typeface="Calibri"/>
+                        </a:rPr>
+                        <a:t>789K</a:t>
+                      </a:r>
+                    </a:p>
+                  </a:txBody>
+                  <a:tcPr anchor="ctr" marL="73152"/>
+                </a:tc>
+                <a:tc>
+                  <a:txBody>
+                    <a:bodyPr wrap="square"/>
+                    <a:lstStyle/>
+                    <a:p>
+                      <a:r>
+                        <a:rPr sz="1050">
+                          <a:solidFill>
+                            <a:srgbClr val="1A2332"/>
+                          </a:solidFill>
+                          <a:latin typeface="Calibri"/>
+                        </a:rPr>
+                        <a:t>adventure</a:t>
+                      </a:r>
+                    </a:p>
+                  </a:txBody>
+                  <a:tcPr anchor="ctr" marL="73152"/>
+                </a:tc>
+                <a:tc>
+                  <a:txBody>
+                    <a:bodyPr wrap="square"/>
+                    <a:lstStyle/>
+                    <a:p>
+                      <a:r>
+                        <a:rPr sz="1050">
+                          <a:solidFill>
+                            <a:srgbClr val="1A2332"/>
+                          </a:solidFill>
+                          <a:latin typeface="Calibri"/>
+                        </a:rPr>
+                        <a:t>0</a:t>
+                      </a:r>
+                    </a:p>
+                  </a:txBody>
+                  <a:tcPr anchor="ctr" marL="73152"/>
+                </a:tc>
+              </a:tr>
+              <a:tr h="169164">
+                <a:tc>
+                  <a:txBody>
+                    <a:bodyPr wrap="square"/>
+                    <a:lstStyle/>
+                    <a:p>
+                      <a:r>
+                        <a:rPr sz="1050">
+                          <a:solidFill>
+                            <a:srgbClr val="1A2332"/>
+                          </a:solidFill>
+                          <a:latin typeface="Calibri"/>
+                        </a:rPr>
+                        <a:t>@budgettraveller</a:t>
+                      </a:r>
+                    </a:p>
+                  </a:txBody>
+                  <a:tcPr anchor="ctr" marL="73152">
+                    <a:solidFill>
+                      <a:srgbClr val="F1EBDF"/>
+                    </a:solidFill>
+                  </a:tcPr>
+                </a:tc>
+                <a:tc>
+                  <a:txBody>
+                    <a:bodyPr wrap="square"/>
+                    <a:lstStyle/>
+                    <a:p>
+                      <a:r>
+                        <a:rPr sz="1050">
+                          <a:solidFill>
+                            <a:srgbClr val="1A2332"/>
+                          </a:solidFill>
+                          <a:latin typeface="Calibri"/>
+                        </a:rPr>
+                        <a:t>instagram</a:t>
+                      </a:r>
+                    </a:p>
+                  </a:txBody>
+                  <a:tcPr anchor="ctr" marL="73152">
+                    <a:solidFill>
+                      <a:srgbClr val="F1EBDF"/>
+                    </a:solidFill>
+                  </a:tcPr>
+                </a:tc>
+                <a:tc>
+                  <a:txBody>
+                    <a:bodyPr wrap="square"/>
+                    <a:lstStyle/>
+                    <a:p>
+                      <a:r>
+                        <a:rPr sz="1050">
+                          <a:solidFill>
+                            <a:srgbClr val="1A2332"/>
+                          </a:solidFill>
+                          <a:latin typeface="Calibri"/>
+                        </a:rPr>
+                        <a:t>345K</a:t>
+                      </a:r>
+                    </a:p>
+                  </a:txBody>
+                  <a:tcPr anchor="ctr" marL="73152">
+                    <a:solidFill>
+                      <a:srgbClr val="F1EBDF"/>
+                    </a:solidFill>
+                  </a:tcPr>
+                </a:tc>
+                <a:tc>
+                  <a:txBody>
+                    <a:bodyPr wrap="square"/>
+                    <a:lstStyle/>
+                    <a:p>
+                      <a:r>
+                        <a:rPr sz="1050">
+                          <a:solidFill>
+                            <a:srgbClr val="1A2332"/>
+                          </a:solidFill>
+                          <a:latin typeface="Calibri"/>
+                        </a:rPr>
+                        <a:t>budget</a:t>
+                      </a:r>
+                    </a:p>
+                  </a:txBody>
+                  <a:tcPr anchor="ctr" marL="73152">
+                    <a:solidFill>
+                      <a:srgbClr val="F1EBDF"/>
+                    </a:solidFill>
+                  </a:tcPr>
+                </a:tc>
+                <a:tc>
+                  <a:txBody>
+                    <a:bodyPr wrap="square"/>
+                    <a:lstStyle/>
+                    <a:p>
+                      <a:r>
+                        <a:rPr sz="1050">
+                          <a:solidFill>
+                            <a:srgbClr val="1A2332"/>
+                          </a:solidFill>
+                          <a:latin typeface="Calibri"/>
+                        </a:rPr>
+                        <a:t>3</a:t>
+                      </a:r>
+                    </a:p>
+                  </a:txBody>
+                  <a:tcPr anchor="ctr" marL="73152">
+                    <a:solidFill>
+                      <a:srgbClr val="F1EBDF"/>
+                    </a:solidFill>
+                  </a:tcPr>
+                </a:tc>
+              </a:tr>
+              <a:tr h="169164">
+                <a:tc>
+                  <a:txBody>
+                    <a:bodyPr wrap="square"/>
+                    <a:lstStyle/>
+                    <a:p>
+                      <a:r>
+                        <a:rPr sz="1050">
+                          <a:solidFill>
+                            <a:srgbClr val="1A2332"/>
+                          </a:solidFill>
+                          <a:latin typeface="Calibri"/>
+                        </a:rPr>
+                        <a:t>@calsnape</a:t>
+                      </a:r>
+                    </a:p>
+                  </a:txBody>
+                  <a:tcPr anchor="ctr" marL="73152"/>
+                </a:tc>
+                <a:tc>
+                  <a:txBody>
+                    <a:bodyPr wrap="square"/>
+                    <a:lstStyle/>
+                    <a:p>
+                      <a:r>
+                        <a:rPr sz="1050">
+                          <a:solidFill>
+                            <a:srgbClr val="1A2332"/>
+                          </a:solidFill>
+                          <a:latin typeface="Calibri"/>
+                        </a:rPr>
+                        <a:t>instagram</a:t>
+                      </a:r>
+                    </a:p>
+                  </a:txBody>
+                  <a:tcPr anchor="ctr" marL="73152"/>
+                </a:tc>
+                <a:tc>
+                  <a:txBody>
+                    <a:bodyPr wrap="square"/>
+                    <a:lstStyle/>
+                    <a:p>
+                      <a:r>
+                        <a:rPr sz="1050">
+                          <a:solidFill>
+                            <a:srgbClr val="1A2332"/>
+                          </a:solidFill>
+                          <a:latin typeface="Calibri"/>
+                        </a:rPr>
+                        <a:t>over 800K</a:t>
+                      </a:r>
+                    </a:p>
+                  </a:txBody>
+                  <a:tcPr anchor="ctr" marL="73152"/>
+                </a:tc>
+                <a:tc>
+                  <a:txBody>
+                    <a:bodyPr wrap="square"/>
+                    <a:lstStyle/>
+                    <a:p>
+                      <a:r>
+                        <a:rPr sz="1050">
+                          <a:solidFill>
+                            <a:srgbClr val="1A2332"/>
+                          </a:solidFill>
+                          <a:latin typeface="Calibri"/>
+                        </a:rPr>
+                        <a:t>adventure</a:t>
+                      </a:r>
+                    </a:p>
+                  </a:txBody>
+                  <a:tcPr anchor="ctr" marL="73152"/>
+                </a:tc>
+                <a:tc>
+                  <a:txBody>
+                    <a:bodyPr wrap="square"/>
+                    <a:lstStyle/>
+                    <a:p>
+                      <a:r>
+                        <a:rPr sz="1050">
+                          <a:solidFill>
+                            <a:srgbClr val="1A2332"/>
+                          </a:solidFill>
+                          <a:latin typeface="Calibri"/>
+                        </a:rPr>
+                        <a:t>0</a:t>
+                      </a:r>
+                    </a:p>
+                  </a:txBody>
+                  <a:tcPr anchor="ctr" marL="73152"/>
+                </a:tc>
+              </a:tr>
+              <a:tr h="169164">
+                <a:tc>
+                  <a:txBody>
+                    <a:bodyPr wrap="square"/>
+                    <a:lstStyle/>
+                    <a:p>
+                      <a:r>
+                        <a:rPr sz="1050">
+                          <a:solidFill>
+                            <a:srgbClr val="1A2332"/>
+                          </a:solidFill>
+                          <a:latin typeface="Calibri"/>
+                        </a:rPr>
+                        <a:t>@cheaprvliving</a:t>
+                      </a:r>
+                    </a:p>
+                  </a:txBody>
+                  <a:tcPr anchor="ctr" marL="73152">
+                    <a:solidFill>
+                      <a:srgbClr val="F1EBDF"/>
+                    </a:solidFill>
+                  </a:tcPr>
+                </a:tc>
+                <a:tc>
+                  <a:txBody>
+                    <a:bodyPr wrap="square"/>
+                    <a:lstStyle/>
+                    <a:p>
+                      <a:r>
+                        <a:rPr sz="1050">
+                          <a:solidFill>
+                            <a:srgbClr val="1A2332"/>
+                          </a:solidFill>
+                          <a:latin typeface="Calibri"/>
+                        </a:rPr>
+                        <a:t>instagram</a:t>
+                      </a:r>
+                    </a:p>
+                  </a:txBody>
+                  <a:tcPr anchor="ctr" marL="73152">
+                    <a:solidFill>
+                      <a:srgbClr val="F1EBDF"/>
+                    </a:solidFill>
+                  </a:tcPr>
+                </a:tc>
+                <a:tc>
+                  <a:txBody>
+                    <a:bodyPr wrap="square"/>
+                    <a:lstStyle/>
+                    <a:p>
+                      <a:r>
+                        <a:rPr sz="1050">
+                          <a:solidFill>
+                            <a:srgbClr val="1A2332"/>
+                          </a:solidFill>
+                          <a:latin typeface="Calibri"/>
+                        </a:rPr>
+                        <a:t>234K</a:t>
+                      </a:r>
+                    </a:p>
+                  </a:txBody>
+                  <a:tcPr anchor="ctr" marL="73152">
+                    <a:solidFill>
+                      <a:srgbClr val="F1EBDF"/>
+                    </a:solidFill>
+                  </a:tcPr>
+                </a:tc>
+                <a:tc>
+                  <a:txBody>
+                    <a:bodyPr wrap="square"/>
+                    <a:lstStyle/>
+                    <a:p>
+                      <a:r>
+                        <a:rPr sz="1050">
+                          <a:solidFill>
+                            <a:srgbClr val="1A2332"/>
+                          </a:solidFill>
+                          <a:latin typeface="Calibri"/>
+                        </a:rPr>
+                        <a:t>budget</a:t>
+                      </a:r>
+                    </a:p>
+                  </a:txBody>
+                  <a:tcPr anchor="ctr" marL="73152">
+                    <a:solidFill>
+                      <a:srgbClr val="F1EBDF"/>
+                    </a:solidFill>
+                  </a:tcPr>
+                </a:tc>
+                <a:tc>
+                  <a:txBody>
+                    <a:bodyPr wrap="square"/>
+                    <a:lstStyle/>
+                    <a:p>
+                      <a:r>
+                        <a:rPr sz="1050">
+                          <a:solidFill>
+                            <a:srgbClr val="1A2332"/>
+                          </a:solidFill>
+                          <a:latin typeface="Calibri"/>
+                        </a:rPr>
+                        <a:t>2</a:t>
+                      </a:r>
+                    </a:p>
+                  </a:txBody>
+                  <a:tcPr anchor="ctr" marL="73152">
+                    <a:solidFill>
+                      <a:srgbClr val="F1EBDF"/>
+                    </a:solidFill>
+                  </a:tcPr>
+                </a:tc>
+              </a:tr>
+              <a:tr h="169164">
+                <a:tc>
+                  <a:txBody>
+                    <a:bodyPr wrap="square"/>
+                    <a:lstStyle/>
+                    <a:p>
+                      <a:r>
+                        <a:rPr sz="1050">
+                          <a:solidFill>
+                            <a:srgbClr val="1A2332"/>
+                          </a:solidFill>
+                          <a:latin typeface="Calibri"/>
+                        </a:rPr>
+                        <a:t>@culturalexplorer</a:t>
+                      </a:r>
+                    </a:p>
+                  </a:txBody>
+                  <a:tcPr anchor="ctr" marL="73152"/>
+                </a:tc>
+                <a:tc>
+                  <a:txBody>
+                    <a:bodyPr wrap="square"/>
+                    <a:lstStyle/>
+                    <a:p>
+                      <a:r>
+                        <a:rPr sz="1050">
+                          <a:solidFill>
+                            <a:srgbClr val="1A2332"/>
+                          </a:solidFill>
+                          <a:latin typeface="Calibri"/>
+                        </a:rPr>
+                        <a:t>instagram</a:t>
+                      </a:r>
+                    </a:p>
+                  </a:txBody>
+                  <a:tcPr anchor="ctr" marL="73152"/>
+                </a:tc>
+                <a:tc>
+                  <a:txBody>
+                    <a:bodyPr wrap="square"/>
+                    <a:lstStyle/>
+                    <a:p>
+                      <a:r>
+                        <a:rPr sz="1050">
+                          <a:solidFill>
+                            <a:srgbClr val="1A2332"/>
+                          </a:solidFill>
+                          <a:latin typeface="Calibri"/>
+                        </a:rPr>
+                        <a:t>234K</a:t>
+                      </a:r>
+                    </a:p>
+                  </a:txBody>
+                  <a:tcPr anchor="ctr" marL="73152"/>
+                </a:tc>
+                <a:tc>
+                  <a:txBody>
+                    <a:bodyPr wrap="square"/>
+                    <a:lstStyle/>
+                    <a:p>
+                      <a:r>
+                        <a:rPr sz="1050">
+                          <a:solidFill>
+                            <a:srgbClr val="1A2332"/>
+                          </a:solidFill>
+                          <a:latin typeface="Calibri"/>
+                        </a:rPr>
+                        <a:t>cultural</a:t>
+                      </a:r>
+                    </a:p>
+                  </a:txBody>
+                  <a:tcPr anchor="ctr" marL="73152"/>
+                </a:tc>
+                <a:tc>
+                  <a:txBody>
+                    <a:bodyPr wrap="square"/>
+                    <a:lstStyle/>
+                    <a:p>
+                      <a:r>
+                        <a:rPr sz="1050">
+                          <a:solidFill>
+                            <a:srgbClr val="1A2332"/>
+                          </a:solidFill>
+                          <a:latin typeface="Calibri"/>
+                        </a:rPr>
+                        <a:t>0</a:t>
+                      </a:r>
+                    </a:p>
+                  </a:txBody>
+                  <a:tcPr anchor="ctr" marL="73152"/>
+                </a:tc>
+              </a:tr>
+              <a:tr h="169164">
+                <a:tc>
+                  <a:txBody>
+                    <a:bodyPr wrap="square"/>
+                    <a:lstStyle/>
+                    <a:p>
+                      <a:r>
+                        <a:rPr sz="1050">
+                          <a:solidFill>
+                            <a:srgbClr val="1A2332"/>
+                          </a:solidFill>
+                          <a:latin typeface="Calibri"/>
+                        </a:rPr>
+                        <a:t>@doyoutravel</a:t>
+                      </a:r>
+                    </a:p>
+                  </a:txBody>
+                  <a:tcPr anchor="ctr" marL="73152">
+                    <a:solidFill>
+                      <a:srgbClr val="F1EBDF"/>
+                    </a:solidFill>
+                  </a:tcPr>
+                </a:tc>
+                <a:tc>
+                  <a:txBody>
+                    <a:bodyPr wrap="square"/>
+                    <a:lstStyle/>
+                    <a:p>
+                      <a:r>
+                        <a:rPr sz="1050">
+                          <a:solidFill>
+                            <a:srgbClr val="1A2332"/>
+                          </a:solidFill>
+                          <a:latin typeface="Calibri"/>
+                        </a:rPr>
+                        <a:t>instagram</a:t>
+                      </a:r>
+                    </a:p>
+                  </a:txBody>
+                  <a:tcPr anchor="ctr" marL="73152">
+                    <a:solidFill>
+                      <a:srgbClr val="F1EBDF"/>
+                    </a:solidFill>
+                  </a:tcPr>
+                </a:tc>
+                <a:tc>
+                  <a:txBody>
+                    <a:bodyPr wrap="square"/>
+                    <a:lstStyle/>
+                    <a:p>
+                      <a:r>
+                        <a:rPr sz="1050">
+                          <a:solidFill>
+                            <a:srgbClr val="1A2332"/>
+                          </a:solidFill>
+                          <a:latin typeface="Calibri"/>
+                        </a:rPr>
+                        <a:t>2.9M</a:t>
+                      </a:r>
+                    </a:p>
+                  </a:txBody>
+                  <a:tcPr anchor="ctr" marL="73152">
+                    <a:solidFill>
+                      <a:srgbClr val="F1EBDF"/>
+                    </a:solidFill>
+                  </a:tcPr>
+                </a:tc>
+                <a:tc>
+                  <a:txBody>
+                    <a:bodyPr wrap="square"/>
+                    <a:lstStyle/>
+                    <a:p>
+                      <a:r>
+                        <a:rPr sz="1050">
+                          <a:solidFill>
+                            <a:srgbClr val="1A2332"/>
+                          </a:solidFill>
+                          <a:latin typeface="Calibri"/>
+                        </a:rPr>
+                        <a:t>adventure</a:t>
+                      </a:r>
+                    </a:p>
+                  </a:txBody>
+                  <a:tcPr anchor="ctr" marL="73152">
+                    <a:solidFill>
+                      <a:srgbClr val="F1EBDF"/>
+                    </a:solidFill>
+                  </a:tcPr>
+                </a:tc>
+                <a:tc>
+                  <a:txBody>
+                    <a:bodyPr wrap="square"/>
+                    <a:lstStyle/>
+                    <a:p>
+                      <a:r>
+                        <a:rPr sz="1050">
+                          <a:solidFill>
+                            <a:srgbClr val="1A2332"/>
+                          </a:solidFill>
+                          <a:latin typeface="Calibri"/>
+                        </a:rPr>
+                        <a:t>0</a:t>
+                      </a:r>
+                    </a:p>
+                  </a:txBody>
+                  <a:tcPr anchor="ctr" marL="73152">
+                    <a:solidFill>
+                      <a:srgbClr val="F1EBDF"/>
+                    </a:solidFill>
+                  </a:tcPr>
+                </a:tc>
+              </a:tr>
+              <a:tr h="169164">
+                <a:tc>
+                  <a:txBody>
+                    <a:bodyPr wrap="square"/>
+                    <a:lstStyle/>
+                    <a:p>
+                      <a:r>
+                        <a:rPr sz="1050">
+                          <a:solidFill>
+                            <a:srgbClr val="1A2332"/>
+                          </a:solidFill>
+                          <a:latin typeface="Calibri"/>
+                        </a:rPr>
+                        <a:t>@drewbinsky</a:t>
+                      </a:r>
+                    </a:p>
+                  </a:txBody>
+                  <a:tcPr anchor="ctr" marL="73152"/>
+                </a:tc>
+                <a:tc>
+                  <a:txBody>
+                    <a:bodyPr wrap="square"/>
+                    <a:lstStyle/>
+                    <a:p>
+                      <a:r>
+                        <a:rPr sz="1050">
+                          <a:solidFill>
+                            <a:srgbClr val="1A2332"/>
+                          </a:solidFill>
+                          <a:latin typeface="Calibri"/>
+                        </a:rPr>
+                        <a:t>instagram</a:t>
+                      </a:r>
+                    </a:p>
+                  </a:txBody>
+                  <a:tcPr anchor="ctr" marL="73152"/>
+                </a:tc>
+                <a:tc>
+                  <a:txBody>
+                    <a:bodyPr wrap="square"/>
+                    <a:lstStyle/>
+                    <a:p>
+                      <a:r>
+                        <a:rPr sz="1050">
+                          <a:solidFill>
+                            <a:srgbClr val="1A2332"/>
+                          </a:solidFill>
+                          <a:latin typeface="Calibri"/>
+                        </a:rPr>
+                        <a:t>2.4M</a:t>
+                      </a:r>
+                    </a:p>
+                  </a:txBody>
+                  <a:tcPr anchor="ctr" marL="73152"/>
+                </a:tc>
+                <a:tc>
+                  <a:txBody>
+                    <a:bodyPr wrap="square"/>
+                    <a:lstStyle/>
+                    <a:p>
+                      <a:r>
+                        <a:rPr sz="1050">
+                          <a:solidFill>
+                            <a:srgbClr val="1A2332"/>
+                          </a:solidFill>
+                          <a:latin typeface="Calibri"/>
+                        </a:rPr>
+                        <a:t>adventure</a:t>
+                      </a:r>
+                    </a:p>
+                  </a:txBody>
+                  <a:tcPr anchor="ctr" marL="73152"/>
+                </a:tc>
+                <a:tc>
+                  <a:txBody>
+                    <a:bodyPr wrap="square"/>
+                    <a:lstStyle/>
+                    <a:p>
+                      <a:r>
+                        <a:rPr sz="1050">
+                          <a:solidFill>
+                            <a:srgbClr val="1A2332"/>
+                          </a:solidFill>
+                          <a:latin typeface="Calibri"/>
+                        </a:rPr>
+                        <a:t>0</a:t>
+                      </a:r>
+                    </a:p>
+                  </a:txBody>
+                  <a:tcPr anchor="ctr" marL="73152"/>
+                </a:tc>
+              </a:tr>
+              <a:tr h="169164">
+                <a:tc>
+                  <a:txBody>
+                    <a:bodyPr wrap="square"/>
+                    <a:lstStyle/>
+                    <a:p>
+                      <a:r>
+                        <a:rPr sz="1050">
+                          <a:solidFill>
+                            <a:srgbClr val="1A2332"/>
+                          </a:solidFill>
+                          <a:latin typeface="Calibri"/>
+                        </a:rPr>
+                        <a:t>@emmett_sparling</a:t>
+                      </a:r>
+                    </a:p>
+                  </a:txBody>
+                  <a:tcPr anchor="ctr" marL="73152">
+                    <a:solidFill>
+                      <a:srgbClr val="F1EBDF"/>
+                    </a:solidFill>
+                  </a:tcPr>
+                </a:tc>
+                <a:tc>
+                  <a:txBody>
+                    <a:bodyPr wrap="square"/>
+                    <a:lstStyle/>
+                    <a:p>
+                      <a:r>
+                        <a:rPr sz="1050">
+                          <a:solidFill>
+                            <a:srgbClr val="1A2332"/>
+                          </a:solidFill>
+                          <a:latin typeface="Calibri"/>
+                        </a:rPr>
+                        <a:t>instagram</a:t>
+                      </a:r>
+                    </a:p>
+                  </a:txBody>
+                  <a:tcPr anchor="ctr" marL="73152">
+                    <a:solidFill>
+                      <a:srgbClr val="F1EBDF"/>
+                    </a:solidFill>
+                  </a:tcPr>
+                </a:tc>
+                <a:tc>
+                  <a:txBody>
+                    <a:bodyPr wrap="square"/>
+                    <a:lstStyle/>
+                    <a:p>
+                      <a:r>
+                        <a:rPr sz="1050">
+                          <a:solidFill>
+                            <a:srgbClr val="1A2332"/>
+                          </a:solidFill>
+                          <a:latin typeface="Calibri"/>
+                        </a:rPr>
+                        <a:t>over 800K</a:t>
+                      </a:r>
+                    </a:p>
+                  </a:txBody>
+                  <a:tcPr anchor="ctr" marL="73152">
+                    <a:solidFill>
+                      <a:srgbClr val="F1EBDF"/>
+                    </a:solidFill>
+                  </a:tcPr>
+                </a:tc>
+                <a:tc>
+                  <a:txBody>
+                    <a:bodyPr wrap="square"/>
+                    <a:lstStyle/>
+                    <a:p>
+                      <a:r>
+                        <a:rPr sz="1050">
+                          <a:solidFill>
+                            <a:srgbClr val="1A2332"/>
+                          </a:solidFill>
+                          <a:latin typeface="Calibri"/>
+                        </a:rPr>
+                        <a:t>adventure</a:t>
+                      </a:r>
+                    </a:p>
+                  </a:txBody>
+                  <a:tcPr anchor="ctr" marL="73152">
+                    <a:solidFill>
+                      <a:srgbClr val="F1EBDF"/>
+                    </a:solidFill>
+                  </a:tcPr>
+                </a:tc>
+                <a:tc>
+                  <a:txBody>
+                    <a:bodyPr wrap="square"/>
+                    <a:lstStyle/>
+                    <a:p>
+                      <a:r>
+                        <a:rPr sz="1050">
+                          <a:solidFill>
+                            <a:srgbClr val="1A2332"/>
+                          </a:solidFill>
+                          <a:latin typeface="Calibri"/>
+                        </a:rPr>
+                        <a:t>1</a:t>
+                      </a:r>
+                    </a:p>
+                  </a:txBody>
+                  <a:tcPr anchor="ctr" marL="73152">
+                    <a:solidFill>
+                      <a:srgbClr val="F1EBDF"/>
+                    </a:solidFill>
+                  </a:tcPr>
+                </a:tc>
+              </a:tr>
+              <a:tr h="169164">
+                <a:tc>
+                  <a:txBody>
+                    <a:bodyPr wrap="square"/>
+                    <a:lstStyle/>
+                    <a:p>
+                      <a:r>
+                        <a:rPr sz="1050">
+                          <a:solidFill>
+                            <a:srgbClr val="1A2332"/>
+                          </a:solidFill>
+                          <a:latin typeface="Calibri"/>
+                        </a:rPr>
+                        <a:t>@finduslost</a:t>
+                      </a:r>
+                    </a:p>
+                  </a:txBody>
+                  <a:tcPr anchor="ctr" marL="73152"/>
+                </a:tc>
+                <a:tc>
+                  <a:txBody>
+                    <a:bodyPr wrap="square"/>
+                    <a:lstStyle/>
+                    <a:p>
+                      <a:r>
+                        <a:rPr sz="1050">
+                          <a:solidFill>
+                            <a:srgbClr val="1A2332"/>
+                          </a:solidFill>
+                          <a:latin typeface="Calibri"/>
+                        </a:rPr>
+                        <a:t>instagram</a:t>
+                      </a:r>
+                    </a:p>
+                  </a:txBody>
+                  <a:tcPr anchor="ctr" marL="73152"/>
+                </a:tc>
+                <a:tc>
+                  <a:txBody>
+                    <a:bodyPr wrap="square"/>
+                    <a:lstStyle/>
+                    <a:p>
+                      <a:r>
+                        <a:rPr sz="1050">
+                          <a:solidFill>
+                            <a:srgbClr val="1A2332"/>
+                          </a:solidFill>
+                          <a:latin typeface="Calibri"/>
+                        </a:rPr>
+                        <a:t>unknown</a:t>
+                      </a:r>
+                    </a:p>
+                  </a:txBody>
+                  <a:tcPr anchor="ctr" marL="73152"/>
+                </a:tc>
+                <a:tc>
+                  <a:txBody>
+                    <a:bodyPr wrap="square"/>
+                    <a:lstStyle/>
+                    <a:p>
+                      <a:r>
+                        <a:rPr sz="1050">
+                          <a:solidFill>
+                            <a:srgbClr val="1A2332"/>
+                          </a:solidFill>
+                          <a:latin typeface="Calibri"/>
+                        </a:rPr>
+                        <a:t>guides</a:t>
+                      </a:r>
+                    </a:p>
+                  </a:txBody>
+                  <a:tcPr anchor="ctr" marL="73152"/>
+                </a:tc>
+                <a:tc>
+                  <a:txBody>
+                    <a:bodyPr wrap="square"/>
+                    <a:lstStyle/>
+                    <a:p>
+                      <a:r>
+                        <a:rPr sz="1050">
+                          <a:solidFill>
+                            <a:srgbClr val="1A2332"/>
+                          </a:solidFill>
+                          <a:latin typeface="Calibri"/>
+                        </a:rPr>
+                        <a:t>2</a:t>
+                      </a:r>
+                    </a:p>
+                  </a:txBody>
+                  <a:tcPr anchor="ctr" marL="73152"/>
+                </a:tc>
+              </a:tr>
+              <a:tr h="169164">
+                <a:tc>
+                  <a:txBody>
+                    <a:bodyPr wrap="square"/>
+                    <a:lstStyle/>
+                    <a:p>
+                      <a:r>
+                        <a:rPr sz="1050">
+                          <a:solidFill>
+                            <a:srgbClr val="1A2332"/>
+                          </a:solidFill>
+                          <a:latin typeface="Calibri"/>
+                        </a:rPr>
+                        <a:t>@girlvsglobe</a:t>
+                      </a:r>
+                    </a:p>
+                  </a:txBody>
+                  <a:tcPr anchor="ctr" marL="73152">
+                    <a:solidFill>
+                      <a:srgbClr val="F1EBDF"/>
+                    </a:solidFill>
+                  </a:tcPr>
+                </a:tc>
+                <a:tc>
+                  <a:txBody>
+                    <a:bodyPr wrap="square"/>
+                    <a:lstStyle/>
+                    <a:p>
+                      <a:r>
+                        <a:rPr sz="1050">
+                          <a:solidFill>
+                            <a:srgbClr val="1A2332"/>
+                          </a:solidFill>
+                          <a:latin typeface="Calibri"/>
+                        </a:rPr>
+                        <a:t>instagram</a:t>
+                      </a:r>
+                    </a:p>
+                  </a:txBody>
+                  <a:tcPr anchor="ctr" marL="73152">
+                    <a:solidFill>
+                      <a:srgbClr val="F1EBDF"/>
+                    </a:solidFill>
+                  </a:tcPr>
+                </a:tc>
+                <a:tc>
+                  <a:txBody>
+                    <a:bodyPr wrap="square"/>
+                    <a:lstStyle/>
+                    <a:p>
+                      <a:r>
+                        <a:rPr sz="1050">
+                          <a:solidFill>
+                            <a:srgbClr val="1A2332"/>
+                          </a:solidFill>
+                          <a:latin typeface="Calibri"/>
+                        </a:rPr>
+                        <a:t>298K</a:t>
+                      </a:r>
+                    </a:p>
+                  </a:txBody>
+                  <a:tcPr anchor="ctr" marL="73152">
+                    <a:solidFill>
+                      <a:srgbClr val="F1EBDF"/>
+                    </a:solidFill>
+                  </a:tcPr>
+                </a:tc>
+                <a:tc>
+                  <a:txBody>
+                    <a:bodyPr wrap="square"/>
+                    <a:lstStyle/>
+                    <a:p>
+                      <a:r>
+                        <a:rPr sz="1050">
+                          <a:solidFill>
+                            <a:srgbClr val="1A2332"/>
+                          </a:solidFill>
+                          <a:latin typeface="Calibri"/>
+                        </a:rPr>
+                        <a:t>solo</a:t>
+                      </a:r>
+                    </a:p>
+                  </a:txBody>
+                  <a:tcPr anchor="ctr" marL="73152">
+                    <a:solidFill>
+                      <a:srgbClr val="F1EBDF"/>
+                    </a:solidFill>
+                  </a:tcPr>
+                </a:tc>
+                <a:tc>
+                  <a:txBody>
+                    <a:bodyPr wrap="square"/>
+                    <a:lstStyle/>
+                    <a:p>
+                      <a:r>
+                        <a:rPr sz="1050">
+                          <a:solidFill>
+                            <a:srgbClr val="1A2332"/>
+                          </a:solidFill>
+                          <a:latin typeface="Calibri"/>
+                        </a:rPr>
+                        <a:t>2</a:t>
+                      </a:r>
+                    </a:p>
+                  </a:txBody>
+                  <a:tcPr anchor="ctr" marL="73152">
+                    <a:solidFill>
+                      <a:srgbClr val="F1EBDF"/>
+                    </a:solidFill>
+                  </a:tcPr>
+                </a:tc>
+              </a:tr>
+              <a:tr h="169164">
+                <a:tc>
+                  <a:txBody>
+                    <a:bodyPr wrap="square"/>
+                    <a:lstStyle/>
+                    <a:p>
+                      <a:r>
+                        <a:rPr sz="1050">
+                          <a:solidFill>
+                            <a:srgbClr val="1A2332"/>
+                          </a:solidFill>
+                          <a:latin typeface="Calibri"/>
+                        </a:rPr>
+                        <a:t>@gypsea_lust</a:t>
+                      </a:r>
+                    </a:p>
+                  </a:txBody>
+                  <a:tcPr anchor="ctr" marL="73152"/>
+                </a:tc>
+                <a:tc>
+                  <a:txBody>
+                    <a:bodyPr wrap="square"/>
+                    <a:lstStyle/>
+                    <a:p>
+                      <a:r>
+                        <a:rPr sz="1050">
+                          <a:solidFill>
+                            <a:srgbClr val="1A2332"/>
+                          </a:solidFill>
+                          <a:latin typeface="Calibri"/>
+                        </a:rPr>
+                        <a:t>instagram</a:t>
+                      </a:r>
+                    </a:p>
+                  </a:txBody>
+                  <a:tcPr anchor="ctr" marL="73152"/>
+                </a:tc>
+                <a:tc>
+                  <a:txBody>
+                    <a:bodyPr wrap="square"/>
+                    <a:lstStyle/>
+                    <a:p>
+                      <a:r>
+                        <a:rPr sz="1050">
+                          <a:solidFill>
+                            <a:srgbClr val="1A2332"/>
+                          </a:solidFill>
+                          <a:latin typeface="Calibri"/>
+                        </a:rPr>
+                        <a:t>1.8M</a:t>
+                      </a:r>
+                    </a:p>
+                  </a:txBody>
+                  <a:tcPr anchor="ctr" marL="73152"/>
+                </a:tc>
+                <a:tc>
+                  <a:txBody>
+                    <a:bodyPr wrap="square"/>
+                    <a:lstStyle/>
+                    <a:p>
+                      <a:r>
+                        <a:rPr sz="1050">
+                          <a:solidFill>
+                            <a:srgbClr val="1A2332"/>
+                          </a:solidFill>
+                          <a:latin typeface="Calibri"/>
+                        </a:rPr>
+                        <a:t>beach</a:t>
+                      </a:r>
+                    </a:p>
+                  </a:txBody>
+                  <a:tcPr anchor="ctr" marL="73152"/>
+                </a:tc>
+                <a:tc>
+                  <a:txBody>
+                    <a:bodyPr wrap="square"/>
+                    <a:lstStyle/>
+                    <a:p>
+                      <a:r>
+                        <a:rPr sz="1050">
+                          <a:solidFill>
+                            <a:srgbClr val="1A2332"/>
+                          </a:solidFill>
+                          <a:latin typeface="Calibri"/>
+                        </a:rPr>
+                        <a:t>0</a:t>
+                      </a:r>
+                    </a:p>
+                  </a:txBody>
+                  <a:tcPr anchor="ctr" marL="73152"/>
+                </a:tc>
+              </a:tr>
+              <a:tr h="169164">
+                <a:tc>
+                  <a:txBody>
+                    <a:bodyPr wrap="square"/>
+                    <a:lstStyle/>
+                    <a:p>
+                      <a:r>
+                        <a:rPr sz="1050">
+                          <a:solidFill>
+                            <a:srgbClr val="1A2332"/>
+                          </a:solidFill>
+                          <a:latin typeface="Calibri"/>
+                        </a:rPr>
+                        <a:t>@highonlifee</a:t>
+                      </a:r>
+                    </a:p>
+                  </a:txBody>
+                  <a:tcPr anchor="ctr" marL="73152">
+                    <a:solidFill>
+                      <a:srgbClr val="F1EBDF"/>
+                    </a:solidFill>
+                  </a:tcPr>
+                </a:tc>
+                <a:tc>
+                  <a:txBody>
+                    <a:bodyPr wrap="square"/>
+                    <a:lstStyle/>
+                    <a:p>
+                      <a:r>
+                        <a:rPr sz="1050">
+                          <a:solidFill>
+                            <a:srgbClr val="1A2332"/>
+                          </a:solidFill>
+                          <a:latin typeface="Calibri"/>
+                        </a:rPr>
+                        <a:t>instagram</a:t>
+                      </a:r>
+                    </a:p>
+                  </a:txBody>
+                  <a:tcPr anchor="ctr" marL="73152">
+                    <a:solidFill>
+                      <a:srgbClr val="F1EBDF"/>
+                    </a:solidFill>
+                  </a:tcPr>
+                </a:tc>
+                <a:tc>
+                  <a:txBody>
+                    <a:bodyPr wrap="square"/>
+                    <a:lstStyle/>
+                    <a:p>
+                      <a:r>
+                        <a:rPr sz="1050">
+                          <a:solidFill>
+                            <a:srgbClr val="1A2332"/>
+                          </a:solidFill>
+                          <a:latin typeface="Calibri"/>
+                        </a:rPr>
+                        <a:t>2.1M</a:t>
+                      </a:r>
+                    </a:p>
+                  </a:txBody>
+                  <a:tcPr anchor="ctr" marL="73152">
+                    <a:solidFill>
+                      <a:srgbClr val="F1EBDF"/>
+                    </a:solidFill>
+                  </a:tcPr>
+                </a:tc>
+                <a:tc>
+                  <a:txBody>
+                    <a:bodyPr wrap="square"/>
+                    <a:lstStyle/>
+                    <a:p>
+                      <a:r>
+                        <a:rPr sz="1050">
+                          <a:solidFill>
+                            <a:srgbClr val="1A2332"/>
+                          </a:solidFill>
+                          <a:latin typeface="Calibri"/>
+                        </a:rPr>
+                        <a:t>luxury</a:t>
+                      </a:r>
+                    </a:p>
+                  </a:txBody>
+                  <a:tcPr anchor="ctr" marL="73152">
+                    <a:solidFill>
+                      <a:srgbClr val="F1EBDF"/>
+                    </a:solidFill>
+                  </a:tcPr>
+                </a:tc>
+                <a:tc>
+                  <a:txBody>
+                    <a:bodyPr wrap="square"/>
+                    <a:lstStyle/>
+                    <a:p>
+                      <a:r>
+                        <a:rPr sz="1050">
+                          <a:solidFill>
+                            <a:srgbClr val="1A2332"/>
+                          </a:solidFill>
+                          <a:latin typeface="Calibri"/>
+                        </a:rPr>
+                        <a:t>0</a:t>
+                      </a:r>
+                    </a:p>
+                  </a:txBody>
+                  <a:tcPr anchor="ctr" marL="73152">
+                    <a:solidFill>
+                      <a:srgbClr val="F1EBDF"/>
+                    </a:solidFill>
+                  </a:tcPr>
+                </a:tc>
+              </a:tr>
+              <a:tr h="169164">
+                <a:tc>
+                  <a:txBody>
+                    <a:bodyPr wrap="square"/>
+                    <a:lstStyle/>
+                    <a:p>
+                      <a:r>
+                        <a:rPr sz="1050">
+                          <a:solidFill>
+                            <a:srgbClr val="1A2332"/>
+                          </a:solidFill>
+                          <a:latin typeface="Calibri"/>
+                        </a:rPr>
+                        <a:t>@islandhopper</a:t>
+                      </a:r>
+                    </a:p>
+                  </a:txBody>
+                  <a:tcPr anchor="ctr" marL="73152"/>
+                </a:tc>
+                <a:tc>
+                  <a:txBody>
+                    <a:bodyPr wrap="square"/>
+                    <a:lstStyle/>
+                    <a:p>
+                      <a:r>
+                        <a:rPr sz="1050">
+                          <a:solidFill>
+                            <a:srgbClr val="1A2332"/>
+                          </a:solidFill>
+                          <a:latin typeface="Calibri"/>
+                        </a:rPr>
+                        <a:t>instagram</a:t>
+                      </a:r>
+                    </a:p>
+                  </a:txBody>
+                  <a:tcPr anchor="ctr" marL="73152"/>
+                </a:tc>
+                <a:tc>
+                  <a:txBody>
+                    <a:bodyPr wrap="square"/>
+                    <a:lstStyle/>
+                    <a:p>
+                      <a:r>
+                        <a:rPr sz="1050">
+                          <a:solidFill>
+                            <a:srgbClr val="1A2332"/>
+                          </a:solidFill>
+                          <a:latin typeface="Calibri"/>
+                        </a:rPr>
+                        <a:t>298K</a:t>
+                      </a:r>
+                    </a:p>
+                  </a:txBody>
+                  <a:tcPr anchor="ctr" marL="73152"/>
+                </a:tc>
+                <a:tc>
+                  <a:txBody>
+                    <a:bodyPr wrap="square"/>
+                    <a:lstStyle/>
+                    <a:p>
+                      <a:r>
+                        <a:rPr sz="1050">
+                          <a:solidFill>
+                            <a:srgbClr val="1A2332"/>
+                          </a:solidFill>
+                          <a:latin typeface="Calibri"/>
+                        </a:rPr>
+                        <a:t>beach</a:t>
+                      </a:r>
+                    </a:p>
+                  </a:txBody>
+                  <a:tcPr anchor="ctr" marL="73152"/>
+                </a:tc>
+                <a:tc>
+                  <a:txBody>
+                    <a:bodyPr wrap="square"/>
+                    <a:lstStyle/>
+                    <a:p>
+                      <a:r>
+                        <a:rPr sz="1050">
+                          <a:solidFill>
+                            <a:srgbClr val="1A2332"/>
+                          </a:solidFill>
+                          <a:latin typeface="Calibri"/>
+                        </a:rPr>
+                        <a:t>0</a:t>
+                      </a:r>
+                    </a:p>
+                  </a:txBody>
+                  <a:tcPr anchor="ctr" marL="73152"/>
+                </a:tc>
+              </a:tr>
+              <a:tr h="169164">
+                <a:tc>
+                  <a:txBody>
+                    <a:bodyPr wrap="square"/>
+                    <a:lstStyle/>
+                    <a:p>
+                      <a:r>
+                        <a:rPr sz="1050">
+                          <a:solidFill>
+                            <a:srgbClr val="1A2332"/>
+                          </a:solidFill>
+                          <a:latin typeface="Calibri"/>
+                        </a:rPr>
+                        <a:t>@jessicanabongo</a:t>
+                      </a:r>
+                    </a:p>
+                  </a:txBody>
+                  <a:tcPr anchor="ctr" marL="73152">
+                    <a:solidFill>
+                      <a:srgbClr val="F1EBDF"/>
+                    </a:solidFill>
+                  </a:tcPr>
+                </a:tc>
+                <a:tc>
+                  <a:txBody>
+                    <a:bodyPr wrap="square"/>
+                    <a:lstStyle/>
+                    <a:p>
+                      <a:r>
+                        <a:rPr sz="1050">
+                          <a:solidFill>
+                            <a:srgbClr val="1A2332"/>
+                          </a:solidFill>
+                          <a:latin typeface="Calibri"/>
+                        </a:rPr>
+                        <a:t>instagram</a:t>
+                      </a:r>
+                    </a:p>
+                  </a:txBody>
+                  <a:tcPr anchor="ctr" marL="73152">
+                    <a:solidFill>
+                      <a:srgbClr val="F1EBDF"/>
+                    </a:solidFill>
+                  </a:tcPr>
+                </a:tc>
+                <a:tc>
+                  <a:txBody>
+                    <a:bodyPr wrap="square"/>
+                    <a:lstStyle/>
+                    <a:p>
+                      <a:r>
+                        <a:rPr sz="1050">
+                          <a:solidFill>
+                            <a:srgbClr val="1A2332"/>
+                          </a:solidFill>
+                          <a:latin typeface="Calibri"/>
+                        </a:rPr>
+                        <a:t>234K</a:t>
+                      </a:r>
+                    </a:p>
+                  </a:txBody>
+                  <a:tcPr anchor="ctr" marL="73152">
+                    <a:solidFill>
+                      <a:srgbClr val="F1EBDF"/>
+                    </a:solidFill>
+                  </a:tcPr>
+                </a:tc>
+                <a:tc>
+                  <a:txBody>
+                    <a:bodyPr wrap="square"/>
+                    <a:lstStyle/>
+                    <a:p>
+                      <a:r>
+                        <a:rPr sz="1050">
+                          <a:solidFill>
+                            <a:srgbClr val="1A2332"/>
+                          </a:solidFill>
+                          <a:latin typeface="Calibri"/>
+                        </a:rPr>
+                        <a:t>solo</a:t>
+                      </a:r>
+                    </a:p>
+                  </a:txBody>
+                  <a:tcPr anchor="ctr" marL="73152">
+                    <a:solidFill>
+                      <a:srgbClr val="F1EBDF"/>
+                    </a:solidFill>
+                  </a:tcPr>
+                </a:tc>
+                <a:tc>
+                  <a:txBody>
+                    <a:bodyPr wrap="square"/>
+                    <a:lstStyle/>
+                    <a:p>
+                      <a:r>
+                        <a:rPr sz="1050">
+                          <a:solidFill>
+                            <a:srgbClr val="1A2332"/>
+                          </a:solidFill>
+                          <a:latin typeface="Calibri"/>
+                        </a:rPr>
+                        <a:t>1</a:t>
+                      </a:r>
+                    </a:p>
+                  </a:txBody>
+                  <a:tcPr anchor="ctr" marL="73152">
+                    <a:solidFill>
+                      <a:srgbClr val="F1EBDF"/>
+                    </a:solidFill>
+                  </a:tcPr>
+                </a:tc>
+              </a:tr>
+              <a:tr h="169164">
+                <a:tc>
+                  <a:txBody>
+                    <a:bodyPr wrap="square"/>
+                    <a:lstStyle/>
+                    <a:p>
+                      <a:r>
+                        <a:rPr sz="1050">
+                          <a:solidFill>
+                            <a:srgbClr val="1A2332"/>
+                          </a:solidFill>
+                          <a:latin typeface="Calibri"/>
+                        </a:rPr>
+                        <a:t>@johnnyjet</a:t>
+                      </a:r>
+                    </a:p>
+                  </a:txBody>
+                  <a:tcPr anchor="ctr" marL="73152"/>
+                </a:tc>
+                <a:tc>
+                  <a:txBody>
+                    <a:bodyPr wrap="square"/>
+                    <a:lstStyle/>
+                    <a:p>
+                      <a:r>
+                        <a:rPr sz="1050">
+                          <a:solidFill>
+                            <a:srgbClr val="1A2332"/>
+                          </a:solidFill>
+                          <a:latin typeface="Calibri"/>
+                        </a:rPr>
+                        <a:t>instagram</a:t>
+                      </a:r>
+                    </a:p>
+                  </a:txBody>
+                  <a:tcPr anchor="ctr" marL="73152"/>
+                </a:tc>
+                <a:tc>
+                  <a:txBody>
+                    <a:bodyPr wrap="square"/>
+                    <a:lstStyle/>
+                    <a:p>
+                      <a:r>
+                        <a:rPr sz="1050">
+                          <a:solidFill>
+                            <a:srgbClr val="1A2332"/>
+                          </a:solidFill>
+                          <a:latin typeface="Calibri"/>
+                        </a:rPr>
+                        <a:t>567K</a:t>
+                      </a:r>
+                    </a:p>
+                  </a:txBody>
+                  <a:tcPr anchor="ctr" marL="73152"/>
+                </a:tc>
+                <a:tc>
+                  <a:txBody>
+                    <a:bodyPr wrap="square"/>
+                    <a:lstStyle/>
+                    <a:p>
+                      <a:r>
+                        <a:rPr sz="1050">
+                          <a:solidFill>
+                            <a:srgbClr val="1A2332"/>
+                          </a:solidFill>
+                          <a:latin typeface="Calibri"/>
+                        </a:rPr>
+                        <a:t>points-miles</a:t>
+                      </a:r>
+                    </a:p>
+                  </a:txBody>
+                  <a:tcPr anchor="ctr" marL="73152"/>
+                </a:tc>
+                <a:tc>
+                  <a:txBody>
+                    <a:bodyPr wrap="square"/>
+                    <a:lstStyle/>
+                    <a:p>
+                      <a:r>
+                        <a:rPr sz="1050">
+                          <a:solidFill>
+                            <a:srgbClr val="1A2332"/>
+                          </a:solidFill>
+                          <a:latin typeface="Calibri"/>
+                        </a:rPr>
+                        <a:t>2</a:t>
+                      </a:r>
+                    </a:p>
+                  </a:txBody>
+                  <a:tcPr anchor="ctr" marL="73152"/>
+                </a:tc>
+              </a:tr>
+              <a:tr h="169164">
+                <a:tc>
+                  <a:txBody>
+                    <a:bodyPr wrap="square"/>
+                    <a:lstStyle/>
+                    <a:p>
+                      <a:r>
+                        <a:rPr sz="1050">
+                          <a:solidFill>
+                            <a:srgbClr val="1A2332"/>
+                          </a:solidFill>
+                          <a:latin typeface="Calibri"/>
+                        </a:rPr>
+                        <a:t>@jordanhammond</a:t>
+                      </a:r>
+                    </a:p>
+                  </a:txBody>
+                  <a:tcPr anchor="ctr" marL="73152">
+                    <a:solidFill>
+                      <a:srgbClr val="F1EBDF"/>
+                    </a:solidFill>
+                  </a:tcPr>
+                </a:tc>
+                <a:tc>
+                  <a:txBody>
+                    <a:bodyPr wrap="square"/>
+                    <a:lstStyle/>
+                    <a:p>
+                      <a:r>
+                        <a:rPr sz="1050">
+                          <a:solidFill>
+                            <a:srgbClr val="1A2332"/>
+                          </a:solidFill>
+                          <a:latin typeface="Calibri"/>
+                        </a:rPr>
+                        <a:t>instagram</a:t>
+                      </a:r>
+                    </a:p>
+                  </a:txBody>
+                  <a:tcPr anchor="ctr" marL="73152">
+                    <a:solidFill>
+                      <a:srgbClr val="F1EBDF"/>
+                    </a:solidFill>
+                  </a:tcPr>
+                </a:tc>
+                <a:tc>
+                  <a:txBody>
+                    <a:bodyPr wrap="square"/>
+                    <a:lstStyle/>
+                    <a:p>
+                      <a:r>
+                        <a:rPr sz="1050">
+                          <a:solidFill>
+                            <a:srgbClr val="1A2332"/>
+                          </a:solidFill>
+                          <a:latin typeface="Calibri"/>
+                        </a:rPr>
+                        <a:t>1.2M</a:t>
+                      </a:r>
+                    </a:p>
+                  </a:txBody>
+                  <a:tcPr anchor="ctr" marL="73152">
+                    <a:solidFill>
+                      <a:srgbClr val="F1EBDF"/>
+                    </a:solidFill>
+                  </a:tcPr>
+                </a:tc>
+                <a:tc>
+                  <a:txBody>
+                    <a:bodyPr wrap="square"/>
+                    <a:lstStyle/>
+                    <a:p>
+                      <a:r>
+                        <a:rPr sz="1050">
+                          <a:solidFill>
+                            <a:srgbClr val="1A2332"/>
+                          </a:solidFill>
+                          <a:latin typeface="Calibri"/>
+                        </a:rPr>
+                        <a:t>adventure</a:t>
+                      </a:r>
+                    </a:p>
+                  </a:txBody>
+                  <a:tcPr anchor="ctr" marL="73152">
+                    <a:solidFill>
+                      <a:srgbClr val="F1EBDF"/>
+                    </a:solidFill>
+                  </a:tcPr>
+                </a:tc>
+                <a:tc>
+                  <a:txBody>
+                    <a:bodyPr wrap="square"/>
+                    <a:lstStyle/>
+                    <a:p>
+                      <a:r>
+                        <a:rPr sz="1050">
+                          <a:solidFill>
+                            <a:srgbClr val="1A2332"/>
+                          </a:solidFill>
+                          <a:latin typeface="Calibri"/>
+                        </a:rPr>
+                        <a:t>0</a:t>
+                      </a:r>
+                    </a:p>
+                  </a:txBody>
+                  <a:tcPr anchor="ctr" marL="73152">
+                    <a:solidFill>
+                      <a:srgbClr val="F1EBDF"/>
+                    </a:solidFill>
+                  </a:tcPr>
+                </a:tc>
+              </a:tr>
+            </a:tbl>
+          </a:graphicData>
+        </a:graphic>
+      </p:graphicFrame>
+    </p:spTree>
+  </p:cSld>
+  <p:clrMapOvr>
+    <a:masterClrMapping/>
+  </p:clrMapOvr>
+</p:sld>
+</file>
+
+<file path=ppt/slides/slide11.xml><?xml version="1.0" encoding="utf-8"?>
 <p:sld xmlns:a="http://schemas.openxmlformats.org/drawingml/2006/main" xmlns:p="http://schemas.openxmlformats.org/presentationml/2006/main" xmlns:r="http://schemas.openxmlformats.org/officeDocument/2006/relationships">
   <p:cSld>
     <p:bg>
@@ -5650,7 +7994,7 @@
 </p:sld>
 </file>
 
-<file path=ppt/slides/slide11.xml><?xml version="1.0" encoding="utf-8"?>
+<file path=ppt/slides/slide12.xml><?xml version="1.0" encoding="utf-8"?>
 <p:sld xmlns:a="http://schemas.openxmlformats.org/drawingml/2006/main" xmlns:p="http://schemas.openxmlformats.org/presentationml/2006/main" xmlns:r="http://schemas.openxmlformats.org/officeDocument/2006/relationships">
   <p:cSld>
     <p:bg>
@@ -7978,7 +10322,7 @@
 </p:sld>
 </file>
 
-<file path=ppt/slides/slide12.xml><?xml version="1.0" encoding="utf-8"?>
+<file path=ppt/slides/slide13.xml><?xml version="1.0" encoding="utf-8"?>
 <p:sld xmlns:a="http://schemas.openxmlformats.org/drawingml/2006/main" xmlns:p="http://schemas.openxmlformats.org/presentationml/2006/main" xmlns:r="http://schemas.openxmlformats.org/officeDocument/2006/relationships">
   <p:cSld>
     <p:bg>
@@ -10306,7 +12650,7 @@
 </p:sld>
 </file>
 
-<file path=ppt/slides/slide13.xml><?xml version="1.0" encoding="utf-8"?>
+<file path=ppt/slides/slide14.xml><?xml version="1.0" encoding="utf-8"?>
 <p:sld xmlns:a="http://schemas.openxmlformats.org/drawingml/2006/main" xmlns:p="http://schemas.openxmlformats.org/presentationml/2006/main" xmlns:r="http://schemas.openxmlformats.org/officeDocument/2006/relationships">
   <p:cSld>
     <p:bg>
@@ -12634,7 +14978,7 @@
 </p:sld>
 </file>
 
-<file path=ppt/slides/slide14.xml><?xml version="1.0" encoding="utf-8"?>
+<file path=ppt/slides/slide15.xml><?xml version="1.0" encoding="utf-8"?>
 <p:sld xmlns:a="http://schemas.openxmlformats.org/drawingml/2006/main" xmlns:p="http://schemas.openxmlformats.org/presentationml/2006/main" xmlns:r="http://schemas.openxmlformats.org/officeDocument/2006/relationships">
   <p:cSld>
     <p:bg>
@@ -14539,7 +16883,7 @@
 </p:sld>
 </file>
 
-<file path=ppt/slides/slide15.xml><?xml version="1.0" encoding="utf-8"?>
+<file path=ppt/slides/slide16.xml><?xml version="1.0" encoding="utf-8"?>
 <p:sld xmlns:a="http://schemas.openxmlformats.org/drawingml/2006/main" xmlns:p="http://schemas.openxmlformats.org/presentationml/2006/main" xmlns:r="http://schemas.openxmlformats.org/officeDocument/2006/relationships">
   <p:cSld>
     <p:bg>
@@ -16444,7 +18788,7 @@
 </p:sld>
 </file>
 
-<file path=ppt/slides/slide16.xml><?xml version="1.0" encoding="utf-8"?>
+<file path=ppt/slides/slide17.xml><?xml version="1.0" encoding="utf-8"?>
 <p:sld xmlns:a="http://schemas.openxmlformats.org/drawingml/2006/main" xmlns:p="http://schemas.openxmlformats.org/presentationml/2006/main" xmlns:r="http://schemas.openxmlformats.org/officeDocument/2006/relationships">
   <p:cSld>
     <p:bg>
@@ -18349,7 +20693,7 @@
 </p:sld>
 </file>
 
-<file path=ppt/slides/slide17.xml><?xml version="1.0" encoding="utf-8"?>
+<file path=ppt/slides/slide18.xml><?xml version="1.0" encoding="utf-8"?>
 <p:sld xmlns:a="http://schemas.openxmlformats.org/drawingml/2006/main" xmlns:p="http://schemas.openxmlformats.org/presentationml/2006/main" xmlns:r="http://schemas.openxmlformats.org/officeDocument/2006/relationships">
   <p:cSld>
     <p:bg>
@@ -20254,7 +22598,7 @@
 </p:sld>
 </file>
 
-<file path=ppt/slides/slide18.xml><?xml version="1.0" encoding="utf-8"?>
+<file path=ppt/slides/slide19.xml><?xml version="1.0" encoding="utf-8"?>
 <p:sld xmlns:a="http://schemas.openxmlformats.org/drawingml/2006/main" xmlns:p="http://schemas.openxmlformats.org/presentationml/2006/main" xmlns:r="http://schemas.openxmlformats.org/officeDocument/2006/relationships">
   <p:cSld>
     <p:bg>
@@ -21667,7 +24011,291 @@
 </p:sld>
 </file>
 
-<file path=ppt/slides/slide19.xml><?xml version="1.0" encoding="utf-8"?>
+<file path=ppt/slides/slide2.xml><?xml version="1.0" encoding="utf-8"?>
+<p:sld xmlns:a="http://schemas.openxmlformats.org/drawingml/2006/main" xmlns:p="http://schemas.openxmlformats.org/presentationml/2006/main" xmlns:r="http://schemas.openxmlformats.org/officeDocument/2006/relationships">
+  <p:cSld>
+    <p:bg>
+      <p:bgPr>
+        <a:solidFill>
+          <a:srgbClr val="FAF8F4"/>
+        </a:solidFill>
+        <a:effectLst/>
+      </p:bgPr>
+    </p:bg>
+    <p:spTree>
+      <p:nvGrpSpPr>
+        <p:cNvPr id="1" name=""/>
+        <p:cNvGrpSpPr/>
+        <p:nvPr/>
+      </p:nvGrpSpPr>
+      <p:grpSpPr/>
+      <p:sp>
+        <p:nvSpPr>
+          <p:cNvPr id="2" name="TextBox 1"/>
+          <p:cNvSpPr txBox="1"/>
+          <p:nvPr/>
+        </p:nvSpPr>
+        <p:spPr>
+          <a:xfrm>
+            <a:off x="822960" y="411480"/>
+            <a:ext cx="10515600" cy="457200"/>
+          </a:xfrm>
+          <a:prstGeom prst="rect">
+            <a:avLst/>
+          </a:prstGeom>
+          <a:noFill/>
+        </p:spPr>
+        <p:txBody>
+          <a:bodyPr wrap="square">
+            <a:spAutoFit/>
+          </a:bodyPr>
+          <a:lstStyle/>
+          <a:p>
+            <a:pPr algn="l">
+              <a:spcAft>
+                <a:spcPts val="200"/>
+              </a:spcAft>
+            </a:pPr>
+            <a:r>
+              <a:rPr sz="1200" b="1">
+                <a:solidFill>
+                  <a:srgbClr val="B4632A"/>
+                </a:solidFill>
+                <a:latin typeface="Calibri"/>
+              </a:rPr>
+              <a:t>SCOPE</a:t>
+            </a:r>
+          </a:p>
+        </p:txBody>
+      </p:sp>
+      <p:sp>
+        <p:nvSpPr>
+          <p:cNvPr id="3" name="Rectangle 2"/>
+          <p:cNvSpPr/>
+          <p:nvPr/>
+        </p:nvSpPr>
+        <p:spPr>
+          <a:xfrm>
+            <a:off x="822960" y="795528"/>
+            <a:ext cx="640080" cy="41148"/>
+          </a:xfrm>
+          <a:prstGeom prst="rect">
+            <a:avLst/>
+          </a:prstGeom>
+          <a:solidFill>
+            <a:srgbClr val="B4632A"/>
+          </a:solidFill>
+          <a:ln>
+            <a:noFill/>
+          </a:ln>
+        </p:spPr>
+        <p:style>
+          <a:lnRef idx="1">
+            <a:schemeClr val="accent1"/>
+          </a:lnRef>
+          <a:fillRef idx="3">
+            <a:schemeClr val="accent1"/>
+          </a:fillRef>
+          <a:effectRef idx="2">
+            <a:schemeClr val="accent1"/>
+          </a:effectRef>
+          <a:fontRef idx="minor">
+            <a:schemeClr val="lt1"/>
+          </a:fontRef>
+        </p:style>
+        <p:txBody>
+          <a:bodyPr rtlCol="0" anchor="ctr"/>
+          <a:lstStyle/>
+          <a:p>
+            <a:pPr algn="ctr"/>
+          </a:p>
+        </p:txBody>
+      </p:sp>
+      <p:sp>
+        <p:nvSpPr>
+          <p:cNvPr id="4" name="TextBox 3"/>
+          <p:cNvSpPr txBox="1"/>
+          <p:nvPr/>
+        </p:nvSpPr>
+        <p:spPr>
+          <a:xfrm>
+            <a:off x="822960" y="960120"/>
+            <a:ext cx="10515600" cy="1097280"/>
+          </a:xfrm>
+          <a:prstGeom prst="rect">
+            <a:avLst/>
+          </a:prstGeom>
+          <a:noFill/>
+        </p:spPr>
+        <p:txBody>
+          <a:bodyPr wrap="square">
+            <a:spAutoFit/>
+          </a:bodyPr>
+          <a:lstStyle/>
+          <a:p>
+            <a:pPr algn="l">
+              <a:spcAft>
+                <a:spcPts val="400"/>
+              </a:spcAft>
+            </a:pPr>
+            <a:r>
+              <a:rPr sz="3200" b="0">
+                <a:solidFill>
+                  <a:srgbClr val="1A2332"/>
+                </a:solidFill>
+                <a:latin typeface="Georgia"/>
+              </a:rPr>
+              <a:t>What was collected, and what was not</a:t>
+            </a:r>
+          </a:p>
+        </p:txBody>
+      </p:sp>
+      <p:sp>
+        <p:nvSpPr>
+          <p:cNvPr id="5" name="TextBox 4"/>
+          <p:cNvSpPr txBox="1"/>
+          <p:nvPr/>
+        </p:nvSpPr>
+        <p:spPr>
+          <a:xfrm>
+            <a:off x="822960" y="2194560"/>
+            <a:ext cx="10515600" cy="4023360"/>
+          </a:xfrm>
+          <a:prstGeom prst="rect">
+            <a:avLst/>
+          </a:prstGeom>
+          <a:noFill/>
+        </p:spPr>
+        <p:txBody>
+          <a:bodyPr wrap="square">
+            <a:spAutoFit/>
+          </a:bodyPr>
+          <a:lstStyle/>
+          <a:p>
+            <a:pPr>
+              <a:spcAft>
+                <a:spcPts val="800"/>
+              </a:spcAft>
+            </a:pPr>
+            <a:r>
+              <a:rPr sz="1400" b="1">
+                <a:solidFill>
+                  <a:srgbClr val="1A2332"/>
+                </a:solidFill>
+                <a:latin typeface="Calibri"/>
+              </a:rPr>
+              <a:t>Collected: </a:t>
+            </a:r>
+            <a:r>
+              <a:rPr sz="1400">
+                <a:solidFill>
+                  <a:srgbClr val="1A2332"/>
+                </a:solidFill>
+                <a:latin typeface="Calibri"/>
+              </a:rPr>
+              <a:t> 100 creators (50 TikTok / 50 Instagram); 94 itineraries; 1,155 itinerary items; 106 cited sources; 85 destinations — all stored in pilot.db with per-itinerary verification records.</a:t>
+            </a:r>
+          </a:p>
+          <a:p>
+            <a:pPr>
+              <a:spcAft>
+                <a:spcPts val="800"/>
+              </a:spcAft>
+            </a:pPr>
+            <a:r>
+              <a:rPr sz="1400" b="1">
+                <a:solidFill>
+                  <a:srgbClr val="1A2332"/>
+                </a:solidFill>
+                <a:latin typeface="Calibri"/>
+              </a:rPr>
+              <a:t>Not collected: </a:t>
+            </a:r>
+            <a:r>
+              <a:rPr sz="1400">
+                <a:solidFill>
+                  <a:srgbClr val="1A2332"/>
+                </a:solidFill>
+                <a:latin typeface="Calibri"/>
+              </a:rPr>
+              <a:t> commercial economics, payment percentages, supplier terms, pricing, or demand data. These were explicitly parked and are not part of this research.</a:t>
+            </a:r>
+          </a:p>
+          <a:p>
+            <a:pPr>
+              <a:spcAft>
+                <a:spcPts val="800"/>
+              </a:spcAft>
+            </a:pPr>
+            <a:r>
+              <a:rPr sz="1400" b="1">
+                <a:solidFill>
+                  <a:srgbClr val="1A2332"/>
+                </a:solidFill>
+                <a:latin typeface="Calibri"/>
+              </a:rPr>
+              <a:t>This deck: </a:t>
+            </a:r>
+            <a:r>
+              <a:rPr sz="1400">
+                <a:solidFill>
+                  <a:srgbClr val="1A2332"/>
+                </a:solidFill>
+                <a:latin typeface="Calibri"/>
+              </a:rPr>
+              <a:t> an information record of the pilot's findings. It contains no projections, no recommendations, and no calls to action.</a:t>
+            </a:r>
+          </a:p>
+        </p:txBody>
+      </p:sp>
+      <p:sp>
+        <p:nvSpPr>
+          <p:cNvPr id="6" name="FOOTER"/>
+          <p:cNvSpPr txBox="1"/>
+          <p:nvPr/>
+        </p:nvSpPr>
+        <p:spPr>
+          <a:xfrm>
+            <a:off x="822960" y="6355080"/>
+            <a:ext cx="10515600" cy="365760"/>
+          </a:xfrm>
+          <a:prstGeom prst="rect">
+            <a:avLst/>
+          </a:prstGeom>
+          <a:noFill/>
+        </p:spPr>
+        <p:txBody>
+          <a:bodyPr wrap="square">
+            <a:spAutoFit/>
+          </a:bodyPr>
+          <a:lstStyle/>
+          <a:p>
+            <a:pPr algn="r">
+              <a:spcAft>
+                <a:spcPts val="400"/>
+              </a:spcAft>
+            </a:pPr>
+            <a:r>
+              <a:rPr sz="900" b="0">
+                <a:solidFill>
+                  <a:srgbClr val="5C6678"/>
+                </a:solidFill>
+                <a:latin typeface="Calibri"/>
+              </a:rPr>
+              <a:t>Travel Influencer Itinerary Pilot — Research Findings  •  2 / 20</a:t>
+            </a:r>
+          </a:p>
+        </p:txBody>
+      </p:sp>
+    </p:spTree>
+  </p:cSld>
+  <p:clrMapOvr>
+    <a:masterClrMapping/>
+  </p:clrMapOvr>
+</p:sld>
+</file>
+
+<file path=ppt/slides/slide20.xml><?xml version="1.0" encoding="utf-8"?>
 <p:sld xmlns:a="http://schemas.openxmlformats.org/drawingml/2006/main" xmlns:p="http://schemas.openxmlformats.org/presentationml/2006/main" xmlns:r="http://schemas.openxmlformats.org/officeDocument/2006/relationships">
   <p:cSld>
     <p:bg>
@@ -21801,7 +24429,7 @@
                 </a:solidFill>
                 <a:latin typeface="Georgia"/>
               </a:rPr>
-              <a:t>What was kept out, and why</a:t>
+              <a:t>Quarantine log</a:t>
             </a:r>
           </a:p>
         </p:txBody>
@@ -21928,7 +24556,7 @@
                           </a:solidFill>
                           <a:latin typeface="Calibri"/>
                         </a:rPr>
-                        <a:t/>
+                        <a:t>creator</a:t>
                       </a:r>
                     </a:p>
                   </a:txBody>
@@ -21988,7 +24616,7 @@
                           </a:solidFill>
                           <a:latin typeface="Calibri"/>
                         </a:rPr>
-                        <a:t/>
+                        <a:t>creator</a:t>
                       </a:r>
                     </a:p>
                   </a:txBody>
@@ -22052,7 +24680,7 @@
                           </a:solidFill>
                           <a:latin typeface="Calibri"/>
                         </a:rPr>
-                        <a:t/>
+                        <a:t>creator</a:t>
                       </a:r>
                     </a:p>
                   </a:txBody>
@@ -22112,7 +24740,7 @@
                           </a:solidFill>
                           <a:latin typeface="Calibri"/>
                         </a:rPr>
-                        <a:t/>
+                        <a:t>creator</a:t>
                       </a:r>
                     </a:p>
                   </a:txBody>
@@ -22176,7 +24804,7 @@
                           </a:solidFill>
                           <a:latin typeface="Calibri"/>
                         </a:rPr>
-                        <a:t/>
+                        <a:t>creator</a:t>
                       </a:r>
                     </a:p>
                   </a:txBody>
@@ -22236,7 +24864,7 @@
                           </a:solidFill>
                           <a:latin typeface="Calibri"/>
                         </a:rPr>
-                        <a:t/>
+                        <a:t>creator</a:t>
                       </a:r>
                     </a:p>
                   </a:txBody>
@@ -22300,7 +24928,7 @@
                           </a:solidFill>
                           <a:latin typeface="Calibri"/>
                         </a:rPr>
-                        <a:t/>
+                        <a:t>creator</a:t>
                       </a:r>
                     </a:p>
                   </a:txBody>
@@ -22360,7 +24988,7 @@
                           </a:solidFill>
                           <a:latin typeface="Calibri"/>
                         </a:rPr>
-                        <a:t/>
+                        <a:t>creator</a:t>
                       </a:r>
                     </a:p>
                   </a:txBody>
@@ -22526,7 +25154,7 @@
                 </a:solidFill>
                 <a:latin typeface="Calibri"/>
               </a:rPr>
-              <a:t>Travel Itinerary Pilot  •  Information deck  •  19 / 19</a:t>
+              <a:t>Travel Influencer Itinerary Pilot — Research Findings  •  20 / 20</a:t>
             </a:r>
           </a:p>
         </p:txBody>
@@ -22539,7 +25167,7 @@
 </p:sld>
 </file>
 
-<file path=ppt/slides/slide2.xml><?xml version="1.0" encoding="utf-8"?>
+<file path=ppt/slides/slide3.xml><?xml version="1.0" encoding="utf-8"?>
 <p:sld xmlns:a="http://schemas.openxmlformats.org/drawingml/2006/main" xmlns:p="http://schemas.openxmlformats.org/presentationml/2006/main" xmlns:r="http://schemas.openxmlformats.org/officeDocument/2006/relationships">
   <p:cSld>
     <p:bg>
@@ -22591,7 +25219,7 @@
                 </a:solidFill>
                 <a:latin typeface="Calibri"/>
               </a:rPr>
-              <a:t>THE PILOT AT A GLANCE</a:t>
+              <a:t>METHOD</a:t>
             </a:r>
           </a:p>
         </p:txBody>
@@ -22667,13 +25295,13 @@
               </a:spcAft>
             </a:pPr>
             <a:r>
-              <a:rPr sz="3400" b="0">
+              <a:rPr sz="3200" b="0">
                 <a:solidFill>
                   <a:srgbClr val="1A2332"/>
                 </a:solidFill>
                 <a:latin typeface="Georgia"/>
               </a:rPr>
-              <a:t>100 creators, 94 verified itineraries</a:t>
+              <a:t>How the creators and itineraries were gathered</a:t>
             </a:r>
           </a:p>
         </p:txBody>
@@ -22686,8 +25314,8 @@
         </p:nvSpPr>
         <p:spPr>
           <a:xfrm>
-            <a:off x="822960" y="2377440"/>
-            <a:ext cx="3291840" cy="1463040"/>
+            <a:off x="822960" y="2194560"/>
+            <a:ext cx="10515600" cy="4023360"/>
           </a:xfrm>
           <a:prstGeom prst="rect">
             <a:avLst/>
@@ -22700,356 +25328,85 @@
           </a:bodyPr>
           <a:lstStyle/>
           <a:p>
-            <a:pPr algn="l">
+            <a:pPr>
               <a:spcAft>
-                <a:spcPts val="200"/>
+                <a:spcPts val="800"/>
               </a:spcAft>
             </a:pPr>
             <a:r>
-              <a:rPr sz="4000" b="1">
+              <a:rPr sz="1400" b="1">
                 <a:solidFill>
-                  <a:srgbClr val="B4632A"/>
+                  <a:srgbClr val="1A2332"/>
                 </a:solidFill>
-                <a:latin typeface="Georgia"/>
+                <a:latin typeface="Calibri"/>
               </a:rPr>
-              <a:t>100</a:t>
+              <a:t>Selection: </a:t>
+            </a:r>
+            <a:r>
+              <a:rPr sz="1400">
+                <a:solidFill>
+                  <a:srgbClr val="1A2332"/>
+                </a:solidFill>
+                <a:latin typeface="Calibri"/>
+              </a:rPr>
+              <a:t> 100 creators, 50 TikTok / 50 Instagram — the 50/50 split is enforced mechanically by load_db.py. The list was compiled 2026-09-15 from third-party "top travel influencer" listicles (e.g. superprofile.bio, diarydirectory.com, travelpayouts.com). No explicit eligibility or exclusion rules were recorded at selection time — see SELECTION_CRITERIA.md.</a:t>
             </a:r>
           </a:p>
           <a:p>
-            <a:pPr algn="l">
+            <a:pPr>
               <a:spcAft>
-                <a:spcPts val="400"/>
+                <a:spcPts val="800"/>
               </a:spcAft>
             </a:pPr>
             <a:r>
-              <a:rPr sz="1400" b="0">
+              <a:rPr sz="1400" b="1">
                 <a:solidFill>
-                  <a:srgbClr val="5C6678"/>
+                  <a:srgbClr val="1A2332"/>
                 </a:solidFill>
                 <a:latin typeface="Calibri"/>
               </a:rPr>
-              <a:t>creators researched</a:t>
+              <a:t>Extraction: </a:t>
+            </a:r>
+            <a:r>
+              <a:rPr sz="1400">
+                <a:solidFill>
+                  <a:srgbClr val="1A2332"/>
+                </a:solidFill>
+                <a:latin typeface="Calibri"/>
+              </a:rPr>
+              <a:t> itineraries were extracted from each creator's public source pages (blogs, guides, posts) into a normalized schema: itinerary, items, sources, destinations.</a:t>
+            </a:r>
+          </a:p>
+          <a:p>
+            <a:pPr>
+              <a:spcAft>
+                <a:spcPts val="800"/>
+              </a:spcAft>
+            </a:pPr>
+            <a:r>
+              <a:rPr sz="1400" b="1">
+                <a:solidFill>
+                  <a:srgbClr val="1A2332"/>
+                </a:solidFill>
+                <a:latin typeface="Calibri"/>
+              </a:rPr>
+              <a:t>Validation: </a:t>
+            </a:r>
+            <a:r>
+              <a:rPr sz="1400">
+                <a:solidFill>
+                  <a:srgbClr val="1A2332"/>
+                </a:solidFill>
+                <a:latin typeface="Calibri"/>
+              </a:rPr>
+              <a:t> 7 validation gates, fail-closed — nothing unverified enters the database. An independent evidence council re-verified the itineraries against live sources on 2026-09-16; corrections are recorded in QC_REPORT_STRENGTHENED.md. 9 records were quarantined (Appendix C).</a:t>
             </a:r>
           </a:p>
         </p:txBody>
       </p:sp>
       <p:sp>
         <p:nvSpPr>
-          <p:cNvPr id="6" name="TextBox 5"/>
-          <p:cNvSpPr txBox="1"/>
-          <p:nvPr/>
-        </p:nvSpPr>
-        <p:spPr>
-          <a:xfrm>
-            <a:off x="4480560" y="2377440"/>
-            <a:ext cx="3291840" cy="1463040"/>
-          </a:xfrm>
-          <a:prstGeom prst="rect">
-            <a:avLst/>
-          </a:prstGeom>
-          <a:noFill/>
-        </p:spPr>
-        <p:txBody>
-          <a:bodyPr wrap="square">
-            <a:spAutoFit/>
-          </a:bodyPr>
-          <a:lstStyle/>
-          <a:p>
-            <a:pPr algn="l">
-              <a:spcAft>
-                <a:spcPts val="200"/>
-              </a:spcAft>
-            </a:pPr>
-            <a:r>
-              <a:rPr sz="4000" b="1">
-                <a:solidFill>
-                  <a:srgbClr val="B4632A"/>
-                </a:solidFill>
-                <a:latin typeface="Georgia"/>
-              </a:rPr>
-              <a:t>50 / 50</a:t>
-            </a:r>
-          </a:p>
-          <a:p>
-            <a:pPr algn="l">
-              <a:spcAft>
-                <a:spcPts val="400"/>
-              </a:spcAft>
-            </a:pPr>
-            <a:r>
-              <a:rPr sz="1400" b="0">
-                <a:solidFill>
-                  <a:srgbClr val="5C6678"/>
-                </a:solidFill>
-                <a:latin typeface="Calibri"/>
-              </a:rPr>
-              <a:t>TikTok / Instagram</a:t>
-            </a:r>
-          </a:p>
-        </p:txBody>
-      </p:sp>
-      <p:sp>
-        <p:nvSpPr>
-          <p:cNvPr id="7" name="TextBox 6"/>
-          <p:cNvSpPr txBox="1"/>
-          <p:nvPr/>
-        </p:nvSpPr>
-        <p:spPr>
-          <a:xfrm>
-            <a:off x="8138160" y="2377440"/>
-            <a:ext cx="3291840" cy="1463040"/>
-          </a:xfrm>
-          <a:prstGeom prst="rect">
-            <a:avLst/>
-          </a:prstGeom>
-          <a:noFill/>
-        </p:spPr>
-        <p:txBody>
-          <a:bodyPr wrap="square">
-            <a:spAutoFit/>
-          </a:bodyPr>
-          <a:lstStyle/>
-          <a:p>
-            <a:pPr algn="l">
-              <a:spcAft>
-                <a:spcPts val="200"/>
-              </a:spcAft>
-            </a:pPr>
-            <a:r>
-              <a:rPr sz="4000" b="1">
-                <a:solidFill>
-                  <a:srgbClr val="B4632A"/>
-                </a:solidFill>
-                <a:latin typeface="Georgia"/>
-              </a:rPr>
-              <a:t>94</a:t>
-            </a:r>
-          </a:p>
-          <a:p>
-            <a:pPr algn="l">
-              <a:spcAft>
-                <a:spcPts val="400"/>
-              </a:spcAft>
-            </a:pPr>
-            <a:r>
-              <a:rPr sz="1400" b="0">
-                <a:solidFill>
-                  <a:srgbClr val="5C6678"/>
-                </a:solidFill>
-                <a:latin typeface="Calibri"/>
-              </a:rPr>
-              <a:t>itineraries in the database</a:t>
-            </a:r>
-          </a:p>
-        </p:txBody>
-      </p:sp>
-      <p:sp>
-        <p:nvSpPr>
-          <p:cNvPr id="8" name="TextBox 7"/>
-          <p:cNvSpPr txBox="1"/>
-          <p:nvPr/>
-        </p:nvSpPr>
-        <p:spPr>
-          <a:xfrm>
-            <a:off x="822960" y="4114800"/>
-            <a:ext cx="3291840" cy="1463040"/>
-          </a:xfrm>
-          <a:prstGeom prst="rect">
-            <a:avLst/>
-          </a:prstGeom>
-          <a:noFill/>
-        </p:spPr>
-        <p:txBody>
-          <a:bodyPr wrap="square">
-            <a:spAutoFit/>
-          </a:bodyPr>
-          <a:lstStyle/>
-          <a:p>
-            <a:pPr algn="l">
-              <a:spcAft>
-                <a:spcPts val="200"/>
-              </a:spcAft>
-            </a:pPr>
-            <a:r>
-              <a:rPr sz="4000" b="1">
-                <a:solidFill>
-                  <a:srgbClr val="B4632A"/>
-                </a:solidFill>
-                <a:latin typeface="Georgia"/>
-              </a:rPr>
-              <a:t>1,155</a:t>
-            </a:r>
-          </a:p>
-          <a:p>
-            <a:pPr algn="l">
-              <a:spcAft>
-                <a:spcPts val="400"/>
-              </a:spcAft>
-            </a:pPr>
-            <a:r>
-              <a:rPr sz="1400" b="0">
-                <a:solidFill>
-                  <a:srgbClr val="5C6678"/>
-                </a:solidFill>
-                <a:latin typeface="Calibri"/>
-              </a:rPr>
-              <a:t>itinerary items</a:t>
-            </a:r>
-          </a:p>
-        </p:txBody>
-      </p:sp>
-      <p:sp>
-        <p:nvSpPr>
-          <p:cNvPr id="9" name="TextBox 8"/>
-          <p:cNvSpPr txBox="1"/>
-          <p:nvPr/>
-        </p:nvSpPr>
-        <p:spPr>
-          <a:xfrm>
-            <a:off x="4480560" y="4114800"/>
-            <a:ext cx="3291840" cy="1463040"/>
-          </a:xfrm>
-          <a:prstGeom prst="rect">
-            <a:avLst/>
-          </a:prstGeom>
-          <a:noFill/>
-        </p:spPr>
-        <p:txBody>
-          <a:bodyPr wrap="square">
-            <a:spAutoFit/>
-          </a:bodyPr>
-          <a:lstStyle/>
-          <a:p>
-            <a:pPr algn="l">
-              <a:spcAft>
-                <a:spcPts val="200"/>
-              </a:spcAft>
-            </a:pPr>
-            <a:r>
-              <a:rPr sz="4000" b="1">
-                <a:solidFill>
-                  <a:srgbClr val="B4632A"/>
-                </a:solidFill>
-                <a:latin typeface="Georgia"/>
-              </a:rPr>
-              <a:t>106</a:t>
-            </a:r>
-          </a:p>
-          <a:p>
-            <a:pPr algn="l">
-              <a:spcAft>
-                <a:spcPts val="400"/>
-              </a:spcAft>
-            </a:pPr>
-            <a:r>
-              <a:rPr sz="1400" b="0">
-                <a:solidFill>
-                  <a:srgbClr val="5C6678"/>
-                </a:solidFill>
-                <a:latin typeface="Calibri"/>
-              </a:rPr>
-              <a:t>sources cited</a:t>
-            </a:r>
-          </a:p>
-        </p:txBody>
-      </p:sp>
-      <p:sp>
-        <p:nvSpPr>
-          <p:cNvPr id="10" name="TextBox 9"/>
-          <p:cNvSpPr txBox="1"/>
-          <p:nvPr/>
-        </p:nvSpPr>
-        <p:spPr>
-          <a:xfrm>
-            <a:off x="8138160" y="4114800"/>
-            <a:ext cx="3291840" cy="1463040"/>
-          </a:xfrm>
-          <a:prstGeom prst="rect">
-            <a:avLst/>
-          </a:prstGeom>
-          <a:noFill/>
-        </p:spPr>
-        <p:txBody>
-          <a:bodyPr wrap="square">
-            <a:spAutoFit/>
-          </a:bodyPr>
-          <a:lstStyle/>
-          <a:p>
-            <a:pPr algn="l">
-              <a:spcAft>
-                <a:spcPts val="200"/>
-              </a:spcAft>
-            </a:pPr>
-            <a:r>
-              <a:rPr sz="4000" b="1">
-                <a:solidFill>
-                  <a:srgbClr val="B4632A"/>
-                </a:solidFill>
-                <a:latin typeface="Georgia"/>
-              </a:rPr>
-              <a:t>85</a:t>
-            </a:r>
-          </a:p>
-          <a:p>
-            <a:pPr algn="l">
-              <a:spcAft>
-                <a:spcPts val="400"/>
-              </a:spcAft>
-            </a:pPr>
-            <a:r>
-              <a:rPr sz="1400" b="0">
-                <a:solidFill>
-                  <a:srgbClr val="5C6678"/>
-                </a:solidFill>
-                <a:latin typeface="Calibri"/>
-              </a:rPr>
-              <a:t>destinations covered</a:t>
-            </a:r>
-          </a:p>
-        </p:txBody>
-      </p:sp>
-      <p:sp>
-        <p:nvSpPr>
-          <p:cNvPr id="11" name="TextBox 10"/>
-          <p:cNvSpPr txBox="1"/>
-          <p:nvPr/>
-        </p:nvSpPr>
-        <p:spPr>
-          <a:xfrm>
-            <a:off x="822960" y="5806440"/>
-            <a:ext cx="10515600" cy="457200"/>
-          </a:xfrm>
-          <a:prstGeom prst="rect">
-            <a:avLst/>
-          </a:prstGeom>
-          <a:noFill/>
-        </p:spPr>
-        <p:txBody>
-          <a:bodyPr wrap="square">
-            <a:spAutoFit/>
-          </a:bodyPr>
-          <a:lstStyle/>
-          <a:p>
-            <a:pPr algn="l">
-              <a:spcAft>
-                <a:spcPts val="400"/>
-              </a:spcAft>
-            </a:pPr>
-            <a:r>
-              <a:rPr sz="1200" b="0">
-                <a:solidFill>
-                  <a:srgbClr val="5C6678"/>
-                </a:solidFill>
-                <a:latin typeface="Calibri"/>
-              </a:rPr>
-              <a:t>73 creators with cited follower counts  •  27 unknown (not invented)</a:t>
-            </a:r>
-          </a:p>
-        </p:txBody>
-      </p:sp>
-      <p:sp>
-        <p:nvSpPr>
-          <p:cNvPr id="12" name="FOOTER"/>
+          <p:cNvPr id="6" name="FOOTER"/>
           <p:cNvSpPr txBox="1"/>
           <p:nvPr/>
         </p:nvSpPr>
@@ -23081,7 +25438,7 @@
                 </a:solidFill>
                 <a:latin typeface="Calibri"/>
               </a:rPr>
-              <a:t>Travel Itinerary Pilot  •  Information deck  •  2 / 19</a:t>
+              <a:t>Travel Influencer Itinerary Pilot — Research Findings  •  3 / 20</a:t>
             </a:r>
           </a:p>
         </p:txBody>
@@ -23094,7 +25451,7 @@
 </p:sld>
 </file>
 
-<file path=ppt/slides/slide3.xml><?xml version="1.0" encoding="utf-8"?>
+<file path=ppt/slides/slide4.xml><?xml version="1.0" encoding="utf-8"?>
 <p:sld xmlns:a="http://schemas.openxmlformats.org/drawingml/2006/main" xmlns:p="http://schemas.openxmlformats.org/presentationml/2006/main" xmlns:r="http://schemas.openxmlformats.org/officeDocument/2006/relationships">
   <p:cSld>
     <p:bg>
@@ -23146,7 +25503,7 @@
                 </a:solidFill>
                 <a:latin typeface="Calibri"/>
               </a:rPr>
-              <a:t>CREATOR COVERAGE</a:t>
+              <a:t>THE CREATORS</a:t>
             </a:r>
           </a:p>
         </p:txBody>
@@ -23222,13 +25579,13 @@
               </a:spcAft>
             </a:pPr>
             <a:r>
-              <a:rPr sz="3400" b="0">
+              <a:rPr sz="3200" b="0">
                 <a:solidFill>
                   <a:srgbClr val="1A2332"/>
                 </a:solidFill>
                 <a:latin typeface="Georgia"/>
               </a:rPr>
-              <a:t>Top creators by cited reach</a:t>
+              <a:t>Composition of the 100 creators</a:t>
             </a:r>
           </a:p>
         </p:txBody>
@@ -23243,7 +25600,7 @@
         </p:nvGraphicFramePr>
         <p:xfrm>
           <a:off x="822960" y="2148840"/>
-          <a:ext cx="10515600" cy="3621024"/>
+          <a:ext cx="4206240" cy="2880360"/>
         </p:xfrm>
         <a:graphic>
           <a:graphicData uri="http://schemas.openxmlformats.org/drawingml/2006/table">
@@ -23252,25 +25609,23 @@
                 <a:tableStyleId>{5C22544A-7EE6-4342-B048-85BDC9FD1C3A}</a:tableStyleId>
               </a:tblPr>
               <a:tblGrid>
-                <a:gridCol w="3840480"/>
-                <a:gridCol w="2194560"/>
-                <a:gridCol w="2194560"/>
-                <a:gridCol w="2286000"/>
+                <a:gridCol w="2743200"/>
+                <a:gridCol w="1463040"/>
               </a:tblGrid>
-              <a:tr h="329184">
-                <a:tc>
-                  <a:txBody>
-                    <a:bodyPr wrap="square"/>
-                    <a:lstStyle/>
-                    <a:p>
-                      <a:r>
-                        <a:rPr sz="1200" b="1">
+              <a:tr h="192024">
+                <a:tc>
+                  <a:txBody>
+                    <a:bodyPr wrap="square"/>
+                    <a:lstStyle/>
+                    <a:p>
+                      <a:r>
+                        <a:rPr sz="1050" b="1">
                           <a:solidFill>
                             <a:srgbClr val="FFFFFF"/>
                           </a:solidFill>
                           <a:latin typeface="Calibri"/>
                         </a:rPr>
-                        <a:t>Creator</a:t>
+                        <a:t>Niche</a:t>
                       </a:r>
                     </a:p>
                   </a:txBody>
@@ -23286,13 +25641,13 @@
                     <a:lstStyle/>
                     <a:p>
                       <a:r>
-                        <a:rPr sz="1200" b="1">
+                        <a:rPr sz="1050" b="1">
                           <a:solidFill>
                             <a:srgbClr val="FFFFFF"/>
                           </a:solidFill>
                           <a:latin typeface="Calibri"/>
                         </a:rPr>
-                        <a:t>Platform</a:t>
+                        <a:t>Creators</a:t>
                       </a:r>
                     </a:p>
                   </a:txBody>
@@ -23302,199 +25657,453 @@
                     </a:solidFill>
                   </a:tcPr>
                 </a:tc>
-                <a:tc>
-                  <a:txBody>
-                    <a:bodyPr wrap="square"/>
-                    <a:lstStyle/>
-                    <a:p>
-                      <a:r>
-                        <a:rPr sz="1200" b="1">
-                          <a:solidFill>
-                            <a:srgbClr val="FFFFFF"/>
-                          </a:solidFill>
-                          <a:latin typeface="Calibri"/>
-                        </a:rPr>
-                        <a:t>Followers</a:t>
-                      </a:r>
-                    </a:p>
-                  </a:txBody>
-                  <a:tcPr anchor="ctr">
-                    <a:solidFill>
-                      <a:srgbClr val="1A2332"/>
-                    </a:solidFill>
-                  </a:tcPr>
-                </a:tc>
-                <a:tc>
-                  <a:txBody>
-                    <a:bodyPr wrap="square"/>
-                    <a:lstStyle/>
-                    <a:p>
-                      <a:r>
-                        <a:rPr sz="1200" b="1">
-                          <a:solidFill>
-                            <a:srgbClr val="FFFFFF"/>
-                          </a:solidFill>
-                          <a:latin typeface="Calibri"/>
-                        </a:rPr>
-                        <a:t>Itineraries</a:t>
-                      </a:r>
-                    </a:p>
-                  </a:txBody>
-                  <a:tcPr anchor="ctr">
-                    <a:solidFill>
-                      <a:srgbClr val="1A2332"/>
-                    </a:solidFill>
-                  </a:tcPr>
-                </a:tc>
               </a:tr>
-              <a:tr h="329184">
-                <a:tc>
-                  <a:txBody>
-                    <a:bodyPr wrap="square"/>
-                    <a:lstStyle/>
-                    <a:p>
-                      <a:r>
-                        <a:rPr sz="1200">
-                          <a:solidFill>
-                            <a:srgbClr val="1A2332"/>
-                          </a:solidFill>
-                          <a:latin typeface="Calibri"/>
-                        </a:rPr>
-                        <a:t>@erikakullberg</a:t>
-                      </a:r>
-                    </a:p>
-                  </a:txBody>
-                  <a:tcPr anchor="ctr" marL="73152"/>
-                </a:tc>
-                <a:tc>
-                  <a:txBody>
-                    <a:bodyPr wrap="square"/>
-                    <a:lstStyle/>
-                    <a:p>
-                      <a:r>
-                        <a:rPr sz="1200">
-                          <a:solidFill>
-                            <a:srgbClr val="1A2332"/>
-                          </a:solidFill>
-                          <a:latin typeface="Calibri"/>
-                        </a:rPr>
-                        <a:t>tiktok</a:t>
-                      </a:r>
-                    </a:p>
-                  </a:txBody>
-                  <a:tcPr anchor="ctr" marL="73152"/>
-                </a:tc>
-                <a:tc>
-                  <a:txBody>
-                    <a:bodyPr wrap="square"/>
-                    <a:lstStyle/>
-                    <a:p>
-                      <a:r>
-                        <a:rPr sz="1200">
-                          <a:solidFill>
-                            <a:srgbClr val="1A2332"/>
-                          </a:solidFill>
-                          <a:latin typeface="Calibri"/>
-                        </a:rPr>
-                        <a:t>9.3M</a:t>
-                      </a:r>
-                    </a:p>
-                  </a:txBody>
-                  <a:tcPr anchor="ctr" marL="73152"/>
-                </a:tc>
-                <a:tc>
-                  <a:txBody>
-                    <a:bodyPr wrap="square"/>
-                    <a:lstStyle/>
-                    <a:p>
-                      <a:r>
-                        <a:rPr sz="1200">
-                          <a:solidFill>
-                            <a:srgbClr val="1A2332"/>
-                          </a:solidFill>
-                          <a:latin typeface="Calibri"/>
-                        </a:rPr>
-                        <a:t>0</a:t>
+              <a:tr h="192024">
+                <a:tc>
+                  <a:txBody>
+                    <a:bodyPr wrap="square"/>
+                    <a:lstStyle/>
+                    <a:p>
+                      <a:r>
+                        <a:rPr sz="1050">
+                          <a:solidFill>
+                            <a:srgbClr val="1A2332"/>
+                          </a:solidFill>
+                          <a:latin typeface="Calibri"/>
+                        </a:rPr>
+                        <a:t>adventure</a:t>
+                      </a:r>
+                    </a:p>
+                  </a:txBody>
+                  <a:tcPr anchor="ctr" marL="73152"/>
+                </a:tc>
+                <a:tc>
+                  <a:txBody>
+                    <a:bodyPr wrap="square"/>
+                    <a:lstStyle/>
+                    <a:p>
+                      <a:r>
+                        <a:rPr sz="1050">
+                          <a:solidFill>
+                            <a:srgbClr val="1A2332"/>
+                          </a:solidFill>
+                          <a:latin typeface="Calibri"/>
+                        </a:rPr>
+                        <a:t>26</a:t>
                       </a:r>
                     </a:p>
                   </a:txBody>
                   <a:tcPr anchor="ctr" marL="73152"/>
                 </a:tc>
               </a:tr>
-              <a:tr h="329184">
-                <a:tc>
-                  <a:txBody>
-                    <a:bodyPr wrap="square"/>
-                    <a:lstStyle/>
-                    <a:p>
-                      <a:r>
-                        <a:rPr sz="1200">
-                          <a:solidFill>
-                            <a:srgbClr val="1A2332"/>
-                          </a:solidFill>
-                          <a:latin typeface="Calibri"/>
-                        </a:rPr>
-                        <a:t>@muradosmann</a:t>
-                      </a:r>
-                    </a:p>
-                  </a:txBody>
-                  <a:tcPr anchor="ctr" marL="73152">
-                    <a:solidFill>
-                      <a:srgbClr val="F1EBDF"/>
-                    </a:solidFill>
-                  </a:tcPr>
-                </a:tc>
-                <a:tc>
-                  <a:txBody>
-                    <a:bodyPr wrap="square"/>
-                    <a:lstStyle/>
-                    <a:p>
-                      <a:r>
-                        <a:rPr sz="1200">
-                          <a:solidFill>
-                            <a:srgbClr val="1A2332"/>
-                          </a:solidFill>
-                          <a:latin typeface="Calibri"/>
-                        </a:rPr>
-                        <a:t>instagram</a:t>
-                      </a:r>
-                    </a:p>
-                  </a:txBody>
-                  <a:tcPr anchor="ctr" marL="73152">
-                    <a:solidFill>
-                      <a:srgbClr val="F1EBDF"/>
-                    </a:solidFill>
-                  </a:tcPr>
-                </a:tc>
-                <a:tc>
-                  <a:txBody>
-                    <a:bodyPr wrap="square"/>
-                    <a:lstStyle/>
-                    <a:p>
-                      <a:r>
-                        <a:rPr sz="1200">
-                          <a:solidFill>
-                            <a:srgbClr val="1A2332"/>
-                          </a:solidFill>
-                          <a:latin typeface="Calibri"/>
-                        </a:rPr>
-                        <a:t>4.3M</a:t>
-                      </a:r>
-                    </a:p>
-                  </a:txBody>
-                  <a:tcPr anchor="ctr" marL="73152">
-                    <a:solidFill>
-                      <a:srgbClr val="F1EBDF"/>
-                    </a:solidFill>
-                  </a:tcPr>
-                </a:tc>
-                <a:tc>
-                  <a:txBody>
-                    <a:bodyPr wrap="square"/>
-                    <a:lstStyle/>
-                    <a:p>
-                      <a:r>
-                        <a:rPr sz="1200">
+              <a:tr h="192024">
+                <a:tc>
+                  <a:txBody>
+                    <a:bodyPr wrap="square"/>
+                    <a:lstStyle/>
+                    <a:p>
+                      <a:r>
+                        <a:rPr sz="1050">
+                          <a:solidFill>
+                            <a:srgbClr val="1A2332"/>
+                          </a:solidFill>
+                          <a:latin typeface="Calibri"/>
+                        </a:rPr>
+                        <a:t>solo</a:t>
+                      </a:r>
+                    </a:p>
+                  </a:txBody>
+                  <a:tcPr anchor="ctr" marL="73152">
+                    <a:solidFill>
+                      <a:srgbClr val="F1EBDF"/>
+                    </a:solidFill>
+                  </a:tcPr>
+                </a:tc>
+                <a:tc>
+                  <a:txBody>
+                    <a:bodyPr wrap="square"/>
+                    <a:lstStyle/>
+                    <a:p>
+                      <a:r>
+                        <a:rPr sz="1050">
+                          <a:solidFill>
+                            <a:srgbClr val="1A2332"/>
+                          </a:solidFill>
+                          <a:latin typeface="Calibri"/>
+                        </a:rPr>
+                        <a:t>15</a:t>
+                      </a:r>
+                    </a:p>
+                  </a:txBody>
+                  <a:tcPr anchor="ctr" marL="73152">
+                    <a:solidFill>
+                      <a:srgbClr val="F1EBDF"/>
+                    </a:solidFill>
+                  </a:tcPr>
+                </a:tc>
+              </a:tr>
+              <a:tr h="192024">
+                <a:tc>
+                  <a:txBody>
+                    <a:bodyPr wrap="square"/>
+                    <a:lstStyle/>
+                    <a:p>
+                      <a:r>
+                        <a:rPr sz="1050">
+                          <a:solidFill>
+                            <a:srgbClr val="1A2332"/>
+                          </a:solidFill>
+                          <a:latin typeface="Calibri"/>
+                        </a:rPr>
+                        <a:t>budget</a:t>
+                      </a:r>
+                    </a:p>
+                  </a:txBody>
+                  <a:tcPr anchor="ctr" marL="73152"/>
+                </a:tc>
+                <a:tc>
+                  <a:txBody>
+                    <a:bodyPr wrap="square"/>
+                    <a:lstStyle/>
+                    <a:p>
+                      <a:r>
+                        <a:rPr sz="1050">
+                          <a:solidFill>
+                            <a:srgbClr val="1A2332"/>
+                          </a:solidFill>
+                          <a:latin typeface="Calibri"/>
+                        </a:rPr>
+                        <a:t>15</a:t>
+                      </a:r>
+                    </a:p>
+                  </a:txBody>
+                  <a:tcPr anchor="ctr" marL="73152"/>
+                </a:tc>
+              </a:tr>
+              <a:tr h="192024">
+                <a:tc>
+                  <a:txBody>
+                    <a:bodyPr wrap="square"/>
+                    <a:lstStyle/>
+                    <a:p>
+                      <a:r>
+                        <a:rPr sz="1050">
+                          <a:solidFill>
+                            <a:srgbClr val="1A2332"/>
+                          </a:solidFill>
+                          <a:latin typeface="Calibri"/>
+                        </a:rPr>
+                        <a:t>luxury</a:t>
+                      </a:r>
+                    </a:p>
+                  </a:txBody>
+                  <a:tcPr anchor="ctr" marL="73152">
+                    <a:solidFill>
+                      <a:srgbClr val="F1EBDF"/>
+                    </a:solidFill>
+                  </a:tcPr>
+                </a:tc>
+                <a:tc>
+                  <a:txBody>
+                    <a:bodyPr wrap="square"/>
+                    <a:lstStyle/>
+                    <a:p>
+                      <a:r>
+                        <a:rPr sz="1050">
+                          <a:solidFill>
+                            <a:srgbClr val="1A2332"/>
+                          </a:solidFill>
+                          <a:latin typeface="Calibri"/>
+                        </a:rPr>
+                        <a:t>10</a:t>
+                      </a:r>
+                    </a:p>
+                  </a:txBody>
+                  <a:tcPr anchor="ctr" marL="73152">
+                    <a:solidFill>
+                      <a:srgbClr val="F1EBDF"/>
+                    </a:solidFill>
+                  </a:tcPr>
+                </a:tc>
+              </a:tr>
+              <a:tr h="192024">
+                <a:tc>
+                  <a:txBody>
+                    <a:bodyPr wrap="square"/>
+                    <a:lstStyle/>
+                    <a:p>
+                      <a:r>
+                        <a:rPr sz="1050">
+                          <a:solidFill>
+                            <a:srgbClr val="1A2332"/>
+                          </a:solidFill>
+                          <a:latin typeface="Calibri"/>
+                        </a:rPr>
+                        <a:t>couples</a:t>
+                      </a:r>
+                    </a:p>
+                  </a:txBody>
+                  <a:tcPr anchor="ctr" marL="73152"/>
+                </a:tc>
+                <a:tc>
+                  <a:txBody>
+                    <a:bodyPr wrap="square"/>
+                    <a:lstStyle/>
+                    <a:p>
+                      <a:r>
+                        <a:rPr sz="1050">
+                          <a:solidFill>
+                            <a:srgbClr val="1A2332"/>
+                          </a:solidFill>
+                          <a:latin typeface="Calibri"/>
+                        </a:rPr>
+                        <a:t>7</a:t>
+                      </a:r>
+                    </a:p>
+                  </a:txBody>
+                  <a:tcPr anchor="ctr" marL="73152"/>
+                </a:tc>
+              </a:tr>
+              <a:tr h="192024">
+                <a:tc>
+                  <a:txBody>
+                    <a:bodyPr wrap="square"/>
+                    <a:lstStyle/>
+                    <a:p>
+                      <a:r>
+                        <a:rPr sz="1050">
+                          <a:solidFill>
+                            <a:srgbClr val="1A2332"/>
+                          </a:solidFill>
+                          <a:latin typeface="Calibri"/>
+                        </a:rPr>
+                        <a:t>cultural</a:t>
+                      </a:r>
+                    </a:p>
+                  </a:txBody>
+                  <a:tcPr anchor="ctr" marL="73152">
+                    <a:solidFill>
+                      <a:srgbClr val="F1EBDF"/>
+                    </a:solidFill>
+                  </a:tcPr>
+                </a:tc>
+                <a:tc>
+                  <a:txBody>
+                    <a:bodyPr wrap="square"/>
+                    <a:lstStyle/>
+                    <a:p>
+                      <a:r>
+                        <a:rPr sz="1050">
+                          <a:solidFill>
+                            <a:srgbClr val="1A2332"/>
+                          </a:solidFill>
+                          <a:latin typeface="Calibri"/>
+                        </a:rPr>
+                        <a:t>6</a:t>
+                      </a:r>
+                    </a:p>
+                  </a:txBody>
+                  <a:tcPr anchor="ctr" marL="73152">
+                    <a:solidFill>
+                      <a:srgbClr val="F1EBDF"/>
+                    </a:solidFill>
+                  </a:tcPr>
+                </a:tc>
+              </a:tr>
+              <a:tr h="192024">
+                <a:tc>
+                  <a:txBody>
+                    <a:bodyPr wrap="square"/>
+                    <a:lstStyle/>
+                    <a:p>
+                      <a:r>
+                        <a:rPr sz="1050">
+                          <a:solidFill>
+                            <a:srgbClr val="1A2332"/>
+                          </a:solidFill>
+                          <a:latin typeface="Calibri"/>
+                        </a:rPr>
+                        <a:t>points-miles</a:t>
+                      </a:r>
+                    </a:p>
+                  </a:txBody>
+                  <a:tcPr anchor="ctr" marL="73152"/>
+                </a:tc>
+                <a:tc>
+                  <a:txBody>
+                    <a:bodyPr wrap="square"/>
+                    <a:lstStyle/>
+                    <a:p>
+                      <a:r>
+                        <a:rPr sz="1050">
+                          <a:solidFill>
+                            <a:srgbClr val="1A2332"/>
+                          </a:solidFill>
+                          <a:latin typeface="Calibri"/>
+                        </a:rPr>
+                        <a:t>5</a:t>
+                      </a:r>
+                    </a:p>
+                  </a:txBody>
+                  <a:tcPr anchor="ctr" marL="73152"/>
+                </a:tc>
+              </a:tr>
+              <a:tr h="192024">
+                <a:tc>
+                  <a:txBody>
+                    <a:bodyPr wrap="square"/>
+                    <a:lstStyle/>
+                    <a:p>
+                      <a:r>
+                        <a:rPr sz="1050">
+                          <a:solidFill>
+                            <a:srgbClr val="1A2332"/>
+                          </a:solidFill>
+                          <a:latin typeface="Calibri"/>
+                        </a:rPr>
+                        <a:t>family</a:t>
+                      </a:r>
+                    </a:p>
+                  </a:txBody>
+                  <a:tcPr anchor="ctr" marL="73152">
+                    <a:solidFill>
+                      <a:srgbClr val="F1EBDF"/>
+                    </a:solidFill>
+                  </a:tcPr>
+                </a:tc>
+                <a:tc>
+                  <a:txBody>
+                    <a:bodyPr wrap="square"/>
+                    <a:lstStyle/>
+                    <a:p>
+                      <a:r>
+                        <a:rPr sz="1050">
+                          <a:solidFill>
+                            <a:srgbClr val="1A2332"/>
+                          </a:solidFill>
+                          <a:latin typeface="Calibri"/>
+                        </a:rPr>
+                        <a:t>4</a:t>
+                      </a:r>
+                    </a:p>
+                  </a:txBody>
+                  <a:tcPr anchor="ctr" marL="73152">
+                    <a:solidFill>
+                      <a:srgbClr val="F1EBDF"/>
+                    </a:solidFill>
+                  </a:tcPr>
+                </a:tc>
+              </a:tr>
+              <a:tr h="192024">
+                <a:tc>
+                  <a:txBody>
+                    <a:bodyPr wrap="square"/>
+                    <a:lstStyle/>
+                    <a:p>
+                      <a:r>
+                        <a:rPr sz="1050">
+                          <a:solidFill>
+                            <a:srgbClr val="1A2332"/>
+                          </a:solidFill>
+                          <a:latin typeface="Calibri"/>
+                        </a:rPr>
+                        <a:t>itineraries</a:t>
+                      </a:r>
+                    </a:p>
+                  </a:txBody>
+                  <a:tcPr anchor="ctr" marL="73152"/>
+                </a:tc>
+                <a:tc>
+                  <a:txBody>
+                    <a:bodyPr wrap="square"/>
+                    <a:lstStyle/>
+                    <a:p>
+                      <a:r>
+                        <a:rPr sz="1050">
+                          <a:solidFill>
+                            <a:srgbClr val="1A2332"/>
+                          </a:solidFill>
+                          <a:latin typeface="Calibri"/>
+                        </a:rPr>
+                        <a:t>3</a:t>
+                      </a:r>
+                    </a:p>
+                  </a:txBody>
+                  <a:tcPr anchor="ctr" marL="73152"/>
+                </a:tc>
+              </a:tr>
+              <a:tr h="192024">
+                <a:tc>
+                  <a:txBody>
+                    <a:bodyPr wrap="square"/>
+                    <a:lstStyle/>
+                    <a:p>
+                      <a:r>
+                        <a:rPr sz="1050">
+                          <a:solidFill>
+                            <a:srgbClr val="1A2332"/>
+                          </a:solidFill>
+                          <a:latin typeface="Calibri"/>
+                        </a:rPr>
+                        <a:t>beach</a:t>
+                      </a:r>
+                    </a:p>
+                  </a:txBody>
+                  <a:tcPr anchor="ctr" marL="73152">
+                    <a:solidFill>
+                      <a:srgbClr val="F1EBDF"/>
+                    </a:solidFill>
+                  </a:tcPr>
+                </a:tc>
+                <a:tc>
+                  <a:txBody>
+                    <a:bodyPr wrap="square"/>
+                    <a:lstStyle/>
+                    <a:p>
+                      <a:r>
+                        <a:rPr sz="1050">
+                          <a:solidFill>
+                            <a:srgbClr val="1A2332"/>
+                          </a:solidFill>
+                          <a:latin typeface="Calibri"/>
+                        </a:rPr>
+                        <a:t>3</a:t>
+                      </a:r>
+                    </a:p>
+                  </a:txBody>
+                  <a:tcPr anchor="ctr" marL="73152">
+                    <a:solidFill>
+                      <a:srgbClr val="F1EBDF"/>
+                    </a:solidFill>
+                  </a:tcPr>
+                </a:tc>
+              </a:tr>
+              <a:tr h="192024">
+                <a:tc>
+                  <a:txBody>
+                    <a:bodyPr wrap="square"/>
+                    <a:lstStyle/>
+                    <a:p>
+                      <a:r>
+                        <a:rPr sz="1050">
+                          <a:solidFill>
+                            <a:srgbClr val="1A2332"/>
+                          </a:solidFill>
+                          <a:latin typeface="Calibri"/>
+                        </a:rPr>
+                        <a:t>roadtrip</a:t>
+                      </a:r>
+                    </a:p>
+                  </a:txBody>
+                  <a:tcPr anchor="ctr" marL="73152"/>
+                </a:tc>
+                <a:tc>
+                  <a:txBody>
+                    <a:bodyPr wrap="square"/>
+                    <a:lstStyle/>
+                    <a:p>
+                      <a:r>
+                        <a:rPr sz="1050">
                           <a:solidFill>
                             <a:srgbClr val="1A2332"/>
                           </a:solidFill>
@@ -23504,75 +26113,81 @@
                       </a:r>
                     </a:p>
                   </a:txBody>
-                  <a:tcPr anchor="ctr" marL="73152">
-                    <a:solidFill>
-                      <a:srgbClr val="F1EBDF"/>
-                    </a:solidFill>
-                  </a:tcPr>
+                  <a:tcPr anchor="ctr" marL="73152"/>
                 </a:tc>
               </a:tr>
-              <a:tr h="329184">
-                <a:tc>
-                  <a:txBody>
-                    <a:bodyPr wrap="square"/>
-                    <a:lstStyle/>
-                    <a:p>
-                      <a:r>
-                        <a:rPr sz="1200">
-                          <a:solidFill>
-                            <a:srgbClr val="1A2332"/>
-                          </a:solidFill>
-                          <a:latin typeface="Calibri"/>
-                        </a:rPr>
-                        <a:t>@jordentually</a:t>
-                      </a:r>
-                    </a:p>
-                  </a:txBody>
-                  <a:tcPr anchor="ctr" marL="73152"/>
-                </a:tc>
-                <a:tc>
-                  <a:txBody>
-                    <a:bodyPr wrap="square"/>
-                    <a:lstStyle/>
-                    <a:p>
-                      <a:r>
-                        <a:rPr sz="1200">
-                          <a:solidFill>
-                            <a:srgbClr val="1A2332"/>
-                          </a:solidFill>
-                          <a:latin typeface="Calibri"/>
-                        </a:rPr>
-                        <a:t>tiktok</a:t>
-                      </a:r>
-                    </a:p>
-                  </a:txBody>
-                  <a:tcPr anchor="ctr" marL="73152"/>
-                </a:tc>
-                <a:tc>
-                  <a:txBody>
-                    <a:bodyPr wrap="square"/>
-                    <a:lstStyle/>
-                    <a:p>
-                      <a:r>
-                        <a:rPr sz="1200">
-                          <a:solidFill>
-                            <a:srgbClr val="1A2332"/>
-                          </a:solidFill>
-                          <a:latin typeface="Calibri"/>
-                        </a:rPr>
-                        <a:t>3.7M</a:t>
-                      </a:r>
-                    </a:p>
-                  </a:txBody>
-                  <a:tcPr anchor="ctr" marL="73152"/>
-                </a:tc>
-                <a:tc>
-                  <a:txBody>
-                    <a:bodyPr wrap="square"/>
-                    <a:lstStyle/>
-                    <a:p>
-                      <a:r>
-                        <a:rPr sz="1200">
+              <a:tr h="192024">
+                <a:tc>
+                  <a:txBody>
+                    <a:bodyPr wrap="square"/>
+                    <a:lstStyle/>
+                    <a:p>
+                      <a:r>
+                        <a:rPr sz="1050">
+                          <a:solidFill>
+                            <a:srgbClr val="1A2332"/>
+                          </a:solidFill>
+                          <a:latin typeface="Calibri"/>
+                        </a:rPr>
+                        <a:t>food</a:t>
+                      </a:r>
+                    </a:p>
+                  </a:txBody>
+                  <a:tcPr anchor="ctr" marL="73152">
+                    <a:solidFill>
+                      <a:srgbClr val="F1EBDF"/>
+                    </a:solidFill>
+                  </a:tcPr>
+                </a:tc>
+                <a:tc>
+                  <a:txBody>
+                    <a:bodyPr wrap="square"/>
+                    <a:lstStyle/>
+                    <a:p>
+                      <a:r>
+                        <a:rPr sz="1050">
+                          <a:solidFill>
+                            <a:srgbClr val="1A2332"/>
+                          </a:solidFill>
+                          <a:latin typeface="Calibri"/>
+                        </a:rPr>
+                        <a:t>2</a:t>
+                      </a:r>
+                    </a:p>
+                  </a:txBody>
+                  <a:tcPr anchor="ctr" marL="73152">
+                    <a:solidFill>
+                      <a:srgbClr val="F1EBDF"/>
+                    </a:solidFill>
+                  </a:tcPr>
+                </a:tc>
+              </a:tr>
+              <a:tr h="192024">
+                <a:tc>
+                  <a:txBody>
+                    <a:bodyPr wrap="square"/>
+                    <a:lstStyle/>
+                    <a:p>
+                      <a:r>
+                        <a:rPr sz="1050">
+                          <a:solidFill>
+                            <a:srgbClr val="1A2332"/>
+                          </a:solidFill>
+                          <a:latin typeface="Calibri"/>
+                        </a:rPr>
+                        <a:t>guides</a:t>
+                      </a:r>
+                    </a:p>
+                  </a:txBody>
+                  <a:tcPr anchor="ctr" marL="73152"/>
+                </a:tc>
+                <a:tc>
+                  <a:txBody>
+                    <a:bodyPr wrap="square"/>
+                    <a:lstStyle/>
+                    <a:p>
+                      <a:r>
+                        <a:rPr sz="1050">
                           <a:solidFill>
                             <a:srgbClr val="1A2332"/>
                           </a:solidFill>
@@ -23585,578 +26200,42 @@
                   <a:tcPr anchor="ctr" marL="73152"/>
                 </a:tc>
               </a:tr>
-              <a:tr h="329184">
-                <a:tc>
-                  <a:txBody>
-                    <a:bodyPr wrap="square"/>
-                    <a:lstStyle/>
-                    <a:p>
-                      <a:r>
-                        <a:rPr sz="1200">
-                          <a:solidFill>
-                            <a:srgbClr val="1A2332"/>
-                          </a:solidFill>
-                          <a:latin typeface="Calibri"/>
-                        </a:rPr>
-                        <a:t>@thegermantravelguy</a:t>
-                      </a:r>
-                    </a:p>
-                  </a:txBody>
-                  <a:tcPr anchor="ctr" marL="73152">
-                    <a:solidFill>
-                      <a:srgbClr val="F1EBDF"/>
-                    </a:solidFill>
-                  </a:tcPr>
-                </a:tc>
-                <a:tc>
-                  <a:txBody>
-                    <a:bodyPr wrap="square"/>
-                    <a:lstStyle/>
-                    <a:p>
-                      <a:r>
-                        <a:rPr sz="1200">
-                          <a:solidFill>
-                            <a:srgbClr val="1A2332"/>
-                          </a:solidFill>
-                          <a:latin typeface="Calibri"/>
-                        </a:rPr>
-                        <a:t>tiktok</a:t>
-                      </a:r>
-                    </a:p>
-                  </a:txBody>
-                  <a:tcPr anchor="ctr" marL="73152">
-                    <a:solidFill>
-                      <a:srgbClr val="F1EBDF"/>
-                    </a:solidFill>
-                  </a:tcPr>
-                </a:tc>
-                <a:tc>
-                  <a:txBody>
-                    <a:bodyPr wrap="square"/>
-                    <a:lstStyle/>
-                    <a:p>
-                      <a:r>
-                        <a:rPr sz="1200">
-                          <a:solidFill>
-                            <a:srgbClr val="1A2332"/>
-                          </a:solidFill>
-                          <a:latin typeface="Calibri"/>
-                        </a:rPr>
-                        <a:t>3.1M</a:t>
-                      </a:r>
-                    </a:p>
-                  </a:txBody>
-                  <a:tcPr anchor="ctr" marL="73152">
-                    <a:solidFill>
-                      <a:srgbClr val="F1EBDF"/>
-                    </a:solidFill>
-                  </a:tcPr>
-                </a:tc>
-                <a:tc>
-                  <a:txBody>
-                    <a:bodyPr wrap="square"/>
-                    <a:lstStyle/>
-                    <a:p>
-                      <a:r>
-                        <a:rPr sz="1200">
-                          <a:solidFill>
-                            <a:srgbClr val="1A2332"/>
-                          </a:solidFill>
-                          <a:latin typeface="Calibri"/>
-                        </a:rPr>
-                        <a:t>0</a:t>
-                      </a:r>
-                    </a:p>
-                  </a:txBody>
-                  <a:tcPr anchor="ctr" marL="73152">
-                    <a:solidFill>
-                      <a:srgbClr val="F1EBDF"/>
-                    </a:solidFill>
-                  </a:tcPr>
-                </a:tc>
-              </a:tr>
-              <a:tr h="329184">
-                <a:tc>
-                  <a:txBody>
-                    <a:bodyPr wrap="square"/>
-                    <a:lstStyle/>
-                    <a:p>
-                      <a:r>
-                        <a:rPr sz="1200">
-                          <a:solidFill>
-                            <a:srgbClr val="1A2332"/>
-                          </a:solidFill>
-                          <a:latin typeface="Calibri"/>
-                        </a:rPr>
-                        <a:t>@doyoutravel</a:t>
-                      </a:r>
-                    </a:p>
-                  </a:txBody>
-                  <a:tcPr anchor="ctr" marL="73152"/>
-                </a:tc>
-                <a:tc>
-                  <a:txBody>
-                    <a:bodyPr wrap="square"/>
-                    <a:lstStyle/>
-                    <a:p>
-                      <a:r>
-                        <a:rPr sz="1200">
-                          <a:solidFill>
-                            <a:srgbClr val="1A2332"/>
-                          </a:solidFill>
-                          <a:latin typeface="Calibri"/>
-                        </a:rPr>
-                        <a:t>instagram</a:t>
-                      </a:r>
-                    </a:p>
-                  </a:txBody>
-                  <a:tcPr anchor="ctr" marL="73152"/>
-                </a:tc>
-                <a:tc>
-                  <a:txBody>
-                    <a:bodyPr wrap="square"/>
-                    <a:lstStyle/>
-                    <a:p>
-                      <a:r>
-                        <a:rPr sz="1200">
-                          <a:solidFill>
-                            <a:srgbClr val="1A2332"/>
-                          </a:solidFill>
-                          <a:latin typeface="Calibri"/>
-                        </a:rPr>
-                        <a:t>2.9M</a:t>
-                      </a:r>
-                    </a:p>
-                  </a:txBody>
-                  <a:tcPr anchor="ctr" marL="73152"/>
-                </a:tc>
-                <a:tc>
-                  <a:txBody>
-                    <a:bodyPr wrap="square"/>
-                    <a:lstStyle/>
-                    <a:p>
-                      <a:r>
-                        <a:rPr sz="1200">
-                          <a:solidFill>
-                            <a:srgbClr val="1A2332"/>
-                          </a:solidFill>
-                          <a:latin typeface="Calibri"/>
-                        </a:rPr>
-                        <a:t>0</a:t>
-                      </a:r>
-                    </a:p>
-                  </a:txBody>
-                  <a:tcPr anchor="ctr" marL="73152"/>
-                </a:tc>
-              </a:tr>
-              <a:tr h="329184">
-                <a:tc>
-                  <a:txBody>
-                    <a:bodyPr wrap="square"/>
-                    <a:lstStyle/>
-                    <a:p>
-                      <a:r>
-                        <a:rPr sz="1200">
-                          <a:solidFill>
-                            <a:srgbClr val="1A2332"/>
-                          </a:solidFill>
-                          <a:latin typeface="Calibri"/>
-                        </a:rPr>
-                        <a:t>@thebucketlistfamily</a:t>
-                      </a:r>
-                    </a:p>
-                  </a:txBody>
-                  <a:tcPr anchor="ctr" marL="73152">
-                    <a:solidFill>
-                      <a:srgbClr val="F1EBDF"/>
-                    </a:solidFill>
-                  </a:tcPr>
-                </a:tc>
-                <a:tc>
-                  <a:txBody>
-                    <a:bodyPr wrap="square"/>
-                    <a:lstStyle/>
-                    <a:p>
-                      <a:r>
-                        <a:rPr sz="1200">
-                          <a:solidFill>
-                            <a:srgbClr val="1A2332"/>
-                          </a:solidFill>
-                          <a:latin typeface="Calibri"/>
-                        </a:rPr>
-                        <a:t>instagram</a:t>
-                      </a:r>
-                    </a:p>
-                  </a:txBody>
-                  <a:tcPr anchor="ctr" marL="73152">
-                    <a:solidFill>
-                      <a:srgbClr val="F1EBDF"/>
-                    </a:solidFill>
-                  </a:tcPr>
-                </a:tc>
-                <a:tc>
-                  <a:txBody>
-                    <a:bodyPr wrap="square"/>
-                    <a:lstStyle/>
-                    <a:p>
-                      <a:r>
-                        <a:rPr sz="1200">
-                          <a:solidFill>
-                            <a:srgbClr val="1A2332"/>
-                          </a:solidFill>
-                          <a:latin typeface="Calibri"/>
-                        </a:rPr>
-                        <a:t>2.6M</a:t>
-                      </a:r>
-                    </a:p>
-                  </a:txBody>
-                  <a:tcPr anchor="ctr" marL="73152">
-                    <a:solidFill>
-                      <a:srgbClr val="F1EBDF"/>
-                    </a:solidFill>
-                  </a:tcPr>
-                </a:tc>
-                <a:tc>
-                  <a:txBody>
-                    <a:bodyPr wrap="square"/>
-                    <a:lstStyle/>
-                    <a:p>
-                      <a:r>
-                        <a:rPr sz="1200">
-                          <a:solidFill>
-                            <a:srgbClr val="1A2332"/>
-                          </a:solidFill>
-                          <a:latin typeface="Calibri"/>
-                        </a:rPr>
-                        <a:t>2</a:t>
-                      </a:r>
-                    </a:p>
-                  </a:txBody>
-                  <a:tcPr anchor="ctr" marL="73152">
-                    <a:solidFill>
-                      <a:srgbClr val="F1EBDF"/>
-                    </a:solidFill>
-                  </a:tcPr>
-                </a:tc>
-              </a:tr>
-              <a:tr h="329184">
-                <a:tc>
-                  <a:txBody>
-                    <a:bodyPr wrap="square"/>
-                    <a:lstStyle/>
-                    <a:p>
-                      <a:r>
-                        <a:rPr sz="1200">
-                          <a:solidFill>
-                            <a:srgbClr val="1A2332"/>
-                          </a:solidFill>
-                          <a:latin typeface="Calibri"/>
-                        </a:rPr>
-                        <a:t>@drewbinsky</a:t>
-                      </a:r>
-                    </a:p>
-                  </a:txBody>
-                  <a:tcPr anchor="ctr" marL="73152"/>
-                </a:tc>
-                <a:tc>
-                  <a:txBody>
-                    <a:bodyPr wrap="square"/>
-                    <a:lstStyle/>
-                    <a:p>
-                      <a:r>
-                        <a:rPr sz="1200">
-                          <a:solidFill>
-                            <a:srgbClr val="1A2332"/>
-                          </a:solidFill>
-                          <a:latin typeface="Calibri"/>
-                        </a:rPr>
-                        <a:t>instagram</a:t>
-                      </a:r>
-                    </a:p>
-                  </a:txBody>
-                  <a:tcPr anchor="ctr" marL="73152"/>
-                </a:tc>
-                <a:tc>
-                  <a:txBody>
-                    <a:bodyPr wrap="square"/>
-                    <a:lstStyle/>
-                    <a:p>
-                      <a:r>
-                        <a:rPr sz="1200">
-                          <a:solidFill>
-                            <a:srgbClr val="1A2332"/>
-                          </a:solidFill>
-                          <a:latin typeface="Calibri"/>
-                        </a:rPr>
-                        <a:t>2.4M</a:t>
-                      </a:r>
-                    </a:p>
-                  </a:txBody>
-                  <a:tcPr anchor="ctr" marL="73152"/>
-                </a:tc>
-                <a:tc>
-                  <a:txBody>
-                    <a:bodyPr wrap="square"/>
-                    <a:lstStyle/>
-                    <a:p>
-                      <a:r>
-                        <a:rPr sz="1200">
-                          <a:solidFill>
-                            <a:srgbClr val="1A2332"/>
-                          </a:solidFill>
-                          <a:latin typeface="Calibri"/>
-                        </a:rPr>
-                        <a:t>0</a:t>
-                      </a:r>
-                    </a:p>
-                  </a:txBody>
-                  <a:tcPr anchor="ctr" marL="73152"/>
-                </a:tc>
-              </a:tr>
-              <a:tr h="329184">
-                <a:tc>
-                  <a:txBody>
-                    <a:bodyPr wrap="square"/>
-                    <a:lstStyle/>
-                    <a:p>
-                      <a:r>
-                        <a:rPr sz="1200">
-                          <a:solidFill>
-                            <a:srgbClr val="1A2332"/>
-                          </a:solidFill>
-                          <a:latin typeface="Calibri"/>
-                        </a:rPr>
-                        <a:t>@danmaniel</a:t>
-                      </a:r>
-                    </a:p>
-                  </a:txBody>
-                  <a:tcPr anchor="ctr" marL="73152">
-                    <a:solidFill>
-                      <a:srgbClr val="F1EBDF"/>
-                    </a:solidFill>
-                  </a:tcPr>
-                </a:tc>
-                <a:tc>
-                  <a:txBody>
-                    <a:bodyPr wrap="square"/>
-                    <a:lstStyle/>
-                    <a:p>
-                      <a:r>
-                        <a:rPr sz="1200">
-                          <a:solidFill>
-                            <a:srgbClr val="1A2332"/>
-                          </a:solidFill>
-                          <a:latin typeface="Calibri"/>
-                        </a:rPr>
-                        <a:t>tiktok</a:t>
-                      </a:r>
-                    </a:p>
-                  </a:txBody>
-                  <a:tcPr anchor="ctr" marL="73152">
-                    <a:solidFill>
-                      <a:srgbClr val="F1EBDF"/>
-                    </a:solidFill>
-                  </a:tcPr>
-                </a:tc>
-                <a:tc>
-                  <a:txBody>
-                    <a:bodyPr wrap="square"/>
-                    <a:lstStyle/>
-                    <a:p>
-                      <a:r>
-                        <a:rPr sz="1200">
-                          <a:solidFill>
-                            <a:srgbClr val="1A2332"/>
-                          </a:solidFill>
-                          <a:latin typeface="Calibri"/>
-                        </a:rPr>
-                        <a:t>2.4M</a:t>
-                      </a:r>
-                    </a:p>
-                  </a:txBody>
-                  <a:tcPr anchor="ctr" marL="73152">
-                    <a:solidFill>
-                      <a:srgbClr val="F1EBDF"/>
-                    </a:solidFill>
-                  </a:tcPr>
-                </a:tc>
-                <a:tc>
-                  <a:txBody>
-                    <a:bodyPr wrap="square"/>
-                    <a:lstStyle/>
-                    <a:p>
-                      <a:r>
-                        <a:rPr sz="1200">
-                          <a:solidFill>
-                            <a:srgbClr val="1A2332"/>
-                          </a:solidFill>
-                          <a:latin typeface="Calibri"/>
-                        </a:rPr>
-                        <a:t>0</a:t>
-                      </a:r>
-                    </a:p>
-                  </a:txBody>
-                  <a:tcPr anchor="ctr" marL="73152">
-                    <a:solidFill>
-                      <a:srgbClr val="F1EBDF"/>
-                    </a:solidFill>
-                  </a:tcPr>
-                </a:tc>
-              </a:tr>
-              <a:tr h="329184">
-                <a:tc>
-                  <a:txBody>
-                    <a:bodyPr wrap="square"/>
-                    <a:lstStyle/>
-                    <a:p>
-                      <a:r>
-                        <a:rPr sz="1200">
-                          <a:solidFill>
-                            <a:srgbClr val="1A2332"/>
-                          </a:solidFill>
-                          <a:latin typeface="Calibri"/>
-                        </a:rPr>
-                        <a:t>@highonlifee</a:t>
-                      </a:r>
-                    </a:p>
-                  </a:txBody>
-                  <a:tcPr anchor="ctr" marL="73152"/>
-                </a:tc>
-                <a:tc>
-                  <a:txBody>
-                    <a:bodyPr wrap="square"/>
-                    <a:lstStyle/>
-                    <a:p>
-                      <a:r>
-                        <a:rPr sz="1200">
-                          <a:solidFill>
-                            <a:srgbClr val="1A2332"/>
-                          </a:solidFill>
-                          <a:latin typeface="Calibri"/>
-                        </a:rPr>
-                        <a:t>instagram</a:t>
-                      </a:r>
-                    </a:p>
-                  </a:txBody>
-                  <a:tcPr anchor="ctr" marL="73152"/>
-                </a:tc>
-                <a:tc>
-                  <a:txBody>
-                    <a:bodyPr wrap="square"/>
-                    <a:lstStyle/>
-                    <a:p>
-                      <a:r>
-                        <a:rPr sz="1200">
-                          <a:solidFill>
-                            <a:srgbClr val="1A2332"/>
-                          </a:solidFill>
-                          <a:latin typeface="Calibri"/>
-                        </a:rPr>
-                        <a:t>2.1M</a:t>
-                      </a:r>
-                    </a:p>
-                  </a:txBody>
-                  <a:tcPr anchor="ctr" marL="73152"/>
-                </a:tc>
-                <a:tc>
-                  <a:txBody>
-                    <a:bodyPr wrap="square"/>
-                    <a:lstStyle/>
-                    <a:p>
-                      <a:r>
-                        <a:rPr sz="1200">
-                          <a:solidFill>
-                            <a:srgbClr val="1A2332"/>
-                          </a:solidFill>
-                          <a:latin typeface="Calibri"/>
-                        </a:rPr>
-                        <a:t>0</a:t>
-                      </a:r>
-                    </a:p>
-                  </a:txBody>
-                  <a:tcPr anchor="ctr" marL="73152"/>
-                </a:tc>
-              </a:tr>
-              <a:tr h="329184">
-                <a:tc>
-                  <a:txBody>
-                    <a:bodyPr wrap="square"/>
-                    <a:lstStyle/>
-                    <a:p>
-                      <a:r>
-                        <a:rPr sz="1200">
-                          <a:solidFill>
-                            <a:srgbClr val="1A2332"/>
-                          </a:solidFill>
-                          <a:latin typeface="Calibri"/>
-                        </a:rPr>
-                        <a:t>@gypsea_lust</a:t>
-                      </a:r>
-                    </a:p>
-                  </a:txBody>
-                  <a:tcPr anchor="ctr" marL="73152">
-                    <a:solidFill>
-                      <a:srgbClr val="F1EBDF"/>
-                    </a:solidFill>
-                  </a:tcPr>
-                </a:tc>
-                <a:tc>
-                  <a:txBody>
-                    <a:bodyPr wrap="square"/>
-                    <a:lstStyle/>
-                    <a:p>
-                      <a:r>
-                        <a:rPr sz="1200">
-                          <a:solidFill>
-                            <a:srgbClr val="1A2332"/>
-                          </a:solidFill>
-                          <a:latin typeface="Calibri"/>
-                        </a:rPr>
-                        <a:t>instagram</a:t>
-                      </a:r>
-                    </a:p>
-                  </a:txBody>
-                  <a:tcPr anchor="ctr" marL="73152">
-                    <a:solidFill>
-                      <a:srgbClr val="F1EBDF"/>
-                    </a:solidFill>
-                  </a:tcPr>
-                </a:tc>
-                <a:tc>
-                  <a:txBody>
-                    <a:bodyPr wrap="square"/>
-                    <a:lstStyle/>
-                    <a:p>
-                      <a:r>
-                        <a:rPr sz="1200">
-                          <a:solidFill>
-                            <a:srgbClr val="1A2332"/>
-                          </a:solidFill>
-                          <a:latin typeface="Calibri"/>
-                        </a:rPr>
-                        <a:t>1.8M</a:t>
-                      </a:r>
-                    </a:p>
-                  </a:txBody>
-                  <a:tcPr anchor="ctr" marL="73152">
-                    <a:solidFill>
-                      <a:srgbClr val="F1EBDF"/>
-                    </a:solidFill>
-                  </a:tcPr>
-                </a:tc>
-                <a:tc>
-                  <a:txBody>
-                    <a:bodyPr wrap="square"/>
-                    <a:lstStyle/>
-                    <a:p>
-                      <a:r>
-                        <a:rPr sz="1200">
-                          <a:solidFill>
-                            <a:srgbClr val="1A2332"/>
-                          </a:solidFill>
-                          <a:latin typeface="Calibri"/>
-                        </a:rPr>
-                        <a:t>0</a:t>
+              <a:tr h="192024">
+                <a:tc>
+                  <a:txBody>
+                    <a:bodyPr wrap="square"/>
+                    <a:lstStyle/>
+                    <a:p>
+                      <a:r>
+                        <a:rPr sz="1050">
+                          <a:solidFill>
+                            <a:srgbClr val="1A2332"/>
+                          </a:solidFill>
+                          <a:latin typeface="Calibri"/>
+                        </a:rPr>
+                        <a:t>cruise</a:t>
+                      </a:r>
+                    </a:p>
+                  </a:txBody>
+                  <a:tcPr anchor="ctr" marL="73152">
+                    <a:solidFill>
+                      <a:srgbClr val="F1EBDF"/>
+                    </a:solidFill>
+                  </a:tcPr>
+                </a:tc>
+                <a:tc>
+                  <a:txBody>
+                    <a:bodyPr wrap="square"/>
+                    <a:lstStyle/>
+                    <a:p>
+                      <a:r>
+                        <a:rPr sz="1050">
+                          <a:solidFill>
+                            <a:srgbClr val="1A2332"/>
+                          </a:solidFill>
+                          <a:latin typeface="Calibri"/>
+                        </a:rPr>
+                        <a:t>1</a:t>
                       </a:r>
                     </a:p>
                   </a:txBody>
@@ -24179,8 +26258,131 @@
         </p:nvSpPr>
         <p:spPr>
           <a:xfrm>
-            <a:off x="822960" y="5943600"/>
-            <a:ext cx="10515600" cy="365760"/>
+            <a:off x="5486400" y="2148840"/>
+            <a:ext cx="5852160" cy="4023360"/>
+          </a:xfrm>
+          <a:prstGeom prst="rect">
+            <a:avLst/>
+          </a:prstGeom>
+          <a:noFill/>
+        </p:spPr>
+        <p:txBody>
+          <a:bodyPr wrap="square">
+            <a:spAutoFit/>
+          </a:bodyPr>
+          <a:lstStyle/>
+          <a:p>
+            <a:pPr>
+              <a:spcAft>
+                <a:spcPts val="800"/>
+              </a:spcAft>
+            </a:pPr>
+            <a:r>
+              <a:rPr sz="1400" b="1">
+                <a:solidFill>
+                  <a:srgbClr val="1A2332"/>
+                </a:solidFill>
+                <a:latin typeface="Calibri"/>
+              </a:rPr>
+              <a:t>Platform split: </a:t>
+            </a:r>
+            <a:r>
+              <a:rPr sz="1400">
+                <a:solidFill>
+                  <a:srgbClr val="1A2332"/>
+                </a:solidFill>
+                <a:latin typeface="Calibri"/>
+              </a:rPr>
+              <a:t> 50 TikTok / 50 Instagram.</a:t>
+            </a:r>
+          </a:p>
+          <a:p>
+            <a:pPr>
+              <a:spcAft>
+                <a:spcPts val="800"/>
+              </a:spcAft>
+            </a:pPr>
+            <a:r>
+              <a:rPr sz="1400" b="1">
+                <a:solidFill>
+                  <a:srgbClr val="1A2332"/>
+                </a:solidFill>
+                <a:latin typeface="Calibri"/>
+              </a:rPr>
+              <a:t>Follower counts: </a:t>
+            </a:r>
+            <a:r>
+              <a:rPr sz="1400">
+                <a:solidFill>
+                  <a:srgbClr val="1A2332"/>
+                </a:solidFill>
+                <a:latin typeface="Calibri"/>
+              </a:rPr>
+              <a:t> 73 cited by sources, 27 marked unknown — counts are as cited, not independently audited.</a:t>
+            </a:r>
+          </a:p>
+          <a:p>
+            <a:pPr>
+              <a:spcAft>
+                <a:spcPts val="800"/>
+              </a:spcAft>
+            </a:pPr>
+            <a:r>
+              <a:rPr sz="1400" b="1">
+                <a:solidFill>
+                  <a:srgbClr val="1A2332"/>
+                </a:solidFill>
+                <a:latin typeface="Calibri"/>
+              </a:rPr>
+              <a:t>Itinerary yield: </a:t>
+            </a:r>
+            <a:r>
+              <a:rPr sz="1400">
+                <a:solidFill>
+                  <a:srgbClr val="1A2332"/>
+                </a:solidFill>
+                <a:latin typeface="Calibri"/>
+              </a:rPr>
+              <a:t> 53 of the 100 creators have at least one extracted itinerary (94 itineraries total).</a:t>
+            </a:r>
+          </a:p>
+          <a:p>
+            <a:pPr>
+              <a:spcAft>
+                <a:spcPts val="800"/>
+              </a:spcAft>
+            </a:pPr>
+            <a:r>
+              <a:rPr sz="1400" b="1">
+                <a:solidFill>
+                  <a:srgbClr val="1A2332"/>
+                </a:solidFill>
+                <a:latin typeface="Calibri"/>
+              </a:rPr>
+              <a:t>Quarantined: </a:t>
+            </a:r>
+            <a:r>
+              <a:rPr sz="1400">
+                <a:solidFill>
+                  <a:srgbClr val="1A2332"/>
+                </a:solidFill>
+                <a:latin typeface="Calibri"/>
+              </a:rPr>
+              <a:t> 8 creator records quarantined for identity problems (brand or operator accounts, misattributed content, possible list typos) — see Appendix C.</a:t>
+            </a:r>
+          </a:p>
+        </p:txBody>
+      </p:sp>
+      <p:sp>
+        <p:nvSpPr>
+          <p:cNvPr id="7" name="TextBox 6"/>
+          <p:cNvSpPr txBox="1"/>
+          <p:nvPr/>
+        </p:nvSpPr>
+        <p:spPr>
+          <a:xfrm>
+            <a:off x="5486400" y="5212080"/>
+            <a:ext cx="5852160" cy="731520"/>
           </a:xfrm>
           <a:prstGeom prst="rect">
             <a:avLst/>
@@ -24205,14 +26407,14 @@
                 </a:solidFill>
                 <a:latin typeface="Calibri"/>
               </a:rPr>
-              <a:t>Follower counts are as cited by sources; ties broken arbitrarily.</a:t>
+              <a:t>Niche labels are as recorded at compile time; 27 follower counts are unknown and were not estimated.</a:t>
             </a:r>
           </a:p>
         </p:txBody>
       </p:sp>
       <p:sp>
         <p:nvSpPr>
-          <p:cNvPr id="7" name="FOOTER"/>
+          <p:cNvPr id="8" name="FOOTER"/>
           <p:cNvSpPr txBox="1"/>
           <p:nvPr/>
         </p:nvSpPr>
@@ -24244,7 +26446,7 @@
                 </a:solidFill>
                 <a:latin typeface="Calibri"/>
               </a:rPr>
-              <a:t>Travel Itinerary Pilot  •  Information deck  •  3 / 19</a:t>
+              <a:t>Travel Influencer Itinerary Pilot — Research Findings  •  4 / 20</a:t>
             </a:r>
           </a:p>
         </p:txBody>
@@ -24257,7 +26459,7 @@
 </p:sld>
 </file>
 
-<file path=ppt/slides/slide4.xml><?xml version="1.0" encoding="utf-8"?>
+<file path=ppt/slides/slide5.xml><?xml version="1.0" encoding="utf-8"?>
 <p:sld xmlns:a="http://schemas.openxmlformats.org/drawingml/2006/main" xmlns:p="http://schemas.openxmlformats.org/presentationml/2006/main" xmlns:r="http://schemas.openxmlformats.org/officeDocument/2006/relationships">
   <p:cSld>
     <p:bg>
@@ -24309,7 +26511,7 @@
                 </a:solidFill>
                 <a:latin typeface="Calibri"/>
               </a:rPr>
-              <a:t>VERIFICATION</a:t>
+              <a:t>THE ITINERARIES</a:t>
             </a:r>
           </a:p>
         </p:txBody>
@@ -24385,27 +26587,389 @@
               </a:spcAft>
             </a:pPr>
             <a:r>
-              <a:rPr sz="3400" b="0">
+              <a:rPr sz="3200" b="0">
                 <a:solidFill>
                   <a:srgbClr val="1A2332"/>
                 </a:solidFill>
                 <a:latin typeface="Georgia"/>
               </a:rPr>
-              <a:t>Every itinerary checked against its source</a:t>
+              <a:t>Composition of the 94 itineraries</a:t>
             </a:r>
           </a:p>
         </p:txBody>
       </p:sp>
+      <p:graphicFrame>
+        <p:nvGraphicFramePr>
+          <p:cNvPr id="5" name="Table 4"/>
+          <p:cNvGraphicFramePr>
+            <a:graphicFrameLocks noGrp="1"/>
+          </p:cNvGraphicFramePr>
+          <p:nvPr/>
+        </p:nvGraphicFramePr>
+        <p:xfrm>
+          <a:off x="822960" y="2148840"/>
+          <a:ext cx="6949440" cy="3218688"/>
+        </p:xfrm>
+        <a:graphic>
+          <a:graphicData uri="http://schemas.openxmlformats.org/drawingml/2006/table">
+            <a:tbl>
+              <a:tblPr firstRow="1" bandRow="1">
+                <a:tableStyleId>{5C22544A-7EE6-4342-B048-85BDC9FD1C3A}</a:tableStyleId>
+              </a:tblPr>
+              <a:tblGrid>
+                <a:gridCol w="4572000"/>
+                <a:gridCol w="2377440"/>
+              </a:tblGrid>
+              <a:tr h="402336">
+                <a:tc>
+                  <a:txBody>
+                    <a:bodyPr wrap="square"/>
+                    <a:lstStyle/>
+                    <a:p>
+                      <a:r>
+                        <a:rPr sz="1250" b="1">
+                          <a:solidFill>
+                            <a:srgbClr val="FFFFFF"/>
+                          </a:solidFill>
+                          <a:latin typeface="Calibri"/>
+                        </a:rPr>
+                        <a:t>Measure</a:t>
+                      </a:r>
+                    </a:p>
+                  </a:txBody>
+                  <a:tcPr anchor="ctr">
+                    <a:solidFill>
+                      <a:srgbClr val="1A2332"/>
+                    </a:solidFill>
+                  </a:tcPr>
+                </a:tc>
+                <a:tc>
+                  <a:txBody>
+                    <a:bodyPr wrap="square"/>
+                    <a:lstStyle/>
+                    <a:p>
+                      <a:r>
+                        <a:rPr sz="1250" b="1">
+                          <a:solidFill>
+                            <a:srgbClr val="FFFFFF"/>
+                          </a:solidFill>
+                          <a:latin typeface="Calibri"/>
+                        </a:rPr>
+                        <a:t>Value</a:t>
+                      </a:r>
+                    </a:p>
+                  </a:txBody>
+                  <a:tcPr anchor="ctr">
+                    <a:solidFill>
+                      <a:srgbClr val="1A2332"/>
+                    </a:solidFill>
+                  </a:tcPr>
+                </a:tc>
+              </a:tr>
+              <a:tr h="402336">
+                <a:tc>
+                  <a:txBody>
+                    <a:bodyPr wrap="square"/>
+                    <a:lstStyle/>
+                    <a:p>
+                      <a:r>
+                        <a:rPr sz="1250">
+                          <a:solidFill>
+                            <a:srgbClr val="1A2332"/>
+                          </a:solidFill>
+                          <a:latin typeface="Calibri"/>
+                        </a:rPr>
+                        <a:t>Itineraries</a:t>
+                      </a:r>
+                    </a:p>
+                  </a:txBody>
+                  <a:tcPr anchor="ctr" marL="73152"/>
+                </a:tc>
+                <a:tc>
+                  <a:txBody>
+                    <a:bodyPr wrap="square"/>
+                    <a:lstStyle/>
+                    <a:p>
+                      <a:r>
+                        <a:rPr sz="1250">
+                          <a:solidFill>
+                            <a:srgbClr val="1A2332"/>
+                          </a:solidFill>
+                          <a:latin typeface="Calibri"/>
+                        </a:rPr>
+                        <a:t>94</a:t>
+                      </a:r>
+                    </a:p>
+                  </a:txBody>
+                  <a:tcPr anchor="ctr" marL="73152"/>
+                </a:tc>
+              </a:tr>
+              <a:tr h="402336">
+                <a:tc>
+                  <a:txBody>
+                    <a:bodyPr wrap="square"/>
+                    <a:lstStyle/>
+                    <a:p>
+                      <a:r>
+                        <a:rPr sz="1250">
+                          <a:solidFill>
+                            <a:srgbClr val="1A2332"/>
+                          </a:solidFill>
+                          <a:latin typeface="Calibri"/>
+                        </a:rPr>
+                        <a:t>Itinerary items</a:t>
+                      </a:r>
+                    </a:p>
+                  </a:txBody>
+                  <a:tcPr anchor="ctr" marL="73152">
+                    <a:solidFill>
+                      <a:srgbClr val="F1EBDF"/>
+                    </a:solidFill>
+                  </a:tcPr>
+                </a:tc>
+                <a:tc>
+                  <a:txBody>
+                    <a:bodyPr wrap="square"/>
+                    <a:lstStyle/>
+                    <a:p>
+                      <a:r>
+                        <a:rPr sz="1250">
+                          <a:solidFill>
+                            <a:srgbClr val="1A2332"/>
+                          </a:solidFill>
+                          <a:latin typeface="Calibri"/>
+                        </a:rPr>
+                        <a:t>1,155</a:t>
+                      </a:r>
+                    </a:p>
+                  </a:txBody>
+                  <a:tcPr anchor="ctr" marL="73152">
+                    <a:solidFill>
+                      <a:srgbClr val="F1EBDF"/>
+                    </a:solidFill>
+                  </a:tcPr>
+                </a:tc>
+              </a:tr>
+              <a:tr h="402336">
+                <a:tc>
+                  <a:txBody>
+                    <a:bodyPr wrap="square"/>
+                    <a:lstStyle/>
+                    <a:p>
+                      <a:r>
+                        <a:rPr sz="1250">
+                          <a:solidFill>
+                            <a:srgbClr val="1A2332"/>
+                          </a:solidFill>
+                          <a:latin typeface="Calibri"/>
+                        </a:rPr>
+                        <a:t>Destinations covered</a:t>
+                      </a:r>
+                    </a:p>
+                  </a:txBody>
+                  <a:tcPr anchor="ctr" marL="73152"/>
+                </a:tc>
+                <a:tc>
+                  <a:txBody>
+                    <a:bodyPr wrap="square"/>
+                    <a:lstStyle/>
+                    <a:p>
+                      <a:r>
+                        <a:rPr sz="1250">
+                          <a:solidFill>
+                            <a:srgbClr val="1A2332"/>
+                          </a:solidFill>
+                          <a:latin typeface="Calibri"/>
+                        </a:rPr>
+                        <a:t>85</a:t>
+                      </a:r>
+                    </a:p>
+                  </a:txBody>
+                  <a:tcPr anchor="ctr" marL="73152"/>
+                </a:tc>
+              </a:tr>
+              <a:tr h="402336">
+                <a:tc>
+                  <a:txBody>
+                    <a:bodyPr wrap="square"/>
+                    <a:lstStyle/>
+                    <a:p>
+                      <a:r>
+                        <a:rPr sz="1250">
+                          <a:solidFill>
+                            <a:srgbClr val="1A2332"/>
+                          </a:solidFill>
+                          <a:latin typeface="Calibri"/>
+                        </a:rPr>
+                        <a:t>Sources cited</a:t>
+                      </a:r>
+                    </a:p>
+                  </a:txBody>
+                  <a:tcPr anchor="ctr" marL="73152">
+                    <a:solidFill>
+                      <a:srgbClr val="F1EBDF"/>
+                    </a:solidFill>
+                  </a:tcPr>
+                </a:tc>
+                <a:tc>
+                  <a:txBody>
+                    <a:bodyPr wrap="square"/>
+                    <a:lstStyle/>
+                    <a:p>
+                      <a:r>
+                        <a:rPr sz="1250">
+                          <a:solidFill>
+                            <a:srgbClr val="1A2332"/>
+                          </a:solidFill>
+                          <a:latin typeface="Calibri"/>
+                        </a:rPr>
+                        <a:t>106</a:t>
+                      </a:r>
+                    </a:p>
+                  </a:txBody>
+                  <a:tcPr anchor="ctr" marL="73152">
+                    <a:solidFill>
+                      <a:srgbClr val="F1EBDF"/>
+                    </a:solidFill>
+                  </a:tcPr>
+                </a:tc>
+              </a:tr>
+              <a:tr h="402336">
+                <a:tc>
+                  <a:txBody>
+                    <a:bodyPr wrap="square"/>
+                    <a:lstStyle/>
+                    <a:p>
+                      <a:r>
+                        <a:rPr sz="1250">
+                          <a:solidFill>
+                            <a:srgbClr val="1A2332"/>
+                          </a:solidFill>
+                          <a:latin typeface="Calibri"/>
+                        </a:rPr>
+                        <a:t>Trip-length range</a:t>
+                      </a:r>
+                    </a:p>
+                  </a:txBody>
+                  <a:tcPr anchor="ctr" marL="73152"/>
+                </a:tc>
+                <a:tc>
+                  <a:txBody>
+                    <a:bodyPr wrap="square"/>
+                    <a:lstStyle/>
+                    <a:p>
+                      <a:r>
+                        <a:rPr sz="1250">
+                          <a:solidFill>
+                            <a:srgbClr val="1A2332"/>
+                          </a:solidFill>
+                          <a:latin typeface="Calibri"/>
+                        </a:rPr>
+                        <a:t>1–90 days</a:t>
+                      </a:r>
+                    </a:p>
+                  </a:txBody>
+                  <a:tcPr anchor="ctr" marL="73152"/>
+                </a:tc>
+              </a:tr>
+              <a:tr h="402336">
+                <a:tc>
+                  <a:txBody>
+                    <a:bodyPr wrap="square"/>
+                    <a:lstStyle/>
+                    <a:p>
+                      <a:r>
+                        <a:rPr sz="1250">
+                          <a:solidFill>
+                            <a:srgbClr val="1A2332"/>
+                          </a:solidFill>
+                          <a:latin typeface="Calibri"/>
+                        </a:rPr>
+                        <a:t>Trips of 7 days or more</a:t>
+                      </a:r>
+                    </a:p>
+                  </a:txBody>
+                  <a:tcPr anchor="ctr" marL="73152">
+                    <a:solidFill>
+                      <a:srgbClr val="F1EBDF"/>
+                    </a:solidFill>
+                  </a:tcPr>
+                </a:tc>
+                <a:tc>
+                  <a:txBody>
+                    <a:bodyPr wrap="square"/>
+                    <a:lstStyle/>
+                    <a:p>
+                      <a:r>
+                        <a:rPr sz="1250">
+                          <a:solidFill>
+                            <a:srgbClr val="1A2332"/>
+                          </a:solidFill>
+                          <a:latin typeface="Calibri"/>
+                        </a:rPr>
+                        <a:t>47</a:t>
+                      </a:r>
+                    </a:p>
+                  </a:txBody>
+                  <a:tcPr anchor="ctr" marL="73152">
+                    <a:solidFill>
+                      <a:srgbClr val="F1EBDF"/>
+                    </a:solidFill>
+                  </a:tcPr>
+                </a:tc>
+              </a:tr>
+              <a:tr h="402336">
+                <a:tc>
+                  <a:txBody>
+                    <a:bodyPr wrap="square"/>
+                    <a:lstStyle/>
+                    <a:p>
+                      <a:r>
+                        <a:rPr sz="1250">
+                          <a:solidFill>
+                            <a:srgbClr val="1A2332"/>
+                          </a:solidFill>
+                          <a:latin typeface="Calibri"/>
+                        </a:rPr>
+                        <a:t>Itineraries with no fixed length (guides, not trips)</a:t>
+                      </a:r>
+                    </a:p>
+                  </a:txBody>
+                  <a:tcPr anchor="ctr" marL="73152"/>
+                </a:tc>
+                <a:tc>
+                  <a:txBody>
+                    <a:bodyPr wrap="square"/>
+                    <a:lstStyle/>
+                    <a:p>
+                      <a:r>
+                        <a:rPr sz="1250">
+                          <a:solidFill>
+                            <a:srgbClr val="1A2332"/>
+                          </a:solidFill>
+                          <a:latin typeface="Calibri"/>
+                        </a:rPr>
+                        <a:t>19</a:t>
+                      </a:r>
+                    </a:p>
+                  </a:txBody>
+                  <a:tcPr anchor="ctr" marL="73152"/>
+                </a:tc>
+              </a:tr>
+            </a:tbl>
+          </a:graphicData>
+        </a:graphic>
+      </p:graphicFrame>
       <p:sp>
         <p:nvSpPr>
-          <p:cNvPr id="5" name="TextBox 4"/>
+          <p:cNvPr id="6" name="TextBox 5"/>
           <p:cNvSpPr txBox="1"/>
           <p:nvPr/>
         </p:nvSpPr>
         <p:spPr>
           <a:xfrm>
-            <a:off x="822960" y="2377440"/>
-            <a:ext cx="3291840" cy="1280160"/>
+            <a:off x="8229600" y="2148840"/>
+            <a:ext cx="3108960" cy="4023360"/>
           </a:xfrm>
           <a:prstGeom prst="rect">
             <a:avLst/>
@@ -24418,239 +26982,60 @@
           </a:bodyPr>
           <a:lstStyle/>
           <a:p>
-            <a:pPr algn="l">
+            <a:pPr>
               <a:spcAft>
-                <a:spcPts val="200"/>
+                <a:spcPts val="800"/>
               </a:spcAft>
             </a:pPr>
             <a:r>
-              <a:rPr sz="4400" b="1">
+              <a:rPr sz="1400" b="1">
                 <a:solidFill>
-                  <a:srgbClr val="1F5C5C"/>
+                  <a:srgbClr val="1A2332"/>
                 </a:solidFill>
-                <a:latin typeface="Georgia"/>
+                <a:latin typeface="Calibri"/>
               </a:rPr>
-              <a:t>54</a:t>
+              <a:t>Longest: </a:t>
+            </a:r>
+            <a:r>
+              <a:rPr sz="1400">
+                <a:solidFill>
+                  <a:srgbClr val="1A2332"/>
+                </a:solidFill>
+                <a:latin typeface="Calibri"/>
+              </a:rPr>
+              <a:t> “3-Month Southeast Asia Itinerary: The Banana Pancake Trail” (90 days).</a:t>
             </a:r>
           </a:p>
           <a:p>
-            <a:pPr algn="l">
+            <a:pPr>
               <a:spcAft>
-                <a:spcPts val="400"/>
+                <a:spcPts val="800"/>
               </a:spcAft>
             </a:pPr>
             <a:r>
-              <a:rPr sz="1400" b="0">
+              <a:rPr sz="1400" b="1">
                 <a:solidFill>
-                  <a:srgbClr val="5C6678"/>
+                  <a:srgbClr val="1A2332"/>
                 </a:solidFill>
                 <a:latin typeface="Calibri"/>
               </a:rPr>
-              <a:t>high confidence</a:t>
+              <a:t>Note: </a:t>
+            </a:r>
+            <a:r>
+              <a:rPr sz="1400">
+                <a:solidFill>
+                  <a:srgbClr val="1A2332"/>
+                </a:solidFill>
+                <a:latin typeface="Calibri"/>
+              </a:rPr>
+              <a:t> trip-length figures exclude the 19 itineraries whose sources state no fixed length.</a:t>
             </a:r>
           </a:p>
         </p:txBody>
       </p:sp>
       <p:sp>
         <p:nvSpPr>
-          <p:cNvPr id="6" name="TextBox 5"/>
-          <p:cNvSpPr txBox="1"/>
-          <p:nvPr/>
-        </p:nvSpPr>
-        <p:spPr>
-          <a:xfrm>
-            <a:off x="4480560" y="2377440"/>
-            <a:ext cx="3291840" cy="1280160"/>
-          </a:xfrm>
-          <a:prstGeom prst="rect">
-            <a:avLst/>
-          </a:prstGeom>
-          <a:noFill/>
-        </p:spPr>
-        <p:txBody>
-          <a:bodyPr wrap="square">
-            <a:spAutoFit/>
-          </a:bodyPr>
-          <a:lstStyle/>
-          <a:p>
-            <a:pPr algn="l">
-              <a:spcAft>
-                <a:spcPts val="200"/>
-              </a:spcAft>
-            </a:pPr>
-            <a:r>
-              <a:rPr sz="4400" b="1">
-                <a:solidFill>
-                  <a:srgbClr val="B4632A"/>
-                </a:solidFill>
-                <a:latin typeface="Georgia"/>
-              </a:rPr>
-              <a:t>35</a:t>
-            </a:r>
-          </a:p>
-          <a:p>
-            <a:pPr algn="l">
-              <a:spcAft>
-                <a:spcPts val="400"/>
-              </a:spcAft>
-            </a:pPr>
-            <a:r>
-              <a:rPr sz="1400" b="0">
-                <a:solidFill>
-                  <a:srgbClr val="5C6678"/>
-                </a:solidFill>
-                <a:latin typeface="Calibri"/>
-              </a:rPr>
-              <a:t>medium confidence</a:t>
-            </a:r>
-          </a:p>
-        </p:txBody>
-      </p:sp>
-      <p:sp>
-        <p:nvSpPr>
-          <p:cNvPr id="7" name="TextBox 6"/>
-          <p:cNvSpPr txBox="1"/>
-          <p:nvPr/>
-        </p:nvSpPr>
-        <p:spPr>
-          <a:xfrm>
-            <a:off x="8138160" y="2377440"/>
-            <a:ext cx="3291840" cy="1280160"/>
-          </a:xfrm>
-          <a:prstGeom prst="rect">
-            <a:avLst/>
-          </a:prstGeom>
-          <a:noFill/>
-        </p:spPr>
-        <p:txBody>
-          <a:bodyPr wrap="square">
-            <a:spAutoFit/>
-          </a:bodyPr>
-          <a:lstStyle/>
-          <a:p>
-            <a:pPr algn="l">
-              <a:spcAft>
-                <a:spcPts val="200"/>
-              </a:spcAft>
-            </a:pPr>
-            <a:r>
-              <a:rPr sz="4400" b="1">
-                <a:solidFill>
-                  <a:srgbClr val="5C6678"/>
-                </a:solidFill>
-                <a:latin typeface="Georgia"/>
-              </a:rPr>
-              <a:t>5</a:t>
-            </a:r>
-          </a:p>
-          <a:p>
-            <a:pPr algn="l">
-              <a:spcAft>
-                <a:spcPts val="400"/>
-              </a:spcAft>
-            </a:pPr>
-            <a:r>
-              <a:rPr sz="1400" b="0">
-                <a:solidFill>
-                  <a:srgbClr val="5C6678"/>
-                </a:solidFill>
-                <a:latin typeface="Calibri"/>
-              </a:rPr>
-              <a:t>low confidence</a:t>
-            </a:r>
-          </a:p>
-        </p:txBody>
-      </p:sp>
-      <p:sp>
-        <p:nvSpPr>
-          <p:cNvPr id="8" name="TextBox 7"/>
-          <p:cNvSpPr txBox="1"/>
-          <p:nvPr/>
-        </p:nvSpPr>
-        <p:spPr>
-          <a:xfrm>
-            <a:off x="822960" y="4114800"/>
-            <a:ext cx="10515600" cy="2011680"/>
-          </a:xfrm>
-          <a:prstGeom prst="rect">
-            <a:avLst/>
-          </a:prstGeom>
-          <a:noFill/>
-        </p:spPr>
-        <p:txBody>
-          <a:bodyPr wrap="square">
-            <a:spAutoFit/>
-          </a:bodyPr>
-          <a:lstStyle/>
-          <a:p>
-            <a:pPr algn="l">
-              <a:spcAft>
-                <a:spcPts val="800"/>
-              </a:spcAft>
-            </a:pPr>
-            <a:r>
-              <a:rPr sz="1400" b="0">
-                <a:solidFill>
-                  <a:srgbClr val="1A2332"/>
-                </a:solidFill>
-                <a:latin typeface="Calibri"/>
-              </a:rPr>
-              <a:t>•  7 validation gates, fail-closed: nothing unverified enters the database.</a:t>
-            </a:r>
-          </a:p>
-          <a:p>
-            <a:pPr algn="l">
-              <a:spcAft>
-                <a:spcPts val="800"/>
-              </a:spcAft>
-            </a:pPr>
-            <a:r>
-              <a:rPr sz="1400" b="0">
-                <a:solidFill>
-                  <a:srgbClr val="1A2332"/>
-                </a:solidFill>
-                <a:latin typeface="Calibri"/>
-              </a:rPr>
-              <a:t>•  10 data corrections applied during verification (7 fixed, 1 re-verified, 1 quarantined, 1 exclusion).</a:t>
-            </a:r>
-          </a:p>
-          <a:p>
-            <a:pPr algn="l">
-              <a:spcAft>
-                <a:spcPts val="800"/>
-              </a:spcAft>
-            </a:pPr>
-            <a:r>
-              <a:rPr sz="1400" b="0">
-                <a:solidFill>
-                  <a:srgbClr val="1A2332"/>
-                </a:solidFill>
-                <a:latin typeface="Calibri"/>
-              </a:rPr>
-              <a:t>•  Evidence-only audit: PASS, 2026-09-16.</a:t>
-            </a:r>
-          </a:p>
-          <a:p>
-            <a:pPr algn="l">
-              <a:spcAft>
-                <a:spcPts val="800"/>
-              </a:spcAft>
-            </a:pPr>
-            <a:r>
-              <a:rPr sz="1400" b="0">
-                <a:solidFill>
-                  <a:srgbClr val="1A2332"/>
-                </a:solidFill>
-                <a:latin typeface="Calibri"/>
-              </a:rPr>
-              <a:t>•  8 handles quarantined — listed in the appendix with reasons.</a:t>
-            </a:r>
-          </a:p>
-        </p:txBody>
-      </p:sp>
-      <p:sp>
-        <p:nvSpPr>
-          <p:cNvPr id="9" name="FOOTER"/>
+          <p:cNvPr id="7" name="FOOTER"/>
           <p:cNvSpPr txBox="1"/>
           <p:nvPr/>
         </p:nvSpPr>
@@ -24682,7 +27067,7 @@
                 </a:solidFill>
                 <a:latin typeface="Calibri"/>
               </a:rPr>
-              <a:t>Travel Itinerary Pilot  •  Information deck  •  4 / 19</a:t>
+              <a:t>Travel Influencer Itinerary Pilot — Research Findings  •  5 / 20</a:t>
             </a:r>
           </a:p>
         </p:txBody>
@@ -24695,7 +27080,7 @@
 </p:sld>
 </file>
 
-<file path=ppt/slides/slide5.xml><?xml version="1.0" encoding="utf-8"?>
+<file path=ppt/slides/slide6.xml><?xml version="1.0" encoding="utf-8"?>
 <p:sld xmlns:a="http://schemas.openxmlformats.org/drawingml/2006/main" xmlns:p="http://schemas.openxmlformats.org/presentationml/2006/main" xmlns:r="http://schemas.openxmlformats.org/officeDocument/2006/relationships">
   <p:cSld>
     <p:bg>
@@ -24747,7 +27132,7 @@
                 </a:solidFill>
                 <a:latin typeface="Calibri"/>
               </a:rPr>
-              <a:t>TRIP LENGTHS</a:t>
+              <a:t>VALIDATION</a:t>
             </a:r>
           </a:p>
         </p:txBody>
@@ -24823,27 +27208,302 @@
               </a:spcAft>
             </a:pPr>
             <a:r>
-              <a:rPr sz="3400" b="0">
+              <a:rPr sz="3200" b="0">
                 <a:solidFill>
                   <a:srgbClr val="1A2332"/>
                 </a:solidFill>
                 <a:latin typeface="Georgia"/>
               </a:rPr>
-              <a:t>From a day trip to three months</a:t>
+              <a:t>Confidence levels and verification</a:t>
             </a:r>
           </a:p>
         </p:txBody>
       </p:sp>
+      <p:graphicFrame>
+        <p:nvGraphicFramePr>
+          <p:cNvPr id="5" name="Table 4"/>
+          <p:cNvGraphicFramePr>
+            <a:graphicFrameLocks noGrp="1"/>
+          </p:cNvGraphicFramePr>
+          <p:nvPr/>
+        </p:nvGraphicFramePr>
+        <p:xfrm>
+          <a:off x="822960" y="2148840"/>
+          <a:ext cx="10515600" cy="1828800"/>
+        </p:xfrm>
+        <a:graphic>
+          <a:graphicData uri="http://schemas.openxmlformats.org/drawingml/2006/table">
+            <a:tbl>
+              <a:tblPr firstRow="1" bandRow="1">
+                <a:tableStyleId>{5C22544A-7EE6-4342-B048-85BDC9FD1C3A}</a:tableStyleId>
+              </a:tblPr>
+              <a:tblGrid>
+                <a:gridCol w="1645920"/>
+                <a:gridCol w="1645920"/>
+                <a:gridCol w="7223760"/>
+              </a:tblGrid>
+              <a:tr h="457200">
+                <a:tc>
+                  <a:txBody>
+                    <a:bodyPr wrap="square"/>
+                    <a:lstStyle/>
+                    <a:p>
+                      <a:r>
+                        <a:rPr sz="1200" b="1">
+                          <a:solidFill>
+                            <a:srgbClr val="FFFFFF"/>
+                          </a:solidFill>
+                          <a:latin typeface="Calibri"/>
+                        </a:rPr>
+                        <a:t>Confidence</a:t>
+                      </a:r>
+                    </a:p>
+                  </a:txBody>
+                  <a:tcPr anchor="ctr">
+                    <a:solidFill>
+                      <a:srgbClr val="1A2332"/>
+                    </a:solidFill>
+                  </a:tcPr>
+                </a:tc>
+                <a:tc>
+                  <a:txBody>
+                    <a:bodyPr wrap="square"/>
+                    <a:lstStyle/>
+                    <a:p>
+                      <a:r>
+                        <a:rPr sz="1200" b="1">
+                          <a:solidFill>
+                            <a:srgbClr val="FFFFFF"/>
+                          </a:solidFill>
+                          <a:latin typeface="Calibri"/>
+                        </a:rPr>
+                        <a:t>Itineraries</a:t>
+                      </a:r>
+                    </a:p>
+                  </a:txBody>
+                  <a:tcPr anchor="ctr">
+                    <a:solidFill>
+                      <a:srgbClr val="1A2332"/>
+                    </a:solidFill>
+                  </a:tcPr>
+                </a:tc>
+                <a:tc>
+                  <a:txBody>
+                    <a:bodyPr wrap="square"/>
+                    <a:lstStyle/>
+                    <a:p>
+                      <a:r>
+                        <a:rPr sz="1200" b="1">
+                          <a:solidFill>
+                            <a:srgbClr val="FFFFFF"/>
+                          </a:solidFill>
+                          <a:latin typeface="Calibri"/>
+                        </a:rPr>
+                        <a:t>Meaning</a:t>
+                      </a:r>
+                    </a:p>
+                  </a:txBody>
+                  <a:tcPr anchor="ctr">
+                    <a:solidFill>
+                      <a:srgbClr val="1A2332"/>
+                    </a:solidFill>
+                  </a:tcPr>
+                </a:tc>
+              </a:tr>
+              <a:tr h="457200">
+                <a:tc>
+                  <a:txBody>
+                    <a:bodyPr wrap="square"/>
+                    <a:lstStyle/>
+                    <a:p>
+                      <a:r>
+                        <a:rPr sz="1200">
+                          <a:solidFill>
+                            <a:srgbClr val="1A2332"/>
+                          </a:solidFill>
+                          <a:latin typeface="Calibri"/>
+                        </a:rPr>
+                        <a:t>High</a:t>
+                      </a:r>
+                    </a:p>
+                  </a:txBody>
+                  <a:tcPr anchor="ctr" marL="73152"/>
+                </a:tc>
+                <a:tc>
+                  <a:txBody>
+                    <a:bodyPr wrap="square"/>
+                    <a:lstStyle/>
+                    <a:p>
+                      <a:r>
+                        <a:rPr sz="1200">
+                          <a:solidFill>
+                            <a:srgbClr val="1A2332"/>
+                          </a:solidFill>
+                          <a:latin typeface="Calibri"/>
+                        </a:rPr>
+                        <a:t>54</a:t>
+                      </a:r>
+                    </a:p>
+                  </a:txBody>
+                  <a:tcPr anchor="ctr" marL="73152"/>
+                </a:tc>
+                <a:tc>
+                  <a:txBody>
+                    <a:bodyPr wrap="square"/>
+                    <a:lstStyle/>
+                    <a:p>
+                      <a:r>
+                        <a:rPr sz="1200">
+                          <a:solidFill>
+                            <a:srgbClr val="1A2332"/>
+                          </a:solidFill>
+                          <a:latin typeface="Calibri"/>
+                        </a:rPr>
+                        <a:t>every claim checked against the live source; supporting passage recorded</a:t>
+                      </a:r>
+                    </a:p>
+                  </a:txBody>
+                  <a:tcPr anchor="ctr" marL="73152"/>
+                </a:tc>
+              </a:tr>
+              <a:tr h="457200">
+                <a:tc>
+                  <a:txBody>
+                    <a:bodyPr wrap="square"/>
+                    <a:lstStyle/>
+                    <a:p>
+                      <a:r>
+                        <a:rPr sz="1200">
+                          <a:solidFill>
+                            <a:srgbClr val="1A2332"/>
+                          </a:solidFill>
+                          <a:latin typeface="Calibri"/>
+                        </a:rPr>
+                        <a:t>Medium</a:t>
+                      </a:r>
+                    </a:p>
+                  </a:txBody>
+                  <a:tcPr anchor="ctr" marL="73152">
+                    <a:solidFill>
+                      <a:srgbClr val="F1EBDF"/>
+                    </a:solidFill>
+                  </a:tcPr>
+                </a:tc>
+                <a:tc>
+                  <a:txBody>
+                    <a:bodyPr wrap="square"/>
+                    <a:lstStyle/>
+                    <a:p>
+                      <a:r>
+                        <a:rPr sz="1200">
+                          <a:solidFill>
+                            <a:srgbClr val="1A2332"/>
+                          </a:solidFill>
+                          <a:latin typeface="Calibri"/>
+                        </a:rPr>
+                        <a:t>35</a:t>
+                      </a:r>
+                    </a:p>
+                  </a:txBody>
+                  <a:tcPr anchor="ctr" marL="73152">
+                    <a:solidFill>
+                      <a:srgbClr val="F1EBDF"/>
+                    </a:solidFill>
+                  </a:tcPr>
+                </a:tc>
+                <a:tc>
+                  <a:txBody>
+                    <a:bodyPr wrap="square"/>
+                    <a:lstStyle/>
+                    <a:p>
+                      <a:r>
+                        <a:rPr sz="1200">
+                          <a:solidFill>
+                            <a:srgbClr val="1A2332"/>
+                          </a:solidFill>
+                          <a:latin typeface="Calibri"/>
+                        </a:rPr>
+                        <a:t>source checked; one or more details not independently confirmable</a:t>
+                      </a:r>
+                    </a:p>
+                  </a:txBody>
+                  <a:tcPr anchor="ctr" marL="73152">
+                    <a:solidFill>
+                      <a:srgbClr val="F1EBDF"/>
+                    </a:solidFill>
+                  </a:tcPr>
+                </a:tc>
+              </a:tr>
+              <a:tr h="457200">
+                <a:tc>
+                  <a:txBody>
+                    <a:bodyPr wrap="square"/>
+                    <a:lstStyle/>
+                    <a:p>
+                      <a:r>
+                        <a:rPr sz="1200">
+                          <a:solidFill>
+                            <a:srgbClr val="1A2332"/>
+                          </a:solidFill>
+                          <a:latin typeface="Calibri"/>
+                        </a:rPr>
+                        <a:t>Low</a:t>
+                      </a:r>
+                    </a:p>
+                  </a:txBody>
+                  <a:tcPr anchor="ctr" marL="73152"/>
+                </a:tc>
+                <a:tc>
+                  <a:txBody>
+                    <a:bodyPr wrap="square"/>
+                    <a:lstStyle/>
+                    <a:p>
+                      <a:r>
+                        <a:rPr sz="1200">
+                          <a:solidFill>
+                            <a:srgbClr val="1A2332"/>
+                          </a:solidFill>
+                          <a:latin typeface="Calibri"/>
+                        </a:rPr>
+                        <a:t>5</a:t>
+                      </a:r>
+                    </a:p>
+                  </a:txBody>
+                  <a:tcPr anchor="ctr" marL="73152"/>
+                </a:tc>
+                <a:tc>
+                  <a:txBody>
+                    <a:bodyPr wrap="square"/>
+                    <a:lstStyle/>
+                    <a:p>
+                      <a:r>
+                        <a:rPr sz="1200">
+                          <a:solidFill>
+                            <a:srgbClr val="1A2332"/>
+                          </a:solidFill>
+                          <a:latin typeface="Calibri"/>
+                        </a:rPr>
+                        <a:t>source checked; material details unverifiable or ambiguous</a:t>
+                      </a:r>
+                    </a:p>
+                  </a:txBody>
+                  <a:tcPr anchor="ctr" marL="73152"/>
+                </a:tc>
+              </a:tr>
+            </a:tbl>
+          </a:graphicData>
+        </a:graphic>
+      </p:graphicFrame>
       <p:sp>
         <p:nvSpPr>
-          <p:cNvPr id="5" name="TextBox 4"/>
+          <p:cNvPr id="6" name="TextBox 5"/>
           <p:cNvSpPr txBox="1"/>
           <p:nvPr/>
         </p:nvSpPr>
         <p:spPr>
           <a:xfrm>
-            <a:off x="822960" y="2377440"/>
-            <a:ext cx="3291840" cy="1463040"/>
+            <a:off x="822960" y="4206240"/>
+            <a:ext cx="10515600" cy="4023360"/>
           </a:xfrm>
           <a:prstGeom prst="rect">
             <a:avLst/>
@@ -24856,191 +27516,85 @@
           </a:bodyPr>
           <a:lstStyle/>
           <a:p>
-            <a:pPr algn="l">
+            <a:pPr>
               <a:spcAft>
-                <a:spcPts val="400"/>
+                <a:spcPts val="800"/>
               </a:spcAft>
             </a:pPr>
             <a:r>
-              <a:rPr sz="3600" b="1">
+              <a:rPr sz="1400" b="1">
                 <a:solidFill>
-                  <a:srgbClr val="B4632A"/>
+                  <a:srgbClr val="1A2332"/>
                 </a:solidFill>
-                <a:latin typeface="Georgia"/>
+                <a:latin typeface="Calibri"/>
               </a:rPr>
-              <a:t>1–90 days</a:t>
+              <a:t>Gates: </a:t>
+            </a:r>
+            <a:r>
+              <a:rPr sz="1400">
+                <a:solidFill>
+                  <a:srgbClr val="1A2332"/>
+                </a:solidFill>
+                <a:latin typeface="Calibri"/>
+              </a:rPr>
+              <a:t> 7 validation gates, fail-closed — identity, platform, source resolution, item extraction, duplication, override review, and final sign-off.</a:t>
             </a:r>
           </a:p>
           <a:p>
-            <a:pPr algn="l">
+            <a:pPr>
               <a:spcAft>
-                <a:spcPts val="400"/>
+                <a:spcPts val="800"/>
               </a:spcAft>
             </a:pPr>
             <a:r>
-              <a:rPr sz="1400" b="0">
+              <a:rPr sz="1400" b="1">
                 <a:solidFill>
-                  <a:srgbClr val="5C6678"/>
+                  <a:srgbClr val="1A2332"/>
                 </a:solidFill>
                 <a:latin typeface="Calibri"/>
               </a:rPr>
-              <a:t>full range of trip lengths</a:t>
+              <a:t>Re-verification: </a:t>
+            </a:r>
+            <a:r>
+              <a:rPr sz="1400">
+                <a:solidFill>
+                  <a:srgbClr val="1A2332"/>
+                </a:solidFill>
+                <a:latin typeface="Calibri"/>
+              </a:rPr>
+              <a:t> an independent evidence council re-verified the itineraries against live sources on 2026-09-16; 10 data corrections were applied (7 fixed, 1 re-verified, 1 quarantined, 1 exclusion).</a:t>
+            </a:r>
+          </a:p>
+          <a:p>
+            <a:pPr>
+              <a:spcAft>
+                <a:spcPts val="800"/>
+              </a:spcAft>
+            </a:pPr>
+            <a:r>
+              <a:rPr sz="1400" b="1">
+                <a:solidFill>
+                  <a:srgbClr val="1A2332"/>
+                </a:solidFill>
+                <a:latin typeface="Calibri"/>
+              </a:rPr>
+              <a:t>Audit: </a:t>
+            </a:r>
+            <a:r>
+              <a:rPr sz="1400">
+                <a:solidFill>
+                  <a:srgbClr val="1A2332"/>
+                </a:solidFill>
+                <a:latin typeface="Calibri"/>
+              </a:rPr>
+              <a:t> evidence-only audit: PASS, 2026-09-16.</a:t>
             </a:r>
           </a:p>
         </p:txBody>
       </p:sp>
       <p:sp>
         <p:nvSpPr>
-          <p:cNvPr id="6" name="TextBox 5"/>
-          <p:cNvSpPr txBox="1"/>
-          <p:nvPr/>
-        </p:nvSpPr>
-        <p:spPr>
-          <a:xfrm>
-            <a:off x="4480560" y="2377440"/>
-            <a:ext cx="3291840" cy="1463040"/>
-          </a:xfrm>
-          <a:prstGeom prst="rect">
-            <a:avLst/>
-          </a:prstGeom>
-          <a:noFill/>
-        </p:spPr>
-        <p:txBody>
-          <a:bodyPr wrap="square">
-            <a:spAutoFit/>
-          </a:bodyPr>
-          <a:lstStyle/>
-          <a:p>
-            <a:pPr algn="l">
-              <a:spcAft>
-                <a:spcPts val="400"/>
-              </a:spcAft>
-            </a:pPr>
-            <a:r>
-              <a:rPr sz="3600" b="1">
-                <a:solidFill>
-                  <a:srgbClr val="B4632A"/>
-                </a:solidFill>
-                <a:latin typeface="Georgia"/>
-              </a:rPr>
-              <a:t>47</a:t>
-            </a:r>
-          </a:p>
-          <a:p>
-            <a:pPr algn="l">
-              <a:spcAft>
-                <a:spcPts val="400"/>
-              </a:spcAft>
-            </a:pPr>
-            <a:r>
-              <a:rPr sz="1400" b="0">
-                <a:solidFill>
-                  <a:srgbClr val="5C6678"/>
-                </a:solidFill>
-                <a:latin typeface="Calibri"/>
-              </a:rPr>
-              <a:t>trips of 7 days or more</a:t>
-            </a:r>
-          </a:p>
-        </p:txBody>
-      </p:sp>
-      <p:sp>
-        <p:nvSpPr>
-          <p:cNvPr id="7" name="TextBox 6"/>
-          <p:cNvSpPr txBox="1"/>
-          <p:nvPr/>
-        </p:nvSpPr>
-        <p:spPr>
-          <a:xfrm>
-            <a:off x="8138160" y="2377440"/>
-            <a:ext cx="3291840" cy="1463040"/>
-          </a:xfrm>
-          <a:prstGeom prst="rect">
-            <a:avLst/>
-          </a:prstGeom>
-          <a:noFill/>
-        </p:spPr>
-        <p:txBody>
-          <a:bodyPr wrap="square">
-            <a:spAutoFit/>
-          </a:bodyPr>
-          <a:lstStyle/>
-          <a:p>
-            <a:pPr algn="l">
-              <a:spcAft>
-                <a:spcPts val="400"/>
-              </a:spcAft>
-            </a:pPr>
-            <a:r>
-              <a:rPr sz="3600" b="1">
-                <a:solidFill>
-                  <a:srgbClr val="B4632A"/>
-                </a:solidFill>
-                <a:latin typeface="Georgia"/>
-              </a:rPr>
-              <a:t>19</a:t>
-            </a:r>
-          </a:p>
-          <a:p>
-            <a:pPr algn="l">
-              <a:spcAft>
-                <a:spcPts val="400"/>
-              </a:spcAft>
-            </a:pPr>
-            <a:r>
-              <a:rPr sz="1400" b="0">
-                <a:solidFill>
-                  <a:srgbClr val="5C6678"/>
-                </a:solidFill>
-                <a:latin typeface="Calibri"/>
-              </a:rPr>
-              <a:t>itineraries with no fixed length (guides, not trips)</a:t>
-            </a:r>
-          </a:p>
-        </p:txBody>
-      </p:sp>
-      <p:sp>
-        <p:nvSpPr>
-          <p:cNvPr id="8" name="TextBox 7"/>
-          <p:cNvSpPr txBox="1"/>
-          <p:nvPr/>
-        </p:nvSpPr>
-        <p:spPr>
-          <a:xfrm>
-            <a:off x="822960" y="4480560"/>
-            <a:ext cx="10515600" cy="1280160"/>
-          </a:xfrm>
-          <a:prstGeom prst="rect">
-            <a:avLst/>
-          </a:prstGeom>
-          <a:noFill/>
-        </p:spPr>
-        <p:txBody>
-          <a:bodyPr wrap="square">
-            <a:spAutoFit/>
-          </a:bodyPr>
-          <a:lstStyle/>
-          <a:p>
-            <a:pPr algn="l">
-              <a:spcAft>
-                <a:spcPts val="400"/>
-              </a:spcAft>
-            </a:pPr>
-            <a:r>
-              <a:rPr sz="1300" b="0">
-                <a:solidFill>
-                  <a:srgbClr val="5C6678"/>
-                </a:solidFill>
-                <a:latin typeface="Calibri"/>
-              </a:rPr>
-              <a:t>Longest: “3-Month Southeast Asia Itinerary: The Banana Pancake Trail” (90 days). Trip-length statistics exclude the 19 itineraries whose sources state no fixed length.</a:t>
-            </a:r>
-          </a:p>
-        </p:txBody>
-      </p:sp>
-      <p:sp>
-        <p:nvSpPr>
-          <p:cNvPr id="9" name="FOOTER"/>
+          <p:cNvPr id="7" name="FOOTER"/>
           <p:cNvSpPr txBox="1"/>
           <p:nvPr/>
         </p:nvSpPr>
@@ -25072,7 +27626,7 @@
                 </a:solidFill>
                 <a:latin typeface="Calibri"/>
               </a:rPr>
-              <a:t>Travel Itinerary Pilot  •  Information deck  •  5 / 19</a:t>
+              <a:t>Travel Influencer Itinerary Pilot — Research Findings  •  6 / 20</a:t>
             </a:r>
           </a:p>
         </p:txBody>
@@ -25085,7 +27639,7 @@
 </p:sld>
 </file>
 
-<file path=ppt/slides/slide6.xml><?xml version="1.0" encoding="utf-8"?>
+<file path=ppt/slides/slide7.xml><?xml version="1.0" encoding="utf-8"?>
 <p:sld xmlns:a="http://schemas.openxmlformats.org/drawingml/2006/main" xmlns:p="http://schemas.openxmlformats.org/presentationml/2006/main" xmlns:r="http://schemas.openxmlformats.org/officeDocument/2006/relationships">
   <p:cSld>
     <p:bg>
@@ -25137,7 +27691,7 @@
                 </a:solidFill>
                 <a:latin typeface="Calibri"/>
               </a:rPr>
-              <a:t>FLAGSHIP ITINERARIES</a:t>
+              <a:t>LIMITATIONS</a:t>
             </a:r>
           </a:p>
         </p:txBody>
@@ -25213,547 +27767,27 @@
               </a:spcAft>
             </a:pPr>
             <a:r>
-              <a:rPr sz="3400" b="0">
+              <a:rPr sz="3200" b="0">
                 <a:solidFill>
                   <a:srgbClr val="1A2332"/>
                 </a:solidFill>
                 <a:latin typeface="Georgia"/>
               </a:rPr>
-              <a:t>Five itineraries verified claim by claim</a:t>
+              <a:t>What this data cannot say</a:t>
             </a:r>
           </a:p>
         </p:txBody>
       </p:sp>
-      <p:graphicFrame>
-        <p:nvGraphicFramePr>
-          <p:cNvPr id="5" name="Table 4"/>
-          <p:cNvGraphicFramePr>
-            <a:graphicFrameLocks noGrp="1"/>
-          </p:cNvGraphicFramePr>
-          <p:nvPr/>
-        </p:nvGraphicFramePr>
-        <p:xfrm>
-          <a:off x="822960" y="2148840"/>
-          <a:ext cx="10515600" cy="2304288"/>
-        </p:xfrm>
-        <a:graphic>
-          <a:graphicData uri="http://schemas.openxmlformats.org/drawingml/2006/table">
-            <a:tbl>
-              <a:tblPr firstRow="1" bandRow="1">
-                <a:tableStyleId>{5C22544A-7EE6-4342-B048-85BDC9FD1C3A}</a:tableStyleId>
-              </a:tblPr>
-              <a:tblGrid>
-                <a:gridCol w="5120640"/>
-                <a:gridCol w="2286000"/>
-                <a:gridCol w="1280160"/>
-                <a:gridCol w="1828800"/>
-              </a:tblGrid>
-              <a:tr h="384048">
-                <a:tc>
-                  <a:txBody>
-                    <a:bodyPr wrap="square"/>
-                    <a:lstStyle/>
-                    <a:p>
-                      <a:r>
-                        <a:rPr sz="1150" b="1">
-                          <a:solidFill>
-                            <a:srgbClr val="FFFFFF"/>
-                          </a:solidFill>
-                          <a:latin typeface="Calibri"/>
-                        </a:rPr>
-                        <a:t>Itinerary</a:t>
-                      </a:r>
-                    </a:p>
-                  </a:txBody>
-                  <a:tcPr anchor="ctr">
-                    <a:solidFill>
-                      <a:srgbClr val="1A2332"/>
-                    </a:solidFill>
-                  </a:tcPr>
-                </a:tc>
-                <a:tc>
-                  <a:txBody>
-                    <a:bodyPr wrap="square"/>
-                    <a:lstStyle/>
-                    <a:p>
-                      <a:r>
-                        <a:rPr sz="1150" b="1">
-                          <a:solidFill>
-                            <a:srgbClr val="FFFFFF"/>
-                          </a:solidFill>
-                          <a:latin typeface="Calibri"/>
-                        </a:rPr>
-                        <a:t>Creator</a:t>
-                      </a:r>
-                    </a:p>
-                  </a:txBody>
-                  <a:tcPr anchor="ctr">
-                    <a:solidFill>
-                      <a:srgbClr val="1A2332"/>
-                    </a:solidFill>
-                  </a:tcPr>
-                </a:tc>
-                <a:tc>
-                  <a:txBody>
-                    <a:bodyPr wrap="square"/>
-                    <a:lstStyle/>
-                    <a:p>
-                      <a:r>
-                        <a:rPr sz="1150" b="1">
-                          <a:solidFill>
-                            <a:srgbClr val="FFFFFF"/>
-                          </a:solidFill>
-                          <a:latin typeface="Calibri"/>
-                        </a:rPr>
-                        <a:t>Days</a:t>
-                      </a:r>
-                    </a:p>
-                  </a:txBody>
-                  <a:tcPr anchor="ctr">
-                    <a:solidFill>
-                      <a:srgbClr val="1A2332"/>
-                    </a:solidFill>
-                  </a:tcPr>
-                </a:tc>
-                <a:tc>
-                  <a:txBody>
-                    <a:bodyPr wrap="square"/>
-                    <a:lstStyle/>
-                    <a:p>
-                      <a:r>
-                        <a:rPr sz="1150" b="1">
-                          <a:solidFill>
-                            <a:srgbClr val="FFFFFF"/>
-                          </a:solidFill>
-                          <a:latin typeface="Calibri"/>
-                        </a:rPr>
-                        <a:t>Items</a:t>
-                      </a:r>
-                    </a:p>
-                  </a:txBody>
-                  <a:tcPr anchor="ctr">
-                    <a:solidFill>
-                      <a:srgbClr val="1A2332"/>
-                    </a:solidFill>
-                  </a:tcPr>
-                </a:tc>
-              </a:tr>
-              <a:tr h="384048">
-                <a:tc>
-                  <a:txBody>
-                    <a:bodyPr wrap="square"/>
-                    <a:lstStyle/>
-                    <a:p>
-                      <a:r>
-                        <a:rPr sz="1150">
-                          <a:solidFill>
-                            <a:srgbClr val="1A2332"/>
-                          </a:solidFill>
-                          <a:latin typeface="Calibri"/>
-                        </a:rPr>
-                        <a:t>The Perfect Two Week Itinerary For Your First Trip to Japan</a:t>
-                      </a:r>
-                    </a:p>
-                  </a:txBody>
-                  <a:tcPr anchor="ctr" marL="73152"/>
-                </a:tc>
-                <a:tc>
-                  <a:txBody>
-                    <a:bodyPr wrap="square"/>
-                    <a:lstStyle/>
-                    <a:p>
-                      <a:r>
-                        <a:rPr sz="1150">
-                          <a:solidFill>
-                            <a:srgbClr val="1A2332"/>
-                          </a:solidFill>
-                          <a:latin typeface="Calibri"/>
-                        </a:rPr>
-                        <a:t>@onegirlwandering</a:t>
-                      </a:r>
-                    </a:p>
-                  </a:txBody>
-                  <a:tcPr anchor="ctr" marL="73152"/>
-                </a:tc>
-                <a:tc>
-                  <a:txBody>
-                    <a:bodyPr wrap="square"/>
-                    <a:lstStyle/>
-                    <a:p>
-                      <a:r>
-                        <a:rPr sz="1150">
-                          <a:solidFill>
-                            <a:srgbClr val="1A2332"/>
-                          </a:solidFill>
-                          <a:latin typeface="Calibri"/>
-                        </a:rPr>
-                        <a:t>14</a:t>
-                      </a:r>
-                    </a:p>
-                  </a:txBody>
-                  <a:tcPr anchor="ctr" marL="73152"/>
-                </a:tc>
-                <a:tc>
-                  <a:txBody>
-                    <a:bodyPr wrap="square"/>
-                    <a:lstStyle/>
-                    <a:p>
-                      <a:r>
-                        <a:rPr sz="1150">
-                          <a:solidFill>
-                            <a:srgbClr val="1A2332"/>
-                          </a:solidFill>
-                          <a:latin typeface="Calibri"/>
-                        </a:rPr>
-                        <a:t>49</a:t>
-                      </a:r>
-                    </a:p>
-                  </a:txBody>
-                  <a:tcPr anchor="ctr" marL="73152"/>
-                </a:tc>
-              </a:tr>
-              <a:tr h="384048">
-                <a:tc>
-                  <a:txBody>
-                    <a:bodyPr wrap="square"/>
-                    <a:lstStyle/>
-                    <a:p>
-                      <a:r>
-                        <a:rPr sz="1150">
-                          <a:solidFill>
-                            <a:srgbClr val="1A2332"/>
-                          </a:solidFill>
-                          <a:latin typeface="Calibri"/>
-                        </a:rPr>
-                        <a:t>Itinerary for Two Weeks in Morocco</a:t>
-                      </a:r>
-                    </a:p>
-                  </a:txBody>
-                  <a:tcPr anchor="ctr" marL="73152">
-                    <a:solidFill>
-                      <a:srgbClr val="F1EBDF"/>
-                    </a:solidFill>
-                  </a:tcPr>
-                </a:tc>
-                <a:tc>
-                  <a:txBody>
-                    <a:bodyPr wrap="square"/>
-                    <a:lstStyle/>
-                    <a:p>
-                      <a:r>
-                        <a:rPr sz="1150">
-                          <a:solidFill>
-                            <a:srgbClr val="1A2332"/>
-                          </a:solidFill>
-                          <a:latin typeface="Calibri"/>
-                        </a:rPr>
-                        <a:t>@theblondeabroad</a:t>
-                      </a:r>
-                    </a:p>
-                  </a:txBody>
-                  <a:tcPr anchor="ctr" marL="73152">
-                    <a:solidFill>
-                      <a:srgbClr val="F1EBDF"/>
-                    </a:solidFill>
-                  </a:tcPr>
-                </a:tc>
-                <a:tc>
-                  <a:txBody>
-                    <a:bodyPr wrap="square"/>
-                    <a:lstStyle/>
-                    <a:p>
-                      <a:r>
-                        <a:rPr sz="1150">
-                          <a:solidFill>
-                            <a:srgbClr val="1A2332"/>
-                          </a:solidFill>
-                          <a:latin typeface="Calibri"/>
-                        </a:rPr>
-                        <a:t>15</a:t>
-                      </a:r>
-                    </a:p>
-                  </a:txBody>
-                  <a:tcPr anchor="ctr" marL="73152">
-                    <a:solidFill>
-                      <a:srgbClr val="F1EBDF"/>
-                    </a:solidFill>
-                  </a:tcPr>
-                </a:tc>
-                <a:tc>
-                  <a:txBody>
-                    <a:bodyPr wrap="square"/>
-                    <a:lstStyle/>
-                    <a:p>
-                      <a:r>
-                        <a:rPr sz="1150">
-                          <a:solidFill>
-                            <a:srgbClr val="1A2332"/>
-                          </a:solidFill>
-                          <a:latin typeface="Calibri"/>
-                        </a:rPr>
-                        <a:t>36</a:t>
-                      </a:r>
-                    </a:p>
-                  </a:txBody>
-                  <a:tcPr anchor="ctr" marL="73152">
-                    <a:solidFill>
-                      <a:srgbClr val="F1EBDF"/>
-                    </a:solidFill>
-                  </a:tcPr>
-                </a:tc>
-              </a:tr>
-              <a:tr h="384048">
-                <a:tc>
-                  <a:txBody>
-                    <a:bodyPr wrap="square"/>
-                    <a:lstStyle/>
-                    <a:p>
-                      <a:r>
-                        <a:rPr sz="1150">
-                          <a:solidFill>
-                            <a:srgbClr val="1A2332"/>
-                          </a:solidFill>
-                          <a:latin typeface="Calibri"/>
-                        </a:rPr>
-                        <a:t>A 10-Day Itinerary Down Sweden's Coast</a:t>
-                      </a:r>
-                    </a:p>
-                  </a:txBody>
-                  <a:tcPr anchor="ctr" marL="73152"/>
-                </a:tc>
-                <a:tc>
-                  <a:txBody>
-                    <a:bodyPr wrap="square"/>
-                    <a:lstStyle/>
-                    <a:p>
-                      <a:r>
-                        <a:rPr sz="1150">
-                          <a:solidFill>
-                            <a:srgbClr val="1A2332"/>
-                          </a:solidFill>
-                          <a:latin typeface="Calibri"/>
-                        </a:rPr>
-                        <a:t>@nomadicmatt</a:t>
-                      </a:r>
-                    </a:p>
-                  </a:txBody>
-                  <a:tcPr anchor="ctr" marL="73152"/>
-                </a:tc>
-                <a:tc>
-                  <a:txBody>
-                    <a:bodyPr wrap="square"/>
-                    <a:lstStyle/>
-                    <a:p>
-                      <a:r>
-                        <a:rPr sz="1150">
-                          <a:solidFill>
-                            <a:srgbClr val="1A2332"/>
-                          </a:solidFill>
-                          <a:latin typeface="Calibri"/>
-                        </a:rPr>
-                        <a:t>10</a:t>
-                      </a:r>
-                    </a:p>
-                  </a:txBody>
-                  <a:tcPr anchor="ctr" marL="73152"/>
-                </a:tc>
-                <a:tc>
-                  <a:txBody>
-                    <a:bodyPr wrap="square"/>
-                    <a:lstStyle/>
-                    <a:p>
-                      <a:r>
-                        <a:rPr sz="1150">
-                          <a:solidFill>
-                            <a:srgbClr val="1A2332"/>
-                          </a:solidFill>
-                          <a:latin typeface="Calibri"/>
-                        </a:rPr>
-                        <a:t>36</a:t>
-                      </a:r>
-                    </a:p>
-                  </a:txBody>
-                  <a:tcPr anchor="ctr" marL="73152"/>
-                </a:tc>
-              </a:tr>
-              <a:tr h="384048">
-                <a:tc>
-                  <a:txBody>
-                    <a:bodyPr wrap="square"/>
-                    <a:lstStyle/>
-                    <a:p>
-                      <a:r>
-                        <a:rPr sz="1150">
-                          <a:solidFill>
-                            <a:srgbClr val="1A2332"/>
-                          </a:solidFill>
-                          <a:latin typeface="Calibri"/>
-                        </a:rPr>
-                        <a:t>15 European Cities for less than $350 — 1 month itinerary</a:t>
-                      </a:r>
-                    </a:p>
-                  </a:txBody>
-                  <a:tcPr anchor="ctr" marL="73152">
-                    <a:solidFill>
-                      <a:srgbClr val="F1EBDF"/>
-                    </a:solidFill>
-                  </a:tcPr>
-                </a:tc>
-                <a:tc>
-                  <a:txBody>
-                    <a:bodyPr wrap="square"/>
-                    <a:lstStyle/>
-                    <a:p>
-                      <a:r>
-                        <a:rPr sz="1150">
-                          <a:solidFill>
-                            <a:srgbClr val="1A2332"/>
-                          </a:solidFill>
-                          <a:latin typeface="Calibri"/>
-                        </a:rPr>
-                        <a:t>@budgettraveller</a:t>
-                      </a:r>
-                    </a:p>
-                  </a:txBody>
-                  <a:tcPr anchor="ctr" marL="73152">
-                    <a:solidFill>
-                      <a:srgbClr val="F1EBDF"/>
-                    </a:solidFill>
-                  </a:tcPr>
-                </a:tc>
-                <a:tc>
-                  <a:txBody>
-                    <a:bodyPr wrap="square"/>
-                    <a:lstStyle/>
-                    <a:p>
-                      <a:r>
-                        <a:rPr sz="1150">
-                          <a:solidFill>
-                            <a:srgbClr val="1A2332"/>
-                          </a:solidFill>
-                          <a:latin typeface="Calibri"/>
-                        </a:rPr>
-                        <a:t>30</a:t>
-                      </a:r>
-                    </a:p>
-                  </a:txBody>
-                  <a:tcPr anchor="ctr" marL="73152">
-                    <a:solidFill>
-                      <a:srgbClr val="F1EBDF"/>
-                    </a:solidFill>
-                  </a:tcPr>
-                </a:tc>
-                <a:tc>
-                  <a:txBody>
-                    <a:bodyPr wrap="square"/>
-                    <a:lstStyle/>
-                    <a:p>
-                      <a:r>
-                        <a:rPr sz="1150">
-                          <a:solidFill>
-                            <a:srgbClr val="1A2332"/>
-                          </a:solidFill>
-                          <a:latin typeface="Calibri"/>
-                        </a:rPr>
-                        <a:t>30</a:t>
-                      </a:r>
-                    </a:p>
-                  </a:txBody>
-                  <a:tcPr anchor="ctr" marL="73152">
-                    <a:solidFill>
-                      <a:srgbClr val="F1EBDF"/>
-                    </a:solidFill>
-                  </a:tcPr>
-                </a:tc>
-              </a:tr>
-              <a:tr h="384048">
-                <a:tc>
-                  <a:txBody>
-                    <a:bodyPr wrap="square"/>
-                    <a:lstStyle/>
-                    <a:p>
-                      <a:r>
-                        <a:rPr sz="1150">
-                          <a:solidFill>
-                            <a:srgbClr val="1A2332"/>
-                          </a:solidFill>
-                          <a:latin typeface="Calibri"/>
-                        </a:rPr>
-                        <a:t>Two Weeks in South Africa, Zambia, and Botswana</a:t>
-                      </a:r>
-                    </a:p>
-                  </a:txBody>
-                  <a:tcPr anchor="ctr" marL="73152"/>
-                </a:tc>
-                <a:tc>
-                  <a:txBody>
-                    <a:bodyPr wrap="square"/>
-                    <a:lstStyle/>
-                    <a:p>
-                      <a:r>
-                        <a:rPr sz="1150">
-                          <a:solidFill>
-                            <a:srgbClr val="1A2332"/>
-                          </a:solidFill>
-                          <a:latin typeface="Calibri"/>
-                        </a:rPr>
-                        <a:t>@oneikathetraveller</a:t>
-                      </a:r>
-                    </a:p>
-                  </a:txBody>
-                  <a:tcPr anchor="ctr" marL="73152"/>
-                </a:tc>
-                <a:tc>
-                  <a:txBody>
-                    <a:bodyPr wrap="square"/>
-                    <a:lstStyle/>
-                    <a:p>
-                      <a:r>
-                        <a:rPr sz="1150">
-                          <a:solidFill>
-                            <a:srgbClr val="1A2332"/>
-                          </a:solidFill>
-                          <a:latin typeface="Calibri"/>
-                        </a:rPr>
-                        <a:t>14</a:t>
-                      </a:r>
-                    </a:p>
-                  </a:txBody>
-                  <a:tcPr anchor="ctr" marL="73152"/>
-                </a:tc>
-                <a:tc>
-                  <a:txBody>
-                    <a:bodyPr wrap="square"/>
-                    <a:lstStyle/>
-                    <a:p>
-                      <a:r>
-                        <a:rPr sz="1150">
-                          <a:solidFill>
-                            <a:srgbClr val="1A2332"/>
-                          </a:solidFill>
-                          <a:latin typeface="Calibri"/>
-                        </a:rPr>
-                        <a:t>30</a:t>
-                      </a:r>
-                    </a:p>
-                  </a:txBody>
-                  <a:tcPr anchor="ctr" marL="73152"/>
-                </a:tc>
-              </a:tr>
-            </a:tbl>
-          </a:graphicData>
-        </a:graphic>
-      </p:graphicFrame>
       <p:sp>
         <p:nvSpPr>
-          <p:cNvPr id="6" name="TextBox 5"/>
+          <p:cNvPr id="5" name="TextBox 4"/>
           <p:cNvSpPr txBox="1"/>
           <p:nvPr/>
         </p:nvSpPr>
         <p:spPr>
           <a:xfrm>
-            <a:off x="822960" y="5943600"/>
-            <a:ext cx="10515600" cy="365760"/>
+            <a:off x="822960" y="2194560"/>
+            <a:ext cx="10515600" cy="4023360"/>
           </a:xfrm>
           <a:prstGeom prst="rect">
             <a:avLst/>
@@ -25766,26 +27800,135 @@
           </a:bodyPr>
           <a:lstStyle/>
           <a:p>
-            <a:pPr algn="l">
+            <a:pPr>
               <a:spcAft>
-                <a:spcPts val="400"/>
+                <a:spcPts val="800"/>
               </a:spcAft>
             </a:pPr>
             <a:r>
-              <a:rPr sz="1100" b="0">
+              <a:rPr sz="1400" b="1">
                 <a:solidFill>
-                  <a:srgbClr val="5C6678"/>
+                  <a:srgbClr val="1A2332"/>
                 </a:solidFill>
                 <a:latin typeface="Calibri"/>
               </a:rPr>
-              <a:t>Each item name and detail checked against the live source page; supporting passages recorded in the verification log.</a:t>
+              <a:t>Unknowns stay unknown: </a:t>
+            </a:r>
+            <a:r>
+              <a:rPr sz="1400">
+                <a:solidFill>
+                  <a:srgbClr val="1A2332"/>
+                </a:solidFill>
+                <a:latin typeface="Calibri"/>
+              </a:rPr>
+              <a:t> 27 follower counts, plus any prices, dates, or figures not stated by sources, are recorded as unknown — nothing was estimated or invented.</a:t>
+            </a:r>
+          </a:p>
+          <a:p>
+            <a:pPr>
+              <a:spcAft>
+                <a:spcPts val="800"/>
+              </a:spcAft>
+            </a:pPr>
+            <a:r>
+              <a:rPr sz="1400" b="1">
+                <a:solidFill>
+                  <a:srgbClr val="1A2332"/>
+                </a:solidFill>
+                <a:latin typeface="Calibri"/>
+              </a:rPr>
+              <a:t>Selection records are thin: </a:t>
+            </a:r>
+            <a:r>
+              <a:rPr sz="1400">
+                <a:solidFill>
+                  <a:srgbClr val="1A2332"/>
+                </a:solidFill>
+                <a:latin typeface="Calibri"/>
+              </a:rPr>
+              <a:t> no eligibility or exclusion rules were documented at selection time; 8 creator records were later quarantined for identity problems.</a:t>
+            </a:r>
+          </a:p>
+          <a:p>
+            <a:pPr>
+              <a:spcAft>
+                <a:spcPts val="800"/>
+              </a:spcAft>
+            </a:pPr>
+            <a:r>
+              <a:rPr sz="1400" b="1">
+                <a:solidFill>
+                  <a:srgbClr val="1A2332"/>
+                </a:solidFill>
+                <a:latin typeface="Calibri"/>
+              </a:rPr>
+              <a:t>Follower counts are as-cited: </a:t>
+            </a:r>
+            <a:r>
+              <a:rPr sz="1400">
+                <a:solidFill>
+                  <a:srgbClr val="1A2332"/>
+                </a:solidFill>
+                <a:latin typeface="Calibri"/>
+              </a:rPr>
+              <a:t> they come from source listicles and were not independently audited.</a:t>
+            </a:r>
+          </a:p>
+          <a:p>
+            <a:pPr>
+              <a:spcAft>
+                <a:spcPts val="800"/>
+              </a:spcAft>
+            </a:pPr>
+            <a:r>
+              <a:rPr sz="1400" b="1">
+                <a:solidFill>
+                  <a:srgbClr val="1A2332"/>
+                </a:solidFill>
+                <a:latin typeface="Calibri"/>
+              </a:rPr>
+              <a:t>Coverage limits: </a:t>
+            </a:r>
+            <a:r>
+              <a:rPr sz="1400">
+                <a:solidFill>
+                  <a:srgbClr val="1A2332"/>
+                </a:solidFill>
+                <a:latin typeface="Calibri"/>
+              </a:rPr>
+              <a:t> 47 creators have no extracted itinerary; 19 itineraries have no fixed trip length; confidence is low for 5 itineraries.</a:t>
+            </a:r>
+          </a:p>
+          <a:p>
+            <a:pPr>
+              <a:spcAft>
+                <a:spcPts val="800"/>
+              </a:spcAft>
+            </a:pPr>
+            <a:r>
+              <a:rPr sz="1400" b="1">
+                <a:solidFill>
+                  <a:srgbClr val="1A2332"/>
+                </a:solidFill>
+                <a:latin typeface="Calibri"/>
+              </a:rPr>
+              <a:t>Out of scope: </a:t>
+            </a:r>
+            <a:r>
+              <a:rPr sz="1400">
+                <a:solidFill>
+                  <a:srgbClr val="1A2332"/>
+                </a:solidFill>
+                <a:latin typeface="Calibri"/>
+              </a:rPr>
+              <a:t> the data says nothing about commercial economics, payment shares, supplier terms, or demand — those were never collected.</a:t>
             </a:r>
           </a:p>
         </p:txBody>
       </p:sp>
       <p:sp>
         <p:nvSpPr>
-          <p:cNvPr id="7" name="FOOTER"/>
+          <p:cNvPr id="6" name="FOOTER"/>
           <p:cNvSpPr txBox="1"/>
           <p:nvPr/>
         </p:nvSpPr>
@@ -25817,7 +27960,7 @@
                 </a:solidFill>
                 <a:latin typeface="Calibri"/>
               </a:rPr>
-              <a:t>Travel Itinerary Pilot  •  Information deck  •  6 / 19</a:t>
+              <a:t>Travel Influencer Itinerary Pilot — Research Findings  •  7 / 20</a:t>
             </a:r>
           </a:p>
         </p:txBody>
@@ -25830,7 +27973,7 @@
 </p:sld>
 </file>
 
-<file path=ppt/slides/slide7.xml><?xml version="1.0" encoding="utf-8"?>
+<file path=ppt/slides/slide8.xml><?xml version="1.0" encoding="utf-8"?>
 <p:sld xmlns:a="http://schemas.openxmlformats.org/drawingml/2006/main" xmlns:p="http://schemas.openxmlformats.org/presentationml/2006/main" xmlns:r="http://schemas.openxmlformats.org/officeDocument/2006/relationships">
   <p:cSld>
     <p:bg>
@@ -25882,7 +28025,7 @@
                 </a:solidFill>
                 <a:latin typeface="Calibri"/>
               </a:rPr>
-              <a:t>VALIDATE THIS YOURSELF</a:t>
+              <a:t>REPRODUCIBILITY</a:t>
             </a:r>
           </a:p>
         </p:txBody>
@@ -25958,13 +28101,13 @@
               </a:spcAft>
             </a:pPr>
             <a:r>
-              <a:rPr sz="3400" b="0">
+              <a:rPr sz="3200" b="0">
                 <a:solidFill>
                   <a:srgbClr val="1A2332"/>
                 </a:solidFill>
                 <a:latin typeface="Georgia"/>
               </a:rPr>
-              <a:t>Everything is inspectable</a:t>
+              <a:t>How to re-verify any claim in this deck</a:t>
             </a:r>
           </a:p>
         </p:txBody>
@@ -25977,8 +28120,8 @@
         </p:nvSpPr>
         <p:spPr>
           <a:xfrm>
-            <a:off x="822960" y="2286000"/>
-            <a:ext cx="10515600" cy="3200400"/>
+            <a:off x="822960" y="2194560"/>
+            <a:ext cx="10515600" cy="4023360"/>
           </a:xfrm>
           <a:prstGeom prst="rect">
             <a:avLst/>
@@ -25991,131 +28134,128 @@
           </a:bodyPr>
           <a:lstStyle/>
           <a:p>
-            <a:pPr algn="l">
+            <a:pPr>
               <a:spcAft>
-                <a:spcPts val="100"/>
+                <a:spcPts val="800"/>
               </a:spcAft>
             </a:pPr>
             <a:r>
-              <a:rPr sz="1500" b="1">
+              <a:rPr sz="1400" b="1">
                 <a:solidFill>
                   <a:srgbClr val="1A2332"/>
                 </a:solidFill>
                 <a:latin typeface="Calibri"/>
               </a:rPr>
-              <a:t>The appendix</a:t>
+              <a:t>Database: </a:t>
             </a:r>
-          </a:p>
-          <a:p>
-            <a:pPr algn="l">
-              <a:spcAft>
-                <a:spcPts val="1200"/>
-              </a:spcAft>
-            </a:pPr>
             <a:r>
-              <a:rPr sz="1300" b="0">
-                <a:solidFill>
-                  <a:srgbClr val="5C6678"/>
-                </a:solidFill>
-                <a:latin typeface="Calibri"/>
-              </a:rPr>
-              <a:t>full influencer directory (100) and itinerary index (94) follow this slide.</a:t>
-            </a:r>
-          </a:p>
-          <a:p>
-            <a:pPr algn="l">
-              <a:spcAft>
-                <a:spcPts val="100"/>
-              </a:spcAft>
-            </a:pPr>
-            <a:r>
-              <a:rPr sz="1500" b="1">
+              <a:rPr sz="1400">
                 <a:solidFill>
                   <a:srgbClr val="1A2332"/>
                 </a:solidFill>
                 <a:latin typeface="Calibri"/>
               </a:rPr>
-              <a:t>The spreadsheet</a:t>
+              <a:t> travel-influencer-pilot/pilot.db — every number on these slides can be recomputed with a SQL query.</a:t>
             </a:r>
           </a:p>
           <a:p>
-            <a:pPr algn="l">
+            <a:pPr>
               <a:spcAft>
-                <a:spcPts val="1200"/>
+                <a:spcPts val="800"/>
               </a:spcAft>
             </a:pPr>
             <a:r>
-              <a:rPr sz="1300" b="0">
-                <a:solidFill>
-                  <a:srgbClr val="5C6678"/>
-                </a:solidFill>
-                <a:latin typeface="Calibri"/>
-              </a:rPr>
-              <a:t>travel-influencers-directory.xlsx — every handle, source link, and quarantine reason.</a:t>
-            </a:r>
-          </a:p>
-          <a:p>
-            <a:pPr algn="l">
-              <a:spcAft>
-                <a:spcPts val="100"/>
-              </a:spcAft>
-            </a:pPr>
-            <a:r>
-              <a:rPr sz="1500" b="1">
+              <a:rPr sz="1400" b="1">
                 <a:solidFill>
                   <a:srgbClr val="1A2332"/>
                 </a:solidFill>
                 <a:latin typeface="Calibri"/>
               </a:rPr>
-              <a:t>The database</a:t>
+              <a:t>Verification log: </a:t>
             </a:r>
-          </a:p>
-          <a:p>
-            <a:pPr algn="l">
-              <a:spcAft>
-                <a:spcPts val="1200"/>
-              </a:spcAft>
-            </a:pPr>
             <a:r>
-              <a:rPr sz="1300" b="0">
-                <a:solidFill>
-                  <a:srgbClr val="5C6678"/>
-                </a:solidFill>
-                <a:latin typeface="Calibri"/>
-              </a:rPr>
-              <a:t>pilot.db — query any number on these slides; queries are documented in SLIDE_CALCULATIONS.md.</a:t>
-            </a:r>
-          </a:p>
-          <a:p>
-            <a:pPr algn="l">
-              <a:spcAft>
-                <a:spcPts val="100"/>
-              </a:spcAft>
-            </a:pPr>
-            <a:r>
-              <a:rPr sz="1500" b="1">
+              <a:rPr sz="1400">
                 <a:solidFill>
                   <a:srgbClr val="1A2332"/>
                 </a:solidFill>
                 <a:latin typeface="Calibri"/>
               </a:rPr>
-              <a:t>The verification log</a:t>
+              <a:t> validation/reports/VERIFICATION_LOG_FULL.md — check date and supporting passage recorded per itinerary.</a:t>
             </a:r>
           </a:p>
           <a:p>
-            <a:pPr algn="l">
+            <a:pPr>
               <a:spcAft>
-                <a:spcPts val="1200"/>
+                <a:spcPts val="800"/>
               </a:spcAft>
             </a:pPr>
             <a:r>
-              <a:rPr sz="1300" b="0">
+              <a:rPr sz="1400" b="1">
                 <a:solidFill>
-                  <a:srgbClr val="5C6678"/>
+                  <a:srgbClr val="1A2332"/>
                 </a:solidFill>
                 <a:latin typeface="Calibri"/>
               </a:rPr>
-              <a:t>validation/reports/VERIFICATION_LOG_FULL.md — check date and supporting passage per itinerary.</a:t>
+              <a:t>QC reports: </a:t>
+            </a:r>
+            <a:r>
+              <a:rPr sz="1400">
+                <a:solidFill>
+                  <a:srgbClr val="1A2332"/>
+                </a:solidFill>
+                <a:latin typeface="Calibri"/>
+              </a:rPr>
+              <a:t> validation/reports/QC_REPORT_STRENGTHENED.md — every correction applied, with before/after evidence.</a:t>
+            </a:r>
+          </a:p>
+          <a:p>
+            <a:pPr>
+              <a:spcAft>
+                <a:spcPts val="800"/>
+              </a:spcAft>
+            </a:pPr>
+            <a:r>
+              <a:rPr sz="1400" b="1">
+                <a:solidFill>
+                  <a:srgbClr val="1A2332"/>
+                </a:solidFill>
+                <a:latin typeface="Calibri"/>
+              </a:rPr>
+              <a:t>Selection record: </a:t>
+            </a:r>
+            <a:r>
+              <a:rPr sz="1400">
+                <a:solidFill>
+                  <a:srgbClr val="1A2332"/>
+                </a:solidFill>
+                <a:latin typeface="Calibri"/>
+              </a:rPr>
+              <a:t> SELECTION_CRITERIA.md — what is established about creator selection and what was never recorded.</a:t>
+            </a:r>
+          </a:p>
+          <a:p>
+            <a:pPr>
+              <a:spcAft>
+                <a:spcPts val="800"/>
+              </a:spcAft>
+            </a:pPr>
+            <a:r>
+              <a:rPr sz="1400" b="1">
+                <a:solidFill>
+                  <a:srgbClr val="1A2332"/>
+                </a:solidFill>
+                <a:latin typeface="Calibri"/>
+              </a:rPr>
+              <a:t>Directory: </a:t>
+            </a:r>
+            <a:r>
+              <a:rPr sz="1400">
+                <a:solidFill>
+                  <a:srgbClr val="1A2332"/>
+                </a:solidFill>
+                <a:latin typeface="Calibri"/>
+              </a:rPr>
+              <a:t> travel-influencers-directory.xlsx — every handle, profile URL, source link, and quarantine reason in one workbook.</a:t>
             </a:r>
           </a:p>
         </p:txBody>
@@ -26154,7 +28294,7 @@
                 </a:solidFill>
                 <a:latin typeface="Calibri"/>
               </a:rPr>
-              <a:t>Travel Itinerary Pilot  •  Information deck  •  7 / 19</a:t>
+              <a:t>Travel Influencer Itinerary Pilot — Research Findings  •  8 / 20</a:t>
             </a:r>
           </a:p>
         </p:txBody>
@@ -26167,7 +28307,7 @@
 </p:sld>
 </file>
 
-<file path=ppt/slides/slide8.xml><?xml version="1.0" encoding="utf-8"?>
+<file path=ppt/slides/slide9.xml><?xml version="1.0" encoding="utf-8"?>
 <p:sld xmlns:a="http://schemas.openxmlformats.org/drawingml/2006/main" xmlns:p="http://schemas.openxmlformats.org/presentationml/2006/main" xmlns:r="http://schemas.openxmlformats.org/officeDocument/2006/relationships">
   <p:cSld>
     <p:bg>
@@ -26229,14 +28369,14 @@
               </a:spcAft>
             </a:pPr>
             <a:r>
-              <a:rPr sz="4000" b="0">
+              <a:rPr sz="3800" b="0">
                 <a:solidFill>
                   <a:srgbClr val="FFFFFF"/>
                 </a:solidFill>
                 <a:latin typeface="Georgia"/>
               </a:rPr>
-              <a:t>Influencer directory
-&amp; itinerary index</a:t>
+              <a:t>Influencer directory,
+itinerary index, and quarantine log</a:t>
             </a:r>
           </a:p>
         </p:txBody>
@@ -26275,2339 +28415,11 @@
                 </a:solidFill>
                 <a:latin typeface="Calibri"/>
               </a:rPr>
-              <a:t>Travel Itinerary Pilot  •  Information deck  •  8 / 19</a:t>
+              <a:t>Travel Influencer Itinerary Pilot — Research Findings  •  9 / 20</a:t>
             </a:r>
           </a:p>
         </p:txBody>
       </p:sp>
-    </p:spTree>
-  </p:cSld>
-  <p:clrMapOvr>
-    <a:masterClrMapping/>
-  </p:clrMapOvr>
-</p:sld>
-</file>
-
-<file path=ppt/slides/slide9.xml><?xml version="1.0" encoding="utf-8"?>
-<p:sld xmlns:a="http://schemas.openxmlformats.org/drawingml/2006/main" xmlns:p="http://schemas.openxmlformats.org/presentationml/2006/main" xmlns:r="http://schemas.openxmlformats.org/officeDocument/2006/relationships">
-  <p:cSld>
-    <p:bg>
-      <p:bgPr>
-        <a:solidFill>
-          <a:srgbClr val="FAF8F4"/>
-        </a:solidFill>
-        <a:effectLst/>
-      </p:bgPr>
-    </p:bg>
-    <p:spTree>
-      <p:nvGrpSpPr>
-        <p:cNvPr id="1" name=""/>
-        <p:cNvGrpSpPr/>
-        <p:nvPr/>
-      </p:nvGrpSpPr>
-      <p:grpSpPr/>
-      <p:sp>
-        <p:nvSpPr>
-          <p:cNvPr id="2" name="TextBox 1"/>
-          <p:cNvSpPr txBox="1"/>
-          <p:nvPr/>
-        </p:nvSpPr>
-        <p:spPr>
-          <a:xfrm>
-            <a:off x="822960" y="411480"/>
-            <a:ext cx="10515600" cy="457200"/>
-          </a:xfrm>
-          <a:prstGeom prst="rect">
-            <a:avLst/>
-          </a:prstGeom>
-          <a:noFill/>
-        </p:spPr>
-        <p:txBody>
-          <a:bodyPr wrap="square">
-            <a:spAutoFit/>
-          </a:bodyPr>
-          <a:lstStyle/>
-          <a:p>
-            <a:pPr algn="l">
-              <a:spcAft>
-                <a:spcPts val="200"/>
-              </a:spcAft>
-            </a:pPr>
-            <a:r>
-              <a:rPr sz="1200" b="1">
-                <a:solidFill>
-                  <a:srgbClr val="B4632A"/>
-                </a:solidFill>
-                <a:latin typeface="Calibri"/>
-              </a:rPr>
-              <a:t>APPENDIX A — INFLUENCER DIRECTORY (1 OF 5)</a:t>
-            </a:r>
-          </a:p>
-        </p:txBody>
-      </p:sp>
-      <p:sp>
-        <p:nvSpPr>
-          <p:cNvPr id="3" name="Rectangle 2"/>
-          <p:cNvSpPr/>
-          <p:nvPr/>
-        </p:nvSpPr>
-        <p:spPr>
-          <a:xfrm>
-            <a:off x="822960" y="795528"/>
-            <a:ext cx="640080" cy="41148"/>
-          </a:xfrm>
-          <a:prstGeom prst="rect">
-            <a:avLst/>
-          </a:prstGeom>
-          <a:solidFill>
-            <a:srgbClr val="B4632A"/>
-          </a:solidFill>
-          <a:ln>
-            <a:noFill/>
-          </a:ln>
-        </p:spPr>
-        <p:style>
-          <a:lnRef idx="1">
-            <a:schemeClr val="accent1"/>
-          </a:lnRef>
-          <a:fillRef idx="3">
-            <a:schemeClr val="accent1"/>
-          </a:fillRef>
-          <a:effectRef idx="2">
-            <a:schemeClr val="accent1"/>
-          </a:effectRef>
-          <a:fontRef idx="minor">
-            <a:schemeClr val="lt1"/>
-          </a:fontRef>
-        </p:style>
-        <p:txBody>
-          <a:bodyPr rtlCol="0" anchor="ctr"/>
-          <a:lstStyle/>
-          <a:p>
-            <a:pPr algn="ctr"/>
-          </a:p>
-        </p:txBody>
-      </p:sp>
-      <p:sp>
-        <p:nvSpPr>
-          <p:cNvPr id="4" name="TextBox 3"/>
-          <p:cNvSpPr txBox="1"/>
-          <p:nvPr/>
-        </p:nvSpPr>
-        <p:spPr>
-          <a:xfrm>
-            <a:off x="822960" y="960120"/>
-            <a:ext cx="10515600" cy="1097280"/>
-          </a:xfrm>
-          <a:prstGeom prst="rect">
-            <a:avLst/>
-          </a:prstGeom>
-          <a:noFill/>
-        </p:spPr>
-        <p:txBody>
-          <a:bodyPr wrap="square">
-            <a:spAutoFit/>
-          </a:bodyPr>
-          <a:lstStyle/>
-          <a:p>
-            <a:pPr algn="l">
-              <a:spcAft>
-                <a:spcPts val="400"/>
-              </a:spcAft>
-            </a:pPr>
-            <a:r>
-              <a:rPr sz="2800" b="0">
-                <a:solidFill>
-                  <a:srgbClr val="1A2332"/>
-                </a:solidFill>
-                <a:latin typeface="Georgia"/>
-              </a:rPr>
-              <a:t>The 100 creators</a:t>
-            </a:r>
-          </a:p>
-        </p:txBody>
-      </p:sp>
-      <p:graphicFrame>
-        <p:nvGraphicFramePr>
-          <p:cNvPr id="5" name="Table 4"/>
-          <p:cNvGraphicFramePr>
-            <a:graphicFrameLocks noGrp="1"/>
-          </p:cNvGraphicFramePr>
-          <p:nvPr/>
-        </p:nvGraphicFramePr>
-        <p:xfrm>
-          <a:off x="822960" y="2011680"/>
-          <a:ext cx="10515600" cy="3552444"/>
-        </p:xfrm>
-        <a:graphic>
-          <a:graphicData uri="http://schemas.openxmlformats.org/drawingml/2006/table">
-            <a:tbl>
-              <a:tblPr firstRow="1" bandRow="1">
-                <a:tableStyleId>{5C22544A-7EE6-4342-B048-85BDC9FD1C3A}</a:tableStyleId>
-              </a:tblPr>
-              <a:tblGrid>
-                <a:gridCol w="3108960"/>
-                <a:gridCol w="2011680"/>
-                <a:gridCol w="2011680"/>
-                <a:gridCol w="2011680"/>
-                <a:gridCol w="1371600"/>
-              </a:tblGrid>
-              <a:tr h="169164">
-                <a:tc>
-                  <a:txBody>
-                    <a:bodyPr wrap="square"/>
-                    <a:lstStyle/>
-                    <a:p>
-                      <a:r>
-                        <a:rPr sz="1050" b="1">
-                          <a:solidFill>
-                            <a:srgbClr val="FFFFFF"/>
-                          </a:solidFill>
-                          <a:latin typeface="Calibri"/>
-                        </a:rPr>
-                        <a:t>Handle</a:t>
-                      </a:r>
-                    </a:p>
-                  </a:txBody>
-                  <a:tcPr anchor="ctr">
-                    <a:solidFill>
-                      <a:srgbClr val="1A2332"/>
-                    </a:solidFill>
-                  </a:tcPr>
-                </a:tc>
-                <a:tc>
-                  <a:txBody>
-                    <a:bodyPr wrap="square"/>
-                    <a:lstStyle/>
-                    <a:p>
-                      <a:r>
-                        <a:rPr sz="1050" b="1">
-                          <a:solidFill>
-                            <a:srgbClr val="FFFFFF"/>
-                          </a:solidFill>
-                          <a:latin typeface="Calibri"/>
-                        </a:rPr>
-                        <a:t>Platform</a:t>
-                      </a:r>
-                    </a:p>
-                  </a:txBody>
-                  <a:tcPr anchor="ctr">
-                    <a:solidFill>
-                      <a:srgbClr val="1A2332"/>
-                    </a:solidFill>
-                  </a:tcPr>
-                </a:tc>
-                <a:tc>
-                  <a:txBody>
-                    <a:bodyPr wrap="square"/>
-                    <a:lstStyle/>
-                    <a:p>
-                      <a:r>
-                        <a:rPr sz="1050" b="1">
-                          <a:solidFill>
-                            <a:srgbClr val="FFFFFF"/>
-                          </a:solidFill>
-                          <a:latin typeface="Calibri"/>
-                        </a:rPr>
-                        <a:t>Followers</a:t>
-                      </a:r>
-                    </a:p>
-                  </a:txBody>
-                  <a:tcPr anchor="ctr">
-                    <a:solidFill>
-                      <a:srgbClr val="1A2332"/>
-                    </a:solidFill>
-                  </a:tcPr>
-                </a:tc>
-                <a:tc>
-                  <a:txBody>
-                    <a:bodyPr wrap="square"/>
-                    <a:lstStyle/>
-                    <a:p>
-                      <a:r>
-                        <a:rPr sz="1050" b="1">
-                          <a:solidFill>
-                            <a:srgbClr val="FFFFFF"/>
-                          </a:solidFill>
-                          <a:latin typeface="Calibri"/>
-                        </a:rPr>
-                        <a:t>Niche</a:t>
-                      </a:r>
-                    </a:p>
-                  </a:txBody>
-                  <a:tcPr anchor="ctr">
-                    <a:solidFill>
-                      <a:srgbClr val="1A2332"/>
-                    </a:solidFill>
-                  </a:tcPr>
-                </a:tc>
-                <a:tc>
-                  <a:txBody>
-                    <a:bodyPr wrap="square"/>
-                    <a:lstStyle/>
-                    <a:p>
-                      <a:r>
-                        <a:rPr sz="1050" b="1">
-                          <a:solidFill>
-                            <a:srgbClr val="FFFFFF"/>
-                          </a:solidFill>
-                          <a:latin typeface="Calibri"/>
-                        </a:rPr>
-                        <a:t>Itineraries</a:t>
-                      </a:r>
-                    </a:p>
-                  </a:txBody>
-                  <a:tcPr anchor="ctr">
-                    <a:solidFill>
-                      <a:srgbClr val="1A2332"/>
-                    </a:solidFill>
-                  </a:tcPr>
-                </a:tc>
-              </a:tr>
-              <a:tr h="169164">
-                <a:tc>
-                  <a:txBody>
-                    <a:bodyPr wrap="square"/>
-                    <a:lstStyle/>
-                    <a:p>
-                      <a:r>
-                        <a:rPr sz="1050">
-                          <a:solidFill>
-                            <a:srgbClr val="1A2332"/>
-                          </a:solidFill>
-                          <a:latin typeface="Calibri"/>
-                        </a:rPr>
-                        <a:t>@adventurouskate</a:t>
-                      </a:r>
-                    </a:p>
-                  </a:txBody>
-                  <a:tcPr anchor="ctr" marL="73152"/>
-                </a:tc>
-                <a:tc>
-                  <a:txBody>
-                    <a:bodyPr wrap="square"/>
-                    <a:lstStyle/>
-                    <a:p>
-                      <a:r>
-                        <a:rPr sz="1050">
-                          <a:solidFill>
-                            <a:srgbClr val="1A2332"/>
-                          </a:solidFill>
-                          <a:latin typeface="Calibri"/>
-                        </a:rPr>
-                        <a:t>instagram</a:t>
-                      </a:r>
-                    </a:p>
-                  </a:txBody>
-                  <a:tcPr anchor="ctr" marL="73152"/>
-                </a:tc>
-                <a:tc>
-                  <a:txBody>
-                    <a:bodyPr wrap="square"/>
-                    <a:lstStyle/>
-                    <a:p>
-                      <a:r>
-                        <a:rPr sz="1050">
-                          <a:solidFill>
-                            <a:srgbClr val="1A2332"/>
-                          </a:solidFill>
-                          <a:latin typeface="Calibri"/>
-                        </a:rPr>
-                        <a:t>189K</a:t>
-                      </a:r>
-                    </a:p>
-                  </a:txBody>
-                  <a:tcPr anchor="ctr" marL="73152"/>
-                </a:tc>
-                <a:tc>
-                  <a:txBody>
-                    <a:bodyPr wrap="square"/>
-                    <a:lstStyle/>
-                    <a:p>
-                      <a:r>
-                        <a:rPr sz="1050">
-                          <a:solidFill>
-                            <a:srgbClr val="1A2332"/>
-                          </a:solidFill>
-                          <a:latin typeface="Calibri"/>
-                        </a:rPr>
-                        <a:t>solo</a:t>
-                      </a:r>
-                    </a:p>
-                  </a:txBody>
-                  <a:tcPr anchor="ctr" marL="73152"/>
-                </a:tc>
-                <a:tc>
-                  <a:txBody>
-                    <a:bodyPr wrap="square"/>
-                    <a:lstStyle/>
-                    <a:p>
-                      <a:r>
-                        <a:rPr sz="1050">
-                          <a:solidFill>
-                            <a:srgbClr val="1A2332"/>
-                          </a:solidFill>
-                          <a:latin typeface="Calibri"/>
-                        </a:rPr>
-                        <a:t>2</a:t>
-                      </a:r>
-                    </a:p>
-                  </a:txBody>
-                  <a:tcPr anchor="ctr" marL="73152"/>
-                </a:tc>
-              </a:tr>
-              <a:tr h="169164">
-                <a:tc>
-                  <a:txBody>
-                    <a:bodyPr wrap="square"/>
-                    <a:lstStyle/>
-                    <a:p>
-                      <a:r>
-                        <a:rPr sz="1050">
-                          <a:solidFill>
-                            <a:srgbClr val="1A2332"/>
-                          </a:solidFill>
-                          <a:latin typeface="Calibri"/>
-                        </a:rPr>
-                        <a:t>@africansafari</a:t>
-                      </a:r>
-                    </a:p>
-                  </a:txBody>
-                  <a:tcPr anchor="ctr" marL="73152">
-                    <a:solidFill>
-                      <a:srgbClr val="F1EBDF"/>
-                    </a:solidFill>
-                  </a:tcPr>
-                </a:tc>
-                <a:tc>
-                  <a:txBody>
-                    <a:bodyPr wrap="square"/>
-                    <a:lstStyle/>
-                    <a:p>
-                      <a:r>
-                        <a:rPr sz="1050">
-                          <a:solidFill>
-                            <a:srgbClr val="1A2332"/>
-                          </a:solidFill>
-                          <a:latin typeface="Calibri"/>
-                        </a:rPr>
-                        <a:t>instagram</a:t>
-                      </a:r>
-                    </a:p>
-                  </a:txBody>
-                  <a:tcPr anchor="ctr" marL="73152">
-                    <a:solidFill>
-                      <a:srgbClr val="F1EBDF"/>
-                    </a:solidFill>
-                  </a:tcPr>
-                </a:tc>
-                <a:tc>
-                  <a:txBody>
-                    <a:bodyPr wrap="square"/>
-                    <a:lstStyle/>
-                    <a:p>
-                      <a:r>
-                        <a:rPr sz="1050">
-                          <a:solidFill>
-                            <a:srgbClr val="1A2332"/>
-                          </a:solidFill>
-                          <a:latin typeface="Calibri"/>
-                        </a:rPr>
-                        <a:t>234K</a:t>
-                      </a:r>
-                    </a:p>
-                  </a:txBody>
-                  <a:tcPr anchor="ctr" marL="73152">
-                    <a:solidFill>
-                      <a:srgbClr val="F1EBDF"/>
-                    </a:solidFill>
-                  </a:tcPr>
-                </a:tc>
-                <a:tc>
-                  <a:txBody>
-                    <a:bodyPr wrap="square"/>
-                    <a:lstStyle/>
-                    <a:p>
-                      <a:r>
-                        <a:rPr sz="1050">
-                          <a:solidFill>
-                            <a:srgbClr val="1A2332"/>
-                          </a:solidFill>
-                          <a:latin typeface="Calibri"/>
-                        </a:rPr>
-                        <a:t>adventure</a:t>
-                      </a:r>
-                    </a:p>
-                  </a:txBody>
-                  <a:tcPr anchor="ctr" marL="73152">
-                    <a:solidFill>
-                      <a:srgbClr val="F1EBDF"/>
-                    </a:solidFill>
-                  </a:tcPr>
-                </a:tc>
-                <a:tc>
-                  <a:txBody>
-                    <a:bodyPr wrap="square"/>
-                    <a:lstStyle/>
-                    <a:p>
-                      <a:r>
-                        <a:rPr sz="1050">
-                          <a:solidFill>
-                            <a:srgbClr val="1A2332"/>
-                          </a:solidFill>
-                          <a:latin typeface="Calibri"/>
-                        </a:rPr>
-                        <a:t>0</a:t>
-                      </a:r>
-                    </a:p>
-                  </a:txBody>
-                  <a:tcPr anchor="ctr" marL="73152">
-                    <a:solidFill>
-                      <a:srgbClr val="F1EBDF"/>
-                    </a:solidFill>
-                  </a:tcPr>
-                </a:tc>
-              </a:tr>
-              <a:tr h="169164">
-                <a:tc>
-                  <a:txBody>
-                    <a:bodyPr wrap="square"/>
-                    <a:lstStyle/>
-                    <a:p>
-                      <a:r>
-                        <a:rPr sz="1050">
-                          <a:solidFill>
-                            <a:srgbClr val="1A2332"/>
-                          </a:solidFill>
-                          <a:latin typeface="Calibri"/>
-                        </a:rPr>
-                        <a:t>@asiatravel</a:t>
-                      </a:r>
-                    </a:p>
-                  </a:txBody>
-                  <a:tcPr anchor="ctr" marL="73152"/>
-                </a:tc>
-                <a:tc>
-                  <a:txBody>
-                    <a:bodyPr wrap="square"/>
-                    <a:lstStyle/>
-                    <a:p>
-                      <a:r>
-                        <a:rPr sz="1050">
-                          <a:solidFill>
-                            <a:srgbClr val="1A2332"/>
-                          </a:solidFill>
-                          <a:latin typeface="Calibri"/>
-                        </a:rPr>
-                        <a:t>instagram</a:t>
-                      </a:r>
-                    </a:p>
-                  </a:txBody>
-                  <a:tcPr anchor="ctr" marL="73152"/>
-                </a:tc>
-                <a:tc>
-                  <a:txBody>
-                    <a:bodyPr wrap="square"/>
-                    <a:lstStyle/>
-                    <a:p>
-                      <a:r>
-                        <a:rPr sz="1050">
-                          <a:solidFill>
-                            <a:srgbClr val="1A2332"/>
-                          </a:solidFill>
-                          <a:latin typeface="Calibri"/>
-                        </a:rPr>
-                        <a:t>567K</a:t>
-                      </a:r>
-                    </a:p>
-                  </a:txBody>
-                  <a:tcPr anchor="ctr" marL="73152"/>
-                </a:tc>
-                <a:tc>
-                  <a:txBody>
-                    <a:bodyPr wrap="square"/>
-                    <a:lstStyle/>
-                    <a:p>
-                      <a:r>
-                        <a:rPr sz="1050">
-                          <a:solidFill>
-                            <a:srgbClr val="1A2332"/>
-                          </a:solidFill>
-                          <a:latin typeface="Calibri"/>
-                        </a:rPr>
-                        <a:t>cultural</a:t>
-                      </a:r>
-                    </a:p>
-                  </a:txBody>
-                  <a:tcPr anchor="ctr" marL="73152"/>
-                </a:tc>
-                <a:tc>
-                  <a:txBody>
-                    <a:bodyPr wrap="square"/>
-                    <a:lstStyle/>
-                    <a:p>
-                      <a:r>
-                        <a:rPr sz="1050">
-                          <a:solidFill>
-                            <a:srgbClr val="1A2332"/>
-                          </a:solidFill>
-                          <a:latin typeface="Calibri"/>
-                        </a:rPr>
-                        <a:t>1</a:t>
-                      </a:r>
-                    </a:p>
-                  </a:txBody>
-                  <a:tcPr anchor="ctr" marL="73152"/>
-                </a:tc>
-              </a:tr>
-              <a:tr h="169164">
-                <a:tc>
-                  <a:txBody>
-                    <a:bodyPr wrap="square"/>
-                    <a:lstStyle/>
-                    <a:p>
-                      <a:r>
-                        <a:rPr sz="1050">
-                          <a:solidFill>
-                            <a:srgbClr val="1A2332"/>
-                          </a:solidFill>
-                          <a:latin typeface="Calibri"/>
-                        </a:rPr>
-                        <a:t>@backpackersteve</a:t>
-                      </a:r>
-                    </a:p>
-                  </a:txBody>
-                  <a:tcPr anchor="ctr" marL="73152">
-                    <a:solidFill>
-                      <a:srgbClr val="F1EBDF"/>
-                    </a:solidFill>
-                  </a:tcPr>
-                </a:tc>
-                <a:tc>
-                  <a:txBody>
-                    <a:bodyPr wrap="square"/>
-                    <a:lstStyle/>
-                    <a:p>
-                      <a:r>
-                        <a:rPr sz="1050">
-                          <a:solidFill>
-                            <a:srgbClr val="1A2332"/>
-                          </a:solidFill>
-                          <a:latin typeface="Calibri"/>
-                        </a:rPr>
-                        <a:t>instagram</a:t>
-                      </a:r>
-                    </a:p>
-                  </a:txBody>
-                  <a:tcPr anchor="ctr" marL="73152">
-                    <a:solidFill>
-                      <a:srgbClr val="F1EBDF"/>
-                    </a:solidFill>
-                  </a:tcPr>
-                </a:tc>
-                <a:tc>
-                  <a:txBody>
-                    <a:bodyPr wrap="square"/>
-                    <a:lstStyle/>
-                    <a:p>
-                      <a:r>
-                        <a:rPr sz="1050">
-                          <a:solidFill>
-                            <a:srgbClr val="1A2332"/>
-                          </a:solidFill>
-                          <a:latin typeface="Calibri"/>
-                        </a:rPr>
-                        <a:t>189K</a:t>
-                      </a:r>
-                    </a:p>
-                  </a:txBody>
-                  <a:tcPr anchor="ctr" marL="73152">
-                    <a:solidFill>
-                      <a:srgbClr val="F1EBDF"/>
-                    </a:solidFill>
-                  </a:tcPr>
-                </a:tc>
-                <a:tc>
-                  <a:txBody>
-                    <a:bodyPr wrap="square"/>
-                    <a:lstStyle/>
-                    <a:p>
-                      <a:r>
-                        <a:rPr sz="1050">
-                          <a:solidFill>
-                            <a:srgbClr val="1A2332"/>
-                          </a:solidFill>
-                          <a:latin typeface="Calibri"/>
-                        </a:rPr>
-                        <a:t>budget</a:t>
-                      </a:r>
-                    </a:p>
-                  </a:txBody>
-                  <a:tcPr anchor="ctr" marL="73152">
-                    <a:solidFill>
-                      <a:srgbClr val="F1EBDF"/>
-                    </a:solidFill>
-                  </a:tcPr>
-                </a:tc>
-                <a:tc>
-                  <a:txBody>
-                    <a:bodyPr wrap="square"/>
-                    <a:lstStyle/>
-                    <a:p>
-                      <a:r>
-                        <a:rPr sz="1050">
-                          <a:solidFill>
-                            <a:srgbClr val="1A2332"/>
-                          </a:solidFill>
-                          <a:latin typeface="Calibri"/>
-                        </a:rPr>
-                        <a:t>2</a:t>
-                      </a:r>
-                    </a:p>
-                  </a:txBody>
-                  <a:tcPr anchor="ctr" marL="73152">
-                    <a:solidFill>
-                      <a:srgbClr val="F1EBDF"/>
-                    </a:solidFill>
-                  </a:tcPr>
-                </a:tc>
-              </a:tr>
-              <a:tr h="169164">
-                <a:tc>
-                  <a:txBody>
-                    <a:bodyPr wrap="square"/>
-                    <a:lstStyle/>
-                    <a:p>
-                      <a:r>
-                        <a:rPr sz="1050">
-                          <a:solidFill>
-                            <a:srgbClr val="1A2332"/>
-                          </a:solidFill>
-                          <a:latin typeface="Calibri"/>
-                        </a:rPr>
-                        <a:t>@braidenrex</a:t>
-                      </a:r>
-                    </a:p>
-                  </a:txBody>
-                  <a:tcPr anchor="ctr" marL="73152"/>
-                </a:tc>
-                <a:tc>
-                  <a:txBody>
-                    <a:bodyPr wrap="square"/>
-                    <a:lstStyle/>
-                    <a:p>
-                      <a:r>
-                        <a:rPr sz="1050">
-                          <a:solidFill>
-                            <a:srgbClr val="1A2332"/>
-                          </a:solidFill>
-                          <a:latin typeface="Calibri"/>
-                        </a:rPr>
-                        <a:t>instagram</a:t>
-                      </a:r>
-                    </a:p>
-                  </a:txBody>
-                  <a:tcPr anchor="ctr" marL="73152"/>
-                </a:tc>
-                <a:tc>
-                  <a:txBody>
-                    <a:bodyPr wrap="square"/>
-                    <a:lstStyle/>
-                    <a:p>
-                      <a:r>
-                        <a:rPr sz="1050">
-                          <a:solidFill>
-                            <a:srgbClr val="1A2332"/>
-                          </a:solidFill>
-                          <a:latin typeface="Calibri"/>
-                        </a:rPr>
-                        <a:t>789K</a:t>
-                      </a:r>
-                    </a:p>
-                  </a:txBody>
-                  <a:tcPr anchor="ctr" marL="73152"/>
-                </a:tc>
-                <a:tc>
-                  <a:txBody>
-                    <a:bodyPr wrap="square"/>
-                    <a:lstStyle/>
-                    <a:p>
-                      <a:r>
-                        <a:rPr sz="1050">
-                          <a:solidFill>
-                            <a:srgbClr val="1A2332"/>
-                          </a:solidFill>
-                          <a:latin typeface="Calibri"/>
-                        </a:rPr>
-                        <a:t>adventure</a:t>
-                      </a:r>
-                    </a:p>
-                  </a:txBody>
-                  <a:tcPr anchor="ctr" marL="73152"/>
-                </a:tc>
-                <a:tc>
-                  <a:txBody>
-                    <a:bodyPr wrap="square"/>
-                    <a:lstStyle/>
-                    <a:p>
-                      <a:r>
-                        <a:rPr sz="1050">
-                          <a:solidFill>
-                            <a:srgbClr val="1A2332"/>
-                          </a:solidFill>
-                          <a:latin typeface="Calibri"/>
-                        </a:rPr>
-                        <a:t>0</a:t>
-                      </a:r>
-                    </a:p>
-                  </a:txBody>
-                  <a:tcPr anchor="ctr" marL="73152"/>
-                </a:tc>
-              </a:tr>
-              <a:tr h="169164">
-                <a:tc>
-                  <a:txBody>
-                    <a:bodyPr wrap="square"/>
-                    <a:lstStyle/>
-                    <a:p>
-                      <a:r>
-                        <a:rPr sz="1050">
-                          <a:solidFill>
-                            <a:srgbClr val="1A2332"/>
-                          </a:solidFill>
-                          <a:latin typeface="Calibri"/>
-                        </a:rPr>
-                        <a:t>@budgettraveller</a:t>
-                      </a:r>
-                    </a:p>
-                  </a:txBody>
-                  <a:tcPr anchor="ctr" marL="73152">
-                    <a:solidFill>
-                      <a:srgbClr val="F1EBDF"/>
-                    </a:solidFill>
-                  </a:tcPr>
-                </a:tc>
-                <a:tc>
-                  <a:txBody>
-                    <a:bodyPr wrap="square"/>
-                    <a:lstStyle/>
-                    <a:p>
-                      <a:r>
-                        <a:rPr sz="1050">
-                          <a:solidFill>
-                            <a:srgbClr val="1A2332"/>
-                          </a:solidFill>
-                          <a:latin typeface="Calibri"/>
-                        </a:rPr>
-                        <a:t>instagram</a:t>
-                      </a:r>
-                    </a:p>
-                  </a:txBody>
-                  <a:tcPr anchor="ctr" marL="73152">
-                    <a:solidFill>
-                      <a:srgbClr val="F1EBDF"/>
-                    </a:solidFill>
-                  </a:tcPr>
-                </a:tc>
-                <a:tc>
-                  <a:txBody>
-                    <a:bodyPr wrap="square"/>
-                    <a:lstStyle/>
-                    <a:p>
-                      <a:r>
-                        <a:rPr sz="1050">
-                          <a:solidFill>
-                            <a:srgbClr val="1A2332"/>
-                          </a:solidFill>
-                          <a:latin typeface="Calibri"/>
-                        </a:rPr>
-                        <a:t>345K</a:t>
-                      </a:r>
-                    </a:p>
-                  </a:txBody>
-                  <a:tcPr anchor="ctr" marL="73152">
-                    <a:solidFill>
-                      <a:srgbClr val="F1EBDF"/>
-                    </a:solidFill>
-                  </a:tcPr>
-                </a:tc>
-                <a:tc>
-                  <a:txBody>
-                    <a:bodyPr wrap="square"/>
-                    <a:lstStyle/>
-                    <a:p>
-                      <a:r>
-                        <a:rPr sz="1050">
-                          <a:solidFill>
-                            <a:srgbClr val="1A2332"/>
-                          </a:solidFill>
-                          <a:latin typeface="Calibri"/>
-                        </a:rPr>
-                        <a:t>budget</a:t>
-                      </a:r>
-                    </a:p>
-                  </a:txBody>
-                  <a:tcPr anchor="ctr" marL="73152">
-                    <a:solidFill>
-                      <a:srgbClr val="F1EBDF"/>
-                    </a:solidFill>
-                  </a:tcPr>
-                </a:tc>
-                <a:tc>
-                  <a:txBody>
-                    <a:bodyPr wrap="square"/>
-                    <a:lstStyle/>
-                    <a:p>
-                      <a:r>
-                        <a:rPr sz="1050">
-                          <a:solidFill>
-                            <a:srgbClr val="1A2332"/>
-                          </a:solidFill>
-                          <a:latin typeface="Calibri"/>
-                        </a:rPr>
-                        <a:t>3</a:t>
-                      </a:r>
-                    </a:p>
-                  </a:txBody>
-                  <a:tcPr anchor="ctr" marL="73152">
-                    <a:solidFill>
-                      <a:srgbClr val="F1EBDF"/>
-                    </a:solidFill>
-                  </a:tcPr>
-                </a:tc>
-              </a:tr>
-              <a:tr h="169164">
-                <a:tc>
-                  <a:txBody>
-                    <a:bodyPr wrap="square"/>
-                    <a:lstStyle/>
-                    <a:p>
-                      <a:r>
-                        <a:rPr sz="1050">
-                          <a:solidFill>
-                            <a:srgbClr val="1A2332"/>
-                          </a:solidFill>
-                          <a:latin typeface="Calibri"/>
-                        </a:rPr>
-                        <a:t>@calsnape</a:t>
-                      </a:r>
-                    </a:p>
-                  </a:txBody>
-                  <a:tcPr anchor="ctr" marL="73152"/>
-                </a:tc>
-                <a:tc>
-                  <a:txBody>
-                    <a:bodyPr wrap="square"/>
-                    <a:lstStyle/>
-                    <a:p>
-                      <a:r>
-                        <a:rPr sz="1050">
-                          <a:solidFill>
-                            <a:srgbClr val="1A2332"/>
-                          </a:solidFill>
-                          <a:latin typeface="Calibri"/>
-                        </a:rPr>
-                        <a:t>instagram</a:t>
-                      </a:r>
-                    </a:p>
-                  </a:txBody>
-                  <a:tcPr anchor="ctr" marL="73152"/>
-                </a:tc>
-                <a:tc>
-                  <a:txBody>
-                    <a:bodyPr wrap="square"/>
-                    <a:lstStyle/>
-                    <a:p>
-                      <a:r>
-                        <a:rPr sz="1050">
-                          <a:solidFill>
-                            <a:srgbClr val="1A2332"/>
-                          </a:solidFill>
-                          <a:latin typeface="Calibri"/>
-                        </a:rPr>
-                        <a:t>over 800K</a:t>
-                      </a:r>
-                    </a:p>
-                  </a:txBody>
-                  <a:tcPr anchor="ctr" marL="73152"/>
-                </a:tc>
-                <a:tc>
-                  <a:txBody>
-                    <a:bodyPr wrap="square"/>
-                    <a:lstStyle/>
-                    <a:p>
-                      <a:r>
-                        <a:rPr sz="1050">
-                          <a:solidFill>
-                            <a:srgbClr val="1A2332"/>
-                          </a:solidFill>
-                          <a:latin typeface="Calibri"/>
-                        </a:rPr>
-                        <a:t>adventure</a:t>
-                      </a:r>
-                    </a:p>
-                  </a:txBody>
-                  <a:tcPr anchor="ctr" marL="73152"/>
-                </a:tc>
-                <a:tc>
-                  <a:txBody>
-                    <a:bodyPr wrap="square"/>
-                    <a:lstStyle/>
-                    <a:p>
-                      <a:r>
-                        <a:rPr sz="1050">
-                          <a:solidFill>
-                            <a:srgbClr val="1A2332"/>
-                          </a:solidFill>
-                          <a:latin typeface="Calibri"/>
-                        </a:rPr>
-                        <a:t>0</a:t>
-                      </a:r>
-                    </a:p>
-                  </a:txBody>
-                  <a:tcPr anchor="ctr" marL="73152"/>
-                </a:tc>
-              </a:tr>
-              <a:tr h="169164">
-                <a:tc>
-                  <a:txBody>
-                    <a:bodyPr wrap="square"/>
-                    <a:lstStyle/>
-                    <a:p>
-                      <a:r>
-                        <a:rPr sz="1050">
-                          <a:solidFill>
-                            <a:srgbClr val="1A2332"/>
-                          </a:solidFill>
-                          <a:latin typeface="Calibri"/>
-                        </a:rPr>
-                        <a:t>@cheaprvliving</a:t>
-                      </a:r>
-                    </a:p>
-                  </a:txBody>
-                  <a:tcPr anchor="ctr" marL="73152">
-                    <a:solidFill>
-                      <a:srgbClr val="F1EBDF"/>
-                    </a:solidFill>
-                  </a:tcPr>
-                </a:tc>
-                <a:tc>
-                  <a:txBody>
-                    <a:bodyPr wrap="square"/>
-                    <a:lstStyle/>
-                    <a:p>
-                      <a:r>
-                        <a:rPr sz="1050">
-                          <a:solidFill>
-                            <a:srgbClr val="1A2332"/>
-                          </a:solidFill>
-                          <a:latin typeface="Calibri"/>
-                        </a:rPr>
-                        <a:t>instagram</a:t>
-                      </a:r>
-                    </a:p>
-                  </a:txBody>
-                  <a:tcPr anchor="ctr" marL="73152">
-                    <a:solidFill>
-                      <a:srgbClr val="F1EBDF"/>
-                    </a:solidFill>
-                  </a:tcPr>
-                </a:tc>
-                <a:tc>
-                  <a:txBody>
-                    <a:bodyPr wrap="square"/>
-                    <a:lstStyle/>
-                    <a:p>
-                      <a:r>
-                        <a:rPr sz="1050">
-                          <a:solidFill>
-                            <a:srgbClr val="1A2332"/>
-                          </a:solidFill>
-                          <a:latin typeface="Calibri"/>
-                        </a:rPr>
-                        <a:t>234K</a:t>
-                      </a:r>
-                    </a:p>
-                  </a:txBody>
-                  <a:tcPr anchor="ctr" marL="73152">
-                    <a:solidFill>
-                      <a:srgbClr val="F1EBDF"/>
-                    </a:solidFill>
-                  </a:tcPr>
-                </a:tc>
-                <a:tc>
-                  <a:txBody>
-                    <a:bodyPr wrap="square"/>
-                    <a:lstStyle/>
-                    <a:p>
-                      <a:r>
-                        <a:rPr sz="1050">
-                          <a:solidFill>
-                            <a:srgbClr val="1A2332"/>
-                          </a:solidFill>
-                          <a:latin typeface="Calibri"/>
-                        </a:rPr>
-                        <a:t>budget</a:t>
-                      </a:r>
-                    </a:p>
-                  </a:txBody>
-                  <a:tcPr anchor="ctr" marL="73152">
-                    <a:solidFill>
-                      <a:srgbClr val="F1EBDF"/>
-                    </a:solidFill>
-                  </a:tcPr>
-                </a:tc>
-                <a:tc>
-                  <a:txBody>
-                    <a:bodyPr wrap="square"/>
-                    <a:lstStyle/>
-                    <a:p>
-                      <a:r>
-                        <a:rPr sz="1050">
-                          <a:solidFill>
-                            <a:srgbClr val="1A2332"/>
-                          </a:solidFill>
-                          <a:latin typeface="Calibri"/>
-                        </a:rPr>
-                        <a:t>2</a:t>
-                      </a:r>
-                    </a:p>
-                  </a:txBody>
-                  <a:tcPr anchor="ctr" marL="73152">
-                    <a:solidFill>
-                      <a:srgbClr val="F1EBDF"/>
-                    </a:solidFill>
-                  </a:tcPr>
-                </a:tc>
-              </a:tr>
-              <a:tr h="169164">
-                <a:tc>
-                  <a:txBody>
-                    <a:bodyPr wrap="square"/>
-                    <a:lstStyle/>
-                    <a:p>
-                      <a:r>
-                        <a:rPr sz="1050">
-                          <a:solidFill>
-                            <a:srgbClr val="1A2332"/>
-                          </a:solidFill>
-                          <a:latin typeface="Calibri"/>
-                        </a:rPr>
-                        <a:t>@culturalexplorer</a:t>
-                      </a:r>
-                    </a:p>
-                  </a:txBody>
-                  <a:tcPr anchor="ctr" marL="73152"/>
-                </a:tc>
-                <a:tc>
-                  <a:txBody>
-                    <a:bodyPr wrap="square"/>
-                    <a:lstStyle/>
-                    <a:p>
-                      <a:r>
-                        <a:rPr sz="1050">
-                          <a:solidFill>
-                            <a:srgbClr val="1A2332"/>
-                          </a:solidFill>
-                          <a:latin typeface="Calibri"/>
-                        </a:rPr>
-                        <a:t>instagram</a:t>
-                      </a:r>
-                    </a:p>
-                  </a:txBody>
-                  <a:tcPr anchor="ctr" marL="73152"/>
-                </a:tc>
-                <a:tc>
-                  <a:txBody>
-                    <a:bodyPr wrap="square"/>
-                    <a:lstStyle/>
-                    <a:p>
-                      <a:r>
-                        <a:rPr sz="1050">
-                          <a:solidFill>
-                            <a:srgbClr val="1A2332"/>
-                          </a:solidFill>
-                          <a:latin typeface="Calibri"/>
-                        </a:rPr>
-                        <a:t>234K</a:t>
-                      </a:r>
-                    </a:p>
-                  </a:txBody>
-                  <a:tcPr anchor="ctr" marL="73152"/>
-                </a:tc>
-                <a:tc>
-                  <a:txBody>
-                    <a:bodyPr wrap="square"/>
-                    <a:lstStyle/>
-                    <a:p>
-                      <a:r>
-                        <a:rPr sz="1050">
-                          <a:solidFill>
-                            <a:srgbClr val="1A2332"/>
-                          </a:solidFill>
-                          <a:latin typeface="Calibri"/>
-                        </a:rPr>
-                        <a:t>cultural</a:t>
-                      </a:r>
-                    </a:p>
-                  </a:txBody>
-                  <a:tcPr anchor="ctr" marL="73152"/>
-                </a:tc>
-                <a:tc>
-                  <a:txBody>
-                    <a:bodyPr wrap="square"/>
-                    <a:lstStyle/>
-                    <a:p>
-                      <a:r>
-                        <a:rPr sz="1050">
-                          <a:solidFill>
-                            <a:srgbClr val="1A2332"/>
-                          </a:solidFill>
-                          <a:latin typeface="Calibri"/>
-                        </a:rPr>
-                        <a:t>0</a:t>
-                      </a:r>
-                    </a:p>
-                  </a:txBody>
-                  <a:tcPr anchor="ctr" marL="73152"/>
-                </a:tc>
-              </a:tr>
-              <a:tr h="169164">
-                <a:tc>
-                  <a:txBody>
-                    <a:bodyPr wrap="square"/>
-                    <a:lstStyle/>
-                    <a:p>
-                      <a:r>
-                        <a:rPr sz="1050">
-                          <a:solidFill>
-                            <a:srgbClr val="1A2332"/>
-                          </a:solidFill>
-                          <a:latin typeface="Calibri"/>
-                        </a:rPr>
-                        <a:t>@doyoutravel</a:t>
-                      </a:r>
-                    </a:p>
-                  </a:txBody>
-                  <a:tcPr anchor="ctr" marL="73152">
-                    <a:solidFill>
-                      <a:srgbClr val="F1EBDF"/>
-                    </a:solidFill>
-                  </a:tcPr>
-                </a:tc>
-                <a:tc>
-                  <a:txBody>
-                    <a:bodyPr wrap="square"/>
-                    <a:lstStyle/>
-                    <a:p>
-                      <a:r>
-                        <a:rPr sz="1050">
-                          <a:solidFill>
-                            <a:srgbClr val="1A2332"/>
-                          </a:solidFill>
-                          <a:latin typeface="Calibri"/>
-                        </a:rPr>
-                        <a:t>instagram</a:t>
-                      </a:r>
-                    </a:p>
-                  </a:txBody>
-                  <a:tcPr anchor="ctr" marL="73152">
-                    <a:solidFill>
-                      <a:srgbClr val="F1EBDF"/>
-                    </a:solidFill>
-                  </a:tcPr>
-                </a:tc>
-                <a:tc>
-                  <a:txBody>
-                    <a:bodyPr wrap="square"/>
-                    <a:lstStyle/>
-                    <a:p>
-                      <a:r>
-                        <a:rPr sz="1050">
-                          <a:solidFill>
-                            <a:srgbClr val="1A2332"/>
-                          </a:solidFill>
-                          <a:latin typeface="Calibri"/>
-                        </a:rPr>
-                        <a:t>2.9M</a:t>
-                      </a:r>
-                    </a:p>
-                  </a:txBody>
-                  <a:tcPr anchor="ctr" marL="73152">
-                    <a:solidFill>
-                      <a:srgbClr val="F1EBDF"/>
-                    </a:solidFill>
-                  </a:tcPr>
-                </a:tc>
-                <a:tc>
-                  <a:txBody>
-                    <a:bodyPr wrap="square"/>
-                    <a:lstStyle/>
-                    <a:p>
-                      <a:r>
-                        <a:rPr sz="1050">
-                          <a:solidFill>
-                            <a:srgbClr val="1A2332"/>
-                          </a:solidFill>
-                          <a:latin typeface="Calibri"/>
-                        </a:rPr>
-                        <a:t>adventure</a:t>
-                      </a:r>
-                    </a:p>
-                  </a:txBody>
-                  <a:tcPr anchor="ctr" marL="73152">
-                    <a:solidFill>
-                      <a:srgbClr val="F1EBDF"/>
-                    </a:solidFill>
-                  </a:tcPr>
-                </a:tc>
-                <a:tc>
-                  <a:txBody>
-                    <a:bodyPr wrap="square"/>
-                    <a:lstStyle/>
-                    <a:p>
-                      <a:r>
-                        <a:rPr sz="1050">
-                          <a:solidFill>
-                            <a:srgbClr val="1A2332"/>
-                          </a:solidFill>
-                          <a:latin typeface="Calibri"/>
-                        </a:rPr>
-                        <a:t>0</a:t>
-                      </a:r>
-                    </a:p>
-                  </a:txBody>
-                  <a:tcPr anchor="ctr" marL="73152">
-                    <a:solidFill>
-                      <a:srgbClr val="F1EBDF"/>
-                    </a:solidFill>
-                  </a:tcPr>
-                </a:tc>
-              </a:tr>
-              <a:tr h="169164">
-                <a:tc>
-                  <a:txBody>
-                    <a:bodyPr wrap="square"/>
-                    <a:lstStyle/>
-                    <a:p>
-                      <a:r>
-                        <a:rPr sz="1050">
-                          <a:solidFill>
-                            <a:srgbClr val="1A2332"/>
-                          </a:solidFill>
-                          <a:latin typeface="Calibri"/>
-                        </a:rPr>
-                        <a:t>@drewbinsky</a:t>
-                      </a:r>
-                    </a:p>
-                  </a:txBody>
-                  <a:tcPr anchor="ctr" marL="73152"/>
-                </a:tc>
-                <a:tc>
-                  <a:txBody>
-                    <a:bodyPr wrap="square"/>
-                    <a:lstStyle/>
-                    <a:p>
-                      <a:r>
-                        <a:rPr sz="1050">
-                          <a:solidFill>
-                            <a:srgbClr val="1A2332"/>
-                          </a:solidFill>
-                          <a:latin typeface="Calibri"/>
-                        </a:rPr>
-                        <a:t>instagram</a:t>
-                      </a:r>
-                    </a:p>
-                  </a:txBody>
-                  <a:tcPr anchor="ctr" marL="73152"/>
-                </a:tc>
-                <a:tc>
-                  <a:txBody>
-                    <a:bodyPr wrap="square"/>
-                    <a:lstStyle/>
-                    <a:p>
-                      <a:r>
-                        <a:rPr sz="1050">
-                          <a:solidFill>
-                            <a:srgbClr val="1A2332"/>
-                          </a:solidFill>
-                          <a:latin typeface="Calibri"/>
-                        </a:rPr>
-                        <a:t>2.4M</a:t>
-                      </a:r>
-                    </a:p>
-                  </a:txBody>
-                  <a:tcPr anchor="ctr" marL="73152"/>
-                </a:tc>
-                <a:tc>
-                  <a:txBody>
-                    <a:bodyPr wrap="square"/>
-                    <a:lstStyle/>
-                    <a:p>
-                      <a:r>
-                        <a:rPr sz="1050">
-                          <a:solidFill>
-                            <a:srgbClr val="1A2332"/>
-                          </a:solidFill>
-                          <a:latin typeface="Calibri"/>
-                        </a:rPr>
-                        <a:t>adventure</a:t>
-                      </a:r>
-                    </a:p>
-                  </a:txBody>
-                  <a:tcPr anchor="ctr" marL="73152"/>
-                </a:tc>
-                <a:tc>
-                  <a:txBody>
-                    <a:bodyPr wrap="square"/>
-                    <a:lstStyle/>
-                    <a:p>
-                      <a:r>
-                        <a:rPr sz="1050">
-                          <a:solidFill>
-                            <a:srgbClr val="1A2332"/>
-                          </a:solidFill>
-                          <a:latin typeface="Calibri"/>
-                        </a:rPr>
-                        <a:t>0</a:t>
-                      </a:r>
-                    </a:p>
-                  </a:txBody>
-                  <a:tcPr anchor="ctr" marL="73152"/>
-                </a:tc>
-              </a:tr>
-              <a:tr h="169164">
-                <a:tc>
-                  <a:txBody>
-                    <a:bodyPr wrap="square"/>
-                    <a:lstStyle/>
-                    <a:p>
-                      <a:r>
-                        <a:rPr sz="1050">
-                          <a:solidFill>
-                            <a:srgbClr val="1A2332"/>
-                          </a:solidFill>
-                          <a:latin typeface="Calibri"/>
-                        </a:rPr>
-                        <a:t>@emmett_sparling</a:t>
-                      </a:r>
-                    </a:p>
-                  </a:txBody>
-                  <a:tcPr anchor="ctr" marL="73152">
-                    <a:solidFill>
-                      <a:srgbClr val="F1EBDF"/>
-                    </a:solidFill>
-                  </a:tcPr>
-                </a:tc>
-                <a:tc>
-                  <a:txBody>
-                    <a:bodyPr wrap="square"/>
-                    <a:lstStyle/>
-                    <a:p>
-                      <a:r>
-                        <a:rPr sz="1050">
-                          <a:solidFill>
-                            <a:srgbClr val="1A2332"/>
-                          </a:solidFill>
-                          <a:latin typeface="Calibri"/>
-                        </a:rPr>
-                        <a:t>instagram</a:t>
-                      </a:r>
-                    </a:p>
-                  </a:txBody>
-                  <a:tcPr anchor="ctr" marL="73152">
-                    <a:solidFill>
-                      <a:srgbClr val="F1EBDF"/>
-                    </a:solidFill>
-                  </a:tcPr>
-                </a:tc>
-                <a:tc>
-                  <a:txBody>
-                    <a:bodyPr wrap="square"/>
-                    <a:lstStyle/>
-                    <a:p>
-                      <a:r>
-                        <a:rPr sz="1050">
-                          <a:solidFill>
-                            <a:srgbClr val="1A2332"/>
-                          </a:solidFill>
-                          <a:latin typeface="Calibri"/>
-                        </a:rPr>
-                        <a:t>over 800K</a:t>
-                      </a:r>
-                    </a:p>
-                  </a:txBody>
-                  <a:tcPr anchor="ctr" marL="73152">
-                    <a:solidFill>
-                      <a:srgbClr val="F1EBDF"/>
-                    </a:solidFill>
-                  </a:tcPr>
-                </a:tc>
-                <a:tc>
-                  <a:txBody>
-                    <a:bodyPr wrap="square"/>
-                    <a:lstStyle/>
-                    <a:p>
-                      <a:r>
-                        <a:rPr sz="1050">
-                          <a:solidFill>
-                            <a:srgbClr val="1A2332"/>
-                          </a:solidFill>
-                          <a:latin typeface="Calibri"/>
-                        </a:rPr>
-                        <a:t>adventure</a:t>
-                      </a:r>
-                    </a:p>
-                  </a:txBody>
-                  <a:tcPr anchor="ctr" marL="73152">
-                    <a:solidFill>
-                      <a:srgbClr val="F1EBDF"/>
-                    </a:solidFill>
-                  </a:tcPr>
-                </a:tc>
-                <a:tc>
-                  <a:txBody>
-                    <a:bodyPr wrap="square"/>
-                    <a:lstStyle/>
-                    <a:p>
-                      <a:r>
-                        <a:rPr sz="1050">
-                          <a:solidFill>
-                            <a:srgbClr val="1A2332"/>
-                          </a:solidFill>
-                          <a:latin typeface="Calibri"/>
-                        </a:rPr>
-                        <a:t>1</a:t>
-                      </a:r>
-                    </a:p>
-                  </a:txBody>
-                  <a:tcPr anchor="ctr" marL="73152">
-                    <a:solidFill>
-                      <a:srgbClr val="F1EBDF"/>
-                    </a:solidFill>
-                  </a:tcPr>
-                </a:tc>
-              </a:tr>
-              <a:tr h="169164">
-                <a:tc>
-                  <a:txBody>
-                    <a:bodyPr wrap="square"/>
-                    <a:lstStyle/>
-                    <a:p>
-                      <a:r>
-                        <a:rPr sz="1050">
-                          <a:solidFill>
-                            <a:srgbClr val="1A2332"/>
-                          </a:solidFill>
-                          <a:latin typeface="Calibri"/>
-                        </a:rPr>
-                        <a:t>@finduslost</a:t>
-                      </a:r>
-                    </a:p>
-                  </a:txBody>
-                  <a:tcPr anchor="ctr" marL="73152"/>
-                </a:tc>
-                <a:tc>
-                  <a:txBody>
-                    <a:bodyPr wrap="square"/>
-                    <a:lstStyle/>
-                    <a:p>
-                      <a:r>
-                        <a:rPr sz="1050">
-                          <a:solidFill>
-                            <a:srgbClr val="1A2332"/>
-                          </a:solidFill>
-                          <a:latin typeface="Calibri"/>
-                        </a:rPr>
-                        <a:t>instagram</a:t>
-                      </a:r>
-                    </a:p>
-                  </a:txBody>
-                  <a:tcPr anchor="ctr" marL="73152"/>
-                </a:tc>
-                <a:tc>
-                  <a:txBody>
-                    <a:bodyPr wrap="square"/>
-                    <a:lstStyle/>
-                    <a:p>
-                      <a:r>
-                        <a:rPr sz="1050">
-                          <a:solidFill>
-                            <a:srgbClr val="1A2332"/>
-                          </a:solidFill>
-                          <a:latin typeface="Calibri"/>
-                        </a:rPr>
-                        <a:t>unknown</a:t>
-                      </a:r>
-                    </a:p>
-                  </a:txBody>
-                  <a:tcPr anchor="ctr" marL="73152"/>
-                </a:tc>
-                <a:tc>
-                  <a:txBody>
-                    <a:bodyPr wrap="square"/>
-                    <a:lstStyle/>
-                    <a:p>
-                      <a:r>
-                        <a:rPr sz="1050">
-                          <a:solidFill>
-                            <a:srgbClr val="1A2332"/>
-                          </a:solidFill>
-                          <a:latin typeface="Calibri"/>
-                        </a:rPr>
-                        <a:t>guides</a:t>
-                      </a:r>
-                    </a:p>
-                  </a:txBody>
-                  <a:tcPr anchor="ctr" marL="73152"/>
-                </a:tc>
-                <a:tc>
-                  <a:txBody>
-                    <a:bodyPr wrap="square"/>
-                    <a:lstStyle/>
-                    <a:p>
-                      <a:r>
-                        <a:rPr sz="1050">
-                          <a:solidFill>
-                            <a:srgbClr val="1A2332"/>
-                          </a:solidFill>
-                          <a:latin typeface="Calibri"/>
-                        </a:rPr>
-                        <a:t>2</a:t>
-                      </a:r>
-                    </a:p>
-                  </a:txBody>
-                  <a:tcPr anchor="ctr" marL="73152"/>
-                </a:tc>
-              </a:tr>
-              <a:tr h="169164">
-                <a:tc>
-                  <a:txBody>
-                    <a:bodyPr wrap="square"/>
-                    <a:lstStyle/>
-                    <a:p>
-                      <a:r>
-                        <a:rPr sz="1050">
-                          <a:solidFill>
-                            <a:srgbClr val="1A2332"/>
-                          </a:solidFill>
-                          <a:latin typeface="Calibri"/>
-                        </a:rPr>
-                        <a:t>@girlvsglobe</a:t>
-                      </a:r>
-                    </a:p>
-                  </a:txBody>
-                  <a:tcPr anchor="ctr" marL="73152">
-                    <a:solidFill>
-                      <a:srgbClr val="F1EBDF"/>
-                    </a:solidFill>
-                  </a:tcPr>
-                </a:tc>
-                <a:tc>
-                  <a:txBody>
-                    <a:bodyPr wrap="square"/>
-                    <a:lstStyle/>
-                    <a:p>
-                      <a:r>
-                        <a:rPr sz="1050">
-                          <a:solidFill>
-                            <a:srgbClr val="1A2332"/>
-                          </a:solidFill>
-                          <a:latin typeface="Calibri"/>
-                        </a:rPr>
-                        <a:t>instagram</a:t>
-                      </a:r>
-                    </a:p>
-                  </a:txBody>
-                  <a:tcPr anchor="ctr" marL="73152">
-                    <a:solidFill>
-                      <a:srgbClr val="F1EBDF"/>
-                    </a:solidFill>
-                  </a:tcPr>
-                </a:tc>
-                <a:tc>
-                  <a:txBody>
-                    <a:bodyPr wrap="square"/>
-                    <a:lstStyle/>
-                    <a:p>
-                      <a:r>
-                        <a:rPr sz="1050">
-                          <a:solidFill>
-                            <a:srgbClr val="1A2332"/>
-                          </a:solidFill>
-                          <a:latin typeface="Calibri"/>
-                        </a:rPr>
-                        <a:t>298K</a:t>
-                      </a:r>
-                    </a:p>
-                  </a:txBody>
-                  <a:tcPr anchor="ctr" marL="73152">
-                    <a:solidFill>
-                      <a:srgbClr val="F1EBDF"/>
-                    </a:solidFill>
-                  </a:tcPr>
-                </a:tc>
-                <a:tc>
-                  <a:txBody>
-                    <a:bodyPr wrap="square"/>
-                    <a:lstStyle/>
-                    <a:p>
-                      <a:r>
-                        <a:rPr sz="1050">
-                          <a:solidFill>
-                            <a:srgbClr val="1A2332"/>
-                          </a:solidFill>
-                          <a:latin typeface="Calibri"/>
-                        </a:rPr>
-                        <a:t>solo</a:t>
-                      </a:r>
-                    </a:p>
-                  </a:txBody>
-                  <a:tcPr anchor="ctr" marL="73152">
-                    <a:solidFill>
-                      <a:srgbClr val="F1EBDF"/>
-                    </a:solidFill>
-                  </a:tcPr>
-                </a:tc>
-                <a:tc>
-                  <a:txBody>
-                    <a:bodyPr wrap="square"/>
-                    <a:lstStyle/>
-                    <a:p>
-                      <a:r>
-                        <a:rPr sz="1050">
-                          <a:solidFill>
-                            <a:srgbClr val="1A2332"/>
-                          </a:solidFill>
-                          <a:latin typeface="Calibri"/>
-                        </a:rPr>
-                        <a:t>2</a:t>
-                      </a:r>
-                    </a:p>
-                  </a:txBody>
-                  <a:tcPr anchor="ctr" marL="73152">
-                    <a:solidFill>
-                      <a:srgbClr val="F1EBDF"/>
-                    </a:solidFill>
-                  </a:tcPr>
-                </a:tc>
-              </a:tr>
-              <a:tr h="169164">
-                <a:tc>
-                  <a:txBody>
-                    <a:bodyPr wrap="square"/>
-                    <a:lstStyle/>
-                    <a:p>
-                      <a:r>
-                        <a:rPr sz="1050">
-                          <a:solidFill>
-                            <a:srgbClr val="1A2332"/>
-                          </a:solidFill>
-                          <a:latin typeface="Calibri"/>
-                        </a:rPr>
-                        <a:t>@gypsea_lust</a:t>
-                      </a:r>
-                    </a:p>
-                  </a:txBody>
-                  <a:tcPr anchor="ctr" marL="73152"/>
-                </a:tc>
-                <a:tc>
-                  <a:txBody>
-                    <a:bodyPr wrap="square"/>
-                    <a:lstStyle/>
-                    <a:p>
-                      <a:r>
-                        <a:rPr sz="1050">
-                          <a:solidFill>
-                            <a:srgbClr val="1A2332"/>
-                          </a:solidFill>
-                          <a:latin typeface="Calibri"/>
-                        </a:rPr>
-                        <a:t>instagram</a:t>
-                      </a:r>
-                    </a:p>
-                  </a:txBody>
-                  <a:tcPr anchor="ctr" marL="73152"/>
-                </a:tc>
-                <a:tc>
-                  <a:txBody>
-                    <a:bodyPr wrap="square"/>
-                    <a:lstStyle/>
-                    <a:p>
-                      <a:r>
-                        <a:rPr sz="1050">
-                          <a:solidFill>
-                            <a:srgbClr val="1A2332"/>
-                          </a:solidFill>
-                          <a:latin typeface="Calibri"/>
-                        </a:rPr>
-                        <a:t>1.8M</a:t>
-                      </a:r>
-                    </a:p>
-                  </a:txBody>
-                  <a:tcPr anchor="ctr" marL="73152"/>
-                </a:tc>
-                <a:tc>
-                  <a:txBody>
-                    <a:bodyPr wrap="square"/>
-                    <a:lstStyle/>
-                    <a:p>
-                      <a:r>
-                        <a:rPr sz="1050">
-                          <a:solidFill>
-                            <a:srgbClr val="1A2332"/>
-                          </a:solidFill>
-                          <a:latin typeface="Calibri"/>
-                        </a:rPr>
-                        <a:t>beach</a:t>
-                      </a:r>
-                    </a:p>
-                  </a:txBody>
-                  <a:tcPr anchor="ctr" marL="73152"/>
-                </a:tc>
-                <a:tc>
-                  <a:txBody>
-                    <a:bodyPr wrap="square"/>
-                    <a:lstStyle/>
-                    <a:p>
-                      <a:r>
-                        <a:rPr sz="1050">
-                          <a:solidFill>
-                            <a:srgbClr val="1A2332"/>
-                          </a:solidFill>
-                          <a:latin typeface="Calibri"/>
-                        </a:rPr>
-                        <a:t>0</a:t>
-                      </a:r>
-                    </a:p>
-                  </a:txBody>
-                  <a:tcPr anchor="ctr" marL="73152"/>
-                </a:tc>
-              </a:tr>
-              <a:tr h="169164">
-                <a:tc>
-                  <a:txBody>
-                    <a:bodyPr wrap="square"/>
-                    <a:lstStyle/>
-                    <a:p>
-                      <a:r>
-                        <a:rPr sz="1050">
-                          <a:solidFill>
-                            <a:srgbClr val="1A2332"/>
-                          </a:solidFill>
-                          <a:latin typeface="Calibri"/>
-                        </a:rPr>
-                        <a:t>@highonlifee</a:t>
-                      </a:r>
-                    </a:p>
-                  </a:txBody>
-                  <a:tcPr anchor="ctr" marL="73152">
-                    <a:solidFill>
-                      <a:srgbClr val="F1EBDF"/>
-                    </a:solidFill>
-                  </a:tcPr>
-                </a:tc>
-                <a:tc>
-                  <a:txBody>
-                    <a:bodyPr wrap="square"/>
-                    <a:lstStyle/>
-                    <a:p>
-                      <a:r>
-                        <a:rPr sz="1050">
-                          <a:solidFill>
-                            <a:srgbClr val="1A2332"/>
-                          </a:solidFill>
-                          <a:latin typeface="Calibri"/>
-                        </a:rPr>
-                        <a:t>instagram</a:t>
-                      </a:r>
-                    </a:p>
-                  </a:txBody>
-                  <a:tcPr anchor="ctr" marL="73152">
-                    <a:solidFill>
-                      <a:srgbClr val="F1EBDF"/>
-                    </a:solidFill>
-                  </a:tcPr>
-                </a:tc>
-                <a:tc>
-                  <a:txBody>
-                    <a:bodyPr wrap="square"/>
-                    <a:lstStyle/>
-                    <a:p>
-                      <a:r>
-                        <a:rPr sz="1050">
-                          <a:solidFill>
-                            <a:srgbClr val="1A2332"/>
-                          </a:solidFill>
-                          <a:latin typeface="Calibri"/>
-                        </a:rPr>
-                        <a:t>2.1M</a:t>
-                      </a:r>
-                    </a:p>
-                  </a:txBody>
-                  <a:tcPr anchor="ctr" marL="73152">
-                    <a:solidFill>
-                      <a:srgbClr val="F1EBDF"/>
-                    </a:solidFill>
-                  </a:tcPr>
-                </a:tc>
-                <a:tc>
-                  <a:txBody>
-                    <a:bodyPr wrap="square"/>
-                    <a:lstStyle/>
-                    <a:p>
-                      <a:r>
-                        <a:rPr sz="1050">
-                          <a:solidFill>
-                            <a:srgbClr val="1A2332"/>
-                          </a:solidFill>
-                          <a:latin typeface="Calibri"/>
-                        </a:rPr>
-                        <a:t>luxury</a:t>
-                      </a:r>
-                    </a:p>
-                  </a:txBody>
-                  <a:tcPr anchor="ctr" marL="73152">
-                    <a:solidFill>
-                      <a:srgbClr val="F1EBDF"/>
-                    </a:solidFill>
-                  </a:tcPr>
-                </a:tc>
-                <a:tc>
-                  <a:txBody>
-                    <a:bodyPr wrap="square"/>
-                    <a:lstStyle/>
-                    <a:p>
-                      <a:r>
-                        <a:rPr sz="1050">
-                          <a:solidFill>
-                            <a:srgbClr val="1A2332"/>
-                          </a:solidFill>
-                          <a:latin typeface="Calibri"/>
-                        </a:rPr>
-                        <a:t>0</a:t>
-                      </a:r>
-                    </a:p>
-                  </a:txBody>
-                  <a:tcPr anchor="ctr" marL="73152">
-                    <a:solidFill>
-                      <a:srgbClr val="F1EBDF"/>
-                    </a:solidFill>
-                  </a:tcPr>
-                </a:tc>
-              </a:tr>
-              <a:tr h="169164">
-                <a:tc>
-                  <a:txBody>
-                    <a:bodyPr wrap="square"/>
-                    <a:lstStyle/>
-                    <a:p>
-                      <a:r>
-                        <a:rPr sz="1050">
-                          <a:solidFill>
-                            <a:srgbClr val="1A2332"/>
-                          </a:solidFill>
-                          <a:latin typeface="Calibri"/>
-                        </a:rPr>
-                        <a:t>@islandhopper</a:t>
-                      </a:r>
-                    </a:p>
-                  </a:txBody>
-                  <a:tcPr anchor="ctr" marL="73152"/>
-                </a:tc>
-                <a:tc>
-                  <a:txBody>
-                    <a:bodyPr wrap="square"/>
-                    <a:lstStyle/>
-                    <a:p>
-                      <a:r>
-                        <a:rPr sz="1050">
-                          <a:solidFill>
-                            <a:srgbClr val="1A2332"/>
-                          </a:solidFill>
-                          <a:latin typeface="Calibri"/>
-                        </a:rPr>
-                        <a:t>instagram</a:t>
-                      </a:r>
-                    </a:p>
-                  </a:txBody>
-                  <a:tcPr anchor="ctr" marL="73152"/>
-                </a:tc>
-                <a:tc>
-                  <a:txBody>
-                    <a:bodyPr wrap="square"/>
-                    <a:lstStyle/>
-                    <a:p>
-                      <a:r>
-                        <a:rPr sz="1050">
-                          <a:solidFill>
-                            <a:srgbClr val="1A2332"/>
-                          </a:solidFill>
-                          <a:latin typeface="Calibri"/>
-                        </a:rPr>
-                        <a:t>298K</a:t>
-                      </a:r>
-                    </a:p>
-                  </a:txBody>
-                  <a:tcPr anchor="ctr" marL="73152"/>
-                </a:tc>
-                <a:tc>
-                  <a:txBody>
-                    <a:bodyPr wrap="square"/>
-                    <a:lstStyle/>
-                    <a:p>
-                      <a:r>
-                        <a:rPr sz="1050">
-                          <a:solidFill>
-                            <a:srgbClr val="1A2332"/>
-                          </a:solidFill>
-                          <a:latin typeface="Calibri"/>
-                        </a:rPr>
-                        <a:t>beach</a:t>
-                      </a:r>
-                    </a:p>
-                  </a:txBody>
-                  <a:tcPr anchor="ctr" marL="73152"/>
-                </a:tc>
-                <a:tc>
-                  <a:txBody>
-                    <a:bodyPr wrap="square"/>
-                    <a:lstStyle/>
-                    <a:p>
-                      <a:r>
-                        <a:rPr sz="1050">
-                          <a:solidFill>
-                            <a:srgbClr val="1A2332"/>
-                          </a:solidFill>
-                          <a:latin typeface="Calibri"/>
-                        </a:rPr>
-                        <a:t>0</a:t>
-                      </a:r>
-                    </a:p>
-                  </a:txBody>
-                  <a:tcPr anchor="ctr" marL="73152"/>
-                </a:tc>
-              </a:tr>
-              <a:tr h="169164">
-                <a:tc>
-                  <a:txBody>
-                    <a:bodyPr wrap="square"/>
-                    <a:lstStyle/>
-                    <a:p>
-                      <a:r>
-                        <a:rPr sz="1050">
-                          <a:solidFill>
-                            <a:srgbClr val="1A2332"/>
-                          </a:solidFill>
-                          <a:latin typeface="Calibri"/>
-                        </a:rPr>
-                        <a:t>@jessicanabongo</a:t>
-                      </a:r>
-                    </a:p>
-                  </a:txBody>
-                  <a:tcPr anchor="ctr" marL="73152">
-                    <a:solidFill>
-                      <a:srgbClr val="F1EBDF"/>
-                    </a:solidFill>
-                  </a:tcPr>
-                </a:tc>
-                <a:tc>
-                  <a:txBody>
-                    <a:bodyPr wrap="square"/>
-                    <a:lstStyle/>
-                    <a:p>
-                      <a:r>
-                        <a:rPr sz="1050">
-                          <a:solidFill>
-                            <a:srgbClr val="1A2332"/>
-                          </a:solidFill>
-                          <a:latin typeface="Calibri"/>
-                        </a:rPr>
-                        <a:t>instagram</a:t>
-                      </a:r>
-                    </a:p>
-                  </a:txBody>
-                  <a:tcPr anchor="ctr" marL="73152">
-                    <a:solidFill>
-                      <a:srgbClr val="F1EBDF"/>
-                    </a:solidFill>
-                  </a:tcPr>
-                </a:tc>
-                <a:tc>
-                  <a:txBody>
-                    <a:bodyPr wrap="square"/>
-                    <a:lstStyle/>
-                    <a:p>
-                      <a:r>
-                        <a:rPr sz="1050">
-                          <a:solidFill>
-                            <a:srgbClr val="1A2332"/>
-                          </a:solidFill>
-                          <a:latin typeface="Calibri"/>
-                        </a:rPr>
-                        <a:t>234K</a:t>
-                      </a:r>
-                    </a:p>
-                  </a:txBody>
-                  <a:tcPr anchor="ctr" marL="73152">
-                    <a:solidFill>
-                      <a:srgbClr val="F1EBDF"/>
-                    </a:solidFill>
-                  </a:tcPr>
-                </a:tc>
-                <a:tc>
-                  <a:txBody>
-                    <a:bodyPr wrap="square"/>
-                    <a:lstStyle/>
-                    <a:p>
-                      <a:r>
-                        <a:rPr sz="1050">
-                          <a:solidFill>
-                            <a:srgbClr val="1A2332"/>
-                          </a:solidFill>
-                          <a:latin typeface="Calibri"/>
-                        </a:rPr>
-                        <a:t>solo</a:t>
-                      </a:r>
-                    </a:p>
-                  </a:txBody>
-                  <a:tcPr anchor="ctr" marL="73152">
-                    <a:solidFill>
-                      <a:srgbClr val="F1EBDF"/>
-                    </a:solidFill>
-                  </a:tcPr>
-                </a:tc>
-                <a:tc>
-                  <a:txBody>
-                    <a:bodyPr wrap="square"/>
-                    <a:lstStyle/>
-                    <a:p>
-                      <a:r>
-                        <a:rPr sz="1050">
-                          <a:solidFill>
-                            <a:srgbClr val="1A2332"/>
-                          </a:solidFill>
-                          <a:latin typeface="Calibri"/>
-                        </a:rPr>
-                        <a:t>1</a:t>
-                      </a:r>
-                    </a:p>
-                  </a:txBody>
-                  <a:tcPr anchor="ctr" marL="73152">
-                    <a:solidFill>
-                      <a:srgbClr val="F1EBDF"/>
-                    </a:solidFill>
-                  </a:tcPr>
-                </a:tc>
-              </a:tr>
-              <a:tr h="169164">
-                <a:tc>
-                  <a:txBody>
-                    <a:bodyPr wrap="square"/>
-                    <a:lstStyle/>
-                    <a:p>
-                      <a:r>
-                        <a:rPr sz="1050">
-                          <a:solidFill>
-                            <a:srgbClr val="1A2332"/>
-                          </a:solidFill>
-                          <a:latin typeface="Calibri"/>
-                        </a:rPr>
-                        <a:t>@johnnyjet</a:t>
-                      </a:r>
-                    </a:p>
-                  </a:txBody>
-                  <a:tcPr anchor="ctr" marL="73152"/>
-                </a:tc>
-                <a:tc>
-                  <a:txBody>
-                    <a:bodyPr wrap="square"/>
-                    <a:lstStyle/>
-                    <a:p>
-                      <a:r>
-                        <a:rPr sz="1050">
-                          <a:solidFill>
-                            <a:srgbClr val="1A2332"/>
-                          </a:solidFill>
-                          <a:latin typeface="Calibri"/>
-                        </a:rPr>
-                        <a:t>instagram</a:t>
-                      </a:r>
-                    </a:p>
-                  </a:txBody>
-                  <a:tcPr anchor="ctr" marL="73152"/>
-                </a:tc>
-                <a:tc>
-                  <a:txBody>
-                    <a:bodyPr wrap="square"/>
-                    <a:lstStyle/>
-                    <a:p>
-                      <a:r>
-                        <a:rPr sz="1050">
-                          <a:solidFill>
-                            <a:srgbClr val="1A2332"/>
-                          </a:solidFill>
-                          <a:latin typeface="Calibri"/>
-                        </a:rPr>
-                        <a:t>567K</a:t>
-                      </a:r>
-                    </a:p>
-                  </a:txBody>
-                  <a:tcPr anchor="ctr" marL="73152"/>
-                </a:tc>
-                <a:tc>
-                  <a:txBody>
-                    <a:bodyPr wrap="square"/>
-                    <a:lstStyle/>
-                    <a:p>
-                      <a:r>
-                        <a:rPr sz="1050">
-                          <a:solidFill>
-                            <a:srgbClr val="1A2332"/>
-                          </a:solidFill>
-                          <a:latin typeface="Calibri"/>
-                        </a:rPr>
-                        <a:t>points-miles</a:t>
-                      </a:r>
-                    </a:p>
-                  </a:txBody>
-                  <a:tcPr anchor="ctr" marL="73152"/>
-                </a:tc>
-                <a:tc>
-                  <a:txBody>
-                    <a:bodyPr wrap="square"/>
-                    <a:lstStyle/>
-                    <a:p>
-                      <a:r>
-                        <a:rPr sz="1050">
-                          <a:solidFill>
-                            <a:srgbClr val="1A2332"/>
-                          </a:solidFill>
-                          <a:latin typeface="Calibri"/>
-                        </a:rPr>
-                        <a:t>2</a:t>
-                      </a:r>
-                    </a:p>
-                  </a:txBody>
-                  <a:tcPr anchor="ctr" marL="73152"/>
-                </a:tc>
-              </a:tr>
-              <a:tr h="169164">
-                <a:tc>
-                  <a:txBody>
-                    <a:bodyPr wrap="square"/>
-                    <a:lstStyle/>
-                    <a:p>
-                      <a:r>
-                        <a:rPr sz="1050">
-                          <a:solidFill>
-                            <a:srgbClr val="1A2332"/>
-                          </a:solidFill>
-                          <a:latin typeface="Calibri"/>
-                        </a:rPr>
-                        <a:t>@jordanhammond</a:t>
-                      </a:r>
-                    </a:p>
-                  </a:txBody>
-                  <a:tcPr anchor="ctr" marL="73152">
-                    <a:solidFill>
-                      <a:srgbClr val="F1EBDF"/>
-                    </a:solidFill>
-                  </a:tcPr>
-                </a:tc>
-                <a:tc>
-                  <a:txBody>
-                    <a:bodyPr wrap="square"/>
-                    <a:lstStyle/>
-                    <a:p>
-                      <a:r>
-                        <a:rPr sz="1050">
-                          <a:solidFill>
-                            <a:srgbClr val="1A2332"/>
-                          </a:solidFill>
-                          <a:latin typeface="Calibri"/>
-                        </a:rPr>
-                        <a:t>instagram</a:t>
-                      </a:r>
-                    </a:p>
-                  </a:txBody>
-                  <a:tcPr anchor="ctr" marL="73152">
-                    <a:solidFill>
-                      <a:srgbClr val="F1EBDF"/>
-                    </a:solidFill>
-                  </a:tcPr>
-                </a:tc>
-                <a:tc>
-                  <a:txBody>
-                    <a:bodyPr wrap="square"/>
-                    <a:lstStyle/>
-                    <a:p>
-                      <a:r>
-                        <a:rPr sz="1050">
-                          <a:solidFill>
-                            <a:srgbClr val="1A2332"/>
-                          </a:solidFill>
-                          <a:latin typeface="Calibri"/>
-                        </a:rPr>
-                        <a:t>1.2M</a:t>
-                      </a:r>
-                    </a:p>
-                  </a:txBody>
-                  <a:tcPr anchor="ctr" marL="73152">
-                    <a:solidFill>
-                      <a:srgbClr val="F1EBDF"/>
-                    </a:solidFill>
-                  </a:tcPr>
-                </a:tc>
-                <a:tc>
-                  <a:txBody>
-                    <a:bodyPr wrap="square"/>
-                    <a:lstStyle/>
-                    <a:p>
-                      <a:r>
-                        <a:rPr sz="1050">
-                          <a:solidFill>
-                            <a:srgbClr val="1A2332"/>
-                          </a:solidFill>
-                          <a:latin typeface="Calibri"/>
-                        </a:rPr>
-                        <a:t>adventure</a:t>
-                      </a:r>
-                    </a:p>
-                  </a:txBody>
-                  <a:tcPr anchor="ctr" marL="73152">
-                    <a:solidFill>
-                      <a:srgbClr val="F1EBDF"/>
-                    </a:solidFill>
-                  </a:tcPr>
-                </a:tc>
-                <a:tc>
-                  <a:txBody>
-                    <a:bodyPr wrap="square"/>
-                    <a:lstStyle/>
-                    <a:p>
-                      <a:r>
-                        <a:rPr sz="1050">
-                          <a:solidFill>
-                            <a:srgbClr val="1A2332"/>
-                          </a:solidFill>
-                          <a:latin typeface="Calibri"/>
-                        </a:rPr>
-                        <a:t>0</a:t>
-                      </a:r>
-                    </a:p>
-                  </a:txBody>
-                  <a:tcPr anchor="ctr" marL="73152">
-                    <a:solidFill>
-                      <a:srgbClr val="F1EBDF"/>
-                    </a:solidFill>
-                  </a:tcPr>
-                </a:tc>
-              </a:tr>
-            </a:tbl>
-          </a:graphicData>
-        </a:graphic>
-      </p:graphicFrame>
     </p:spTree>
   </p:cSld>
   <p:clrMapOvr>
